--- a/.Лекции/Методичка по накшатрам.pptx
+++ b/.Лекции/Методичка по накшатрам.pptx
@@ -1,14 +1,14 @@
 
 <file path=ppt/presentation.xml><?xml version="1.0" encoding="utf-8"?>
-<p:presentation xmlns:a="http://schemas.openxmlformats.org/drawingml/2006/main" xmlns:r="http://schemas.openxmlformats.org/officeDocument/2006/relationships" xmlns:p="http://schemas.openxmlformats.org/presentationml/2006/main" saveSubsetFonts="1">
+<p:presentation xmlns:a="http://schemas.openxmlformats.org/drawingml/2006/main" xmlns:r="http://schemas.openxmlformats.org/officeDocument/2006/relationships" xmlns:p="http://schemas.openxmlformats.org/presentationml/2006/main">
   <p:sldMasterIdLst>
-    <p:sldMasterId id="2147483968" r:id="rId1"/>
+    <p:sldMasterId id="2147483648" r:id="rId1"/>
   </p:sldMasterIdLst>
   <p:sldIdLst>
-    <p:sldId id="256" r:id="rId2"/>
-    <p:sldId id="261" r:id="rId3"/>
-    <p:sldId id="259" r:id="rId4"/>
-    <p:sldId id="262" r:id="rId5"/>
+    <p:sldId id="256" r:id="rId3"/>
+    <p:sldId id="261" r:id="rId4"/>
+    <p:sldId id="259" r:id="rId5"/>
+    <p:sldId id="262" r:id="rId6"/>
   </p:sldIdLst>
   <p:sldSz cx="12192000" cy="6858000"/>
   <p:notesSz cx="6858000" cy="9144000"/>
@@ -107,16 +107,11 @@
       </a:defRPr>
     </a:lvl9pPr>
   </p:defaultTextStyle>
-  <p:extLst>
-    <p:ext uri="{EFAFB233-063F-42B5-8137-9DF3F51BA10A}">
-      <p15:sldGuideLst xmlns:p15="http://schemas.microsoft.com/office/powerpoint/2012/main"/>
-    </p:ext>
-  </p:extLst>
 </p:presentation>
 </file>
 
 <file path=ppt/slideLayouts/slideLayout1.xml><?xml version="1.0" encoding="utf-8"?>
-<p:sldLayout xmlns:a="http://schemas.openxmlformats.org/drawingml/2006/main" xmlns:r="http://schemas.openxmlformats.org/officeDocument/2006/relationships" xmlns:p="http://schemas.openxmlformats.org/presentationml/2006/main" showMasterSp="0" type="title" preserve="1">
+<p:sldLayout xmlns:a="http://schemas.openxmlformats.org/drawingml/2006/main" xmlns:r="http://schemas.openxmlformats.org/officeDocument/2006/relationships" xmlns:p="http://schemas.openxmlformats.org/presentationml/2006/main" type="title" preserve="1" showMasterSp="0">
   <p:cSld name="Титульный слайд">
     <p:spTree>
       <p:nvGrpSpPr>
@@ -341,7 +336,6 @@
           <a:p>
             <a:fld id="{1E2D0E0F-ED9D-458D-B1A4-A7EFADFABF45}" type="datetimeFigureOut">
               <a:rPr lang="ru-RU" smtClean="0"/>
-              <a:t>25.04.2015</a:t>
             </a:fld>
             <a:endParaRPr lang="ru-RU"/>
           </a:p>
@@ -383,7 +377,6 @@
           <a:p>
             <a:fld id="{D469450B-3650-4FFE-9C68-A0877C04C1E3}" type="slidenum">
               <a:rPr lang="ru-RU" smtClean="0"/>
-              <a:t>‹#›</a:t>
             </a:fld>
             <a:endParaRPr lang="ru-RU"/>
           </a:p>
@@ -428,11 +421,6 @@
         </p:style>
       </p:cxnSp>
     </p:spTree>
-    <p:extLst>
-      <p:ext uri="{BB962C8B-B14F-4D97-AF65-F5344CB8AC3E}">
-        <p14:creationId xmlns:p14="http://schemas.microsoft.com/office/powerpoint/2010/main" val="2368052827"/>
-      </p:ext>
-    </p:extLst>
   </p:cSld>
   <p:clrMapOvr>
     <a:masterClrMapping/>
@@ -500,6 +488,7 @@
               <a:rPr lang="ru-RU" smtClean="0"/>
               <a:t>Образец текста</a:t>
             </a:r>
+            <a:endParaRPr lang="ru-RU" smtClean="0"/>
           </a:p>
           <a:p>
             <a:pPr lvl="1"/>
@@ -507,6 +496,7 @@
               <a:rPr lang="ru-RU" smtClean="0"/>
               <a:t>Второй уровень</a:t>
             </a:r>
+            <a:endParaRPr lang="ru-RU" smtClean="0"/>
           </a:p>
           <a:p>
             <a:pPr lvl="2"/>
@@ -514,6 +504,7 @@
               <a:rPr lang="ru-RU" smtClean="0"/>
               <a:t>Третий уровень</a:t>
             </a:r>
+            <a:endParaRPr lang="ru-RU" smtClean="0"/>
           </a:p>
           <a:p>
             <a:pPr lvl="3"/>
@@ -521,6 +512,7 @@
               <a:rPr lang="ru-RU" smtClean="0"/>
               <a:t>Четвертый уровень</a:t>
             </a:r>
+            <a:endParaRPr lang="ru-RU" smtClean="0"/>
           </a:p>
           <a:p>
             <a:pPr lvl="4"/>
@@ -549,7 +541,6 @@
           <a:p>
             <a:fld id="{1E2D0E0F-ED9D-458D-B1A4-A7EFADFABF45}" type="datetimeFigureOut">
               <a:rPr lang="ru-RU" smtClean="0"/>
-              <a:t>25.04.2015</a:t>
             </a:fld>
             <a:endParaRPr lang="ru-RU"/>
           </a:p>
@@ -591,18 +582,12 @@
           <a:p>
             <a:fld id="{D469450B-3650-4FFE-9C68-A0877C04C1E3}" type="slidenum">
               <a:rPr lang="ru-RU" smtClean="0"/>
-              <a:t>‹#›</a:t>
             </a:fld>
             <a:endParaRPr lang="ru-RU"/>
           </a:p>
         </p:txBody>
       </p:sp>
     </p:spTree>
-    <p:extLst>
-      <p:ext uri="{BB962C8B-B14F-4D97-AF65-F5344CB8AC3E}">
-        <p14:creationId xmlns:p14="http://schemas.microsoft.com/office/powerpoint/2010/main" val="2503381694"/>
-      </p:ext>
-    </p:extLst>
   </p:cSld>
   <p:clrMapOvr>
     <a:masterClrMapping/>
@@ -611,7 +596,7 @@
 </file>
 
 <file path=ppt/slideLayouts/slideLayout11.xml><?xml version="1.0" encoding="utf-8"?>
-<p:sldLayout xmlns:a="http://schemas.openxmlformats.org/drawingml/2006/main" xmlns:r="http://schemas.openxmlformats.org/officeDocument/2006/relationships" xmlns:p="http://schemas.openxmlformats.org/presentationml/2006/main" showMasterSp="0" type="vertTitleAndTx" preserve="1">
+<p:sldLayout xmlns:a="http://schemas.openxmlformats.org/drawingml/2006/main" xmlns:r="http://schemas.openxmlformats.org/officeDocument/2006/relationships" xmlns:p="http://schemas.openxmlformats.org/presentationml/2006/main" type="vertTitleAndTx" preserve="1" showMasterSp="0">
   <p:cSld name="Вертикальный заголовок и текст">
     <p:spTree>
       <p:nvGrpSpPr>
@@ -756,6 +741,7 @@
               <a:rPr lang="ru-RU" smtClean="0"/>
               <a:t>Образец текста</a:t>
             </a:r>
+            <a:endParaRPr lang="ru-RU" smtClean="0"/>
           </a:p>
           <a:p>
             <a:pPr lvl="1"/>
@@ -763,6 +749,7 @@
               <a:rPr lang="ru-RU" smtClean="0"/>
               <a:t>Второй уровень</a:t>
             </a:r>
+            <a:endParaRPr lang="ru-RU" smtClean="0"/>
           </a:p>
           <a:p>
             <a:pPr lvl="2"/>
@@ -770,6 +757,7 @@
               <a:rPr lang="ru-RU" smtClean="0"/>
               <a:t>Третий уровень</a:t>
             </a:r>
+            <a:endParaRPr lang="ru-RU" smtClean="0"/>
           </a:p>
           <a:p>
             <a:pPr lvl="3"/>
@@ -777,6 +765,7 @@
               <a:rPr lang="ru-RU" smtClean="0"/>
               <a:t>Четвертый уровень</a:t>
             </a:r>
+            <a:endParaRPr lang="ru-RU" smtClean="0"/>
           </a:p>
           <a:p>
             <a:pPr lvl="4"/>
@@ -805,7 +794,6 @@
           <a:p>
             <a:fld id="{1E2D0E0F-ED9D-458D-B1A4-A7EFADFABF45}" type="datetimeFigureOut">
               <a:rPr lang="ru-RU" smtClean="0"/>
-              <a:t>25.04.2015</a:t>
             </a:fld>
             <a:endParaRPr lang="ru-RU"/>
           </a:p>
@@ -847,18 +835,12 @@
           <a:p>
             <a:fld id="{D469450B-3650-4FFE-9C68-A0877C04C1E3}" type="slidenum">
               <a:rPr lang="ru-RU" smtClean="0"/>
-              <a:t>‹#›</a:t>
             </a:fld>
             <a:endParaRPr lang="ru-RU"/>
           </a:p>
         </p:txBody>
       </p:sp>
     </p:spTree>
-    <p:extLst>
-      <p:ext uri="{BB962C8B-B14F-4D97-AF65-F5344CB8AC3E}">
-        <p14:creationId xmlns:p14="http://schemas.microsoft.com/office/powerpoint/2010/main" val="1192601857"/>
-      </p:ext>
-    </p:extLst>
   </p:cSld>
   <p:clrMapOvr>
     <a:masterClrMapping/>
@@ -926,6 +908,7 @@
               <a:rPr lang="ru-RU" smtClean="0"/>
               <a:t>Образец текста</a:t>
             </a:r>
+            <a:endParaRPr lang="ru-RU" smtClean="0"/>
           </a:p>
           <a:p>
             <a:pPr lvl="1"/>
@@ -933,6 +916,7 @@
               <a:rPr lang="ru-RU" smtClean="0"/>
               <a:t>Второй уровень</a:t>
             </a:r>
+            <a:endParaRPr lang="ru-RU" smtClean="0"/>
           </a:p>
           <a:p>
             <a:pPr lvl="2"/>
@@ -940,6 +924,7 @@
               <a:rPr lang="ru-RU" smtClean="0"/>
               <a:t>Третий уровень</a:t>
             </a:r>
+            <a:endParaRPr lang="ru-RU" smtClean="0"/>
           </a:p>
           <a:p>
             <a:pPr lvl="3"/>
@@ -947,6 +932,7 @@
               <a:rPr lang="ru-RU" smtClean="0"/>
               <a:t>Четвертый уровень</a:t>
             </a:r>
+            <a:endParaRPr lang="ru-RU" smtClean="0"/>
           </a:p>
           <a:p>
             <a:pPr lvl="4"/>
@@ -975,7 +961,6 @@
           <a:p>
             <a:fld id="{1E2D0E0F-ED9D-458D-B1A4-A7EFADFABF45}" type="datetimeFigureOut">
               <a:rPr lang="ru-RU" smtClean="0"/>
-              <a:t>25.04.2015</a:t>
             </a:fld>
             <a:endParaRPr lang="ru-RU"/>
           </a:p>
@@ -1017,18 +1002,12 @@
           <a:p>
             <a:fld id="{D469450B-3650-4FFE-9C68-A0877C04C1E3}" type="slidenum">
               <a:rPr lang="ru-RU" smtClean="0"/>
-              <a:t>‹#›</a:t>
             </a:fld>
             <a:endParaRPr lang="ru-RU"/>
           </a:p>
         </p:txBody>
       </p:sp>
     </p:spTree>
-    <p:extLst>
-      <p:ext uri="{BB962C8B-B14F-4D97-AF65-F5344CB8AC3E}">
-        <p14:creationId xmlns:p14="http://schemas.microsoft.com/office/powerpoint/2010/main" val="3571523867"/>
-      </p:ext>
-    </p:extLst>
   </p:cSld>
   <p:clrMapOvr>
     <a:masterClrMapping/>
@@ -1037,7 +1016,7 @@
 </file>
 
 <file path=ppt/slideLayouts/slideLayout3.xml><?xml version="1.0" encoding="utf-8"?>
-<p:sldLayout xmlns:a="http://schemas.openxmlformats.org/drawingml/2006/main" xmlns:r="http://schemas.openxmlformats.org/officeDocument/2006/relationships" xmlns:p="http://schemas.openxmlformats.org/presentationml/2006/main" showMasterSp="0" type="secHead" preserve="1">
+<p:sldLayout xmlns:a="http://schemas.openxmlformats.org/drawingml/2006/main" xmlns:r="http://schemas.openxmlformats.org/officeDocument/2006/relationships" xmlns:p="http://schemas.openxmlformats.org/presentationml/2006/main" type="secHead" preserve="1" showMasterSp="0">
   <p:cSld name="Заголовок раздела">
     <p:bg>
       <p:bgPr>
@@ -1298,6 +1277,7 @@
               <a:rPr lang="ru-RU" smtClean="0"/>
               <a:t>Образец текста</a:t>
             </a:r>
+            <a:endParaRPr lang="ru-RU" smtClean="0"/>
           </a:p>
         </p:txBody>
       </p:sp>
@@ -1318,7 +1298,6 @@
           <a:p>
             <a:fld id="{1E2D0E0F-ED9D-458D-B1A4-A7EFADFABF45}" type="datetimeFigureOut">
               <a:rPr lang="ru-RU" smtClean="0"/>
-              <a:t>25.04.2015</a:t>
             </a:fld>
             <a:endParaRPr lang="ru-RU"/>
           </a:p>
@@ -1360,7 +1339,6 @@
           <a:p>
             <a:fld id="{D469450B-3650-4FFE-9C68-A0877C04C1E3}" type="slidenum">
               <a:rPr lang="ru-RU" smtClean="0"/>
-              <a:t>‹#›</a:t>
             </a:fld>
             <a:endParaRPr lang="ru-RU"/>
           </a:p>
@@ -1405,11 +1383,6 @@
         </p:style>
       </p:cxnSp>
     </p:spTree>
-    <p:extLst>
-      <p:ext uri="{BB962C8B-B14F-4D97-AF65-F5344CB8AC3E}">
-        <p14:creationId xmlns:p14="http://schemas.microsoft.com/office/powerpoint/2010/main" val="4057890246"/>
-      </p:ext>
-    </p:extLst>
   </p:cSld>
   <p:clrMapOvr>
     <a:masterClrMapping/>
@@ -1487,6 +1460,7 @@
               <a:rPr lang="ru-RU" smtClean="0"/>
               <a:t>Образец текста</a:t>
             </a:r>
+            <a:endParaRPr lang="ru-RU" smtClean="0"/>
           </a:p>
           <a:p>
             <a:pPr lvl="1"/>
@@ -1494,6 +1468,7 @@
               <a:rPr lang="ru-RU" smtClean="0"/>
               <a:t>Второй уровень</a:t>
             </a:r>
+            <a:endParaRPr lang="ru-RU" smtClean="0"/>
           </a:p>
           <a:p>
             <a:pPr lvl="2"/>
@@ -1501,6 +1476,7 @@
               <a:rPr lang="ru-RU" smtClean="0"/>
               <a:t>Третий уровень</a:t>
             </a:r>
+            <a:endParaRPr lang="ru-RU" smtClean="0"/>
           </a:p>
           <a:p>
             <a:pPr lvl="3"/>
@@ -1508,6 +1484,7 @@
               <a:rPr lang="ru-RU" smtClean="0"/>
               <a:t>Четвертый уровень</a:t>
             </a:r>
+            <a:endParaRPr lang="ru-RU" smtClean="0"/>
           </a:p>
           <a:p>
             <a:pPr lvl="4"/>
@@ -1544,6 +1521,7 @@
               <a:rPr lang="ru-RU" smtClean="0"/>
               <a:t>Образец текста</a:t>
             </a:r>
+            <a:endParaRPr lang="ru-RU" smtClean="0"/>
           </a:p>
           <a:p>
             <a:pPr lvl="1"/>
@@ -1551,6 +1529,7 @@
               <a:rPr lang="ru-RU" smtClean="0"/>
               <a:t>Второй уровень</a:t>
             </a:r>
+            <a:endParaRPr lang="ru-RU" smtClean="0"/>
           </a:p>
           <a:p>
             <a:pPr lvl="2"/>
@@ -1558,6 +1537,7 @@
               <a:rPr lang="ru-RU" smtClean="0"/>
               <a:t>Третий уровень</a:t>
             </a:r>
+            <a:endParaRPr lang="ru-RU" smtClean="0"/>
           </a:p>
           <a:p>
             <a:pPr lvl="3"/>
@@ -1565,6 +1545,7 @@
               <a:rPr lang="ru-RU" smtClean="0"/>
               <a:t>Четвертый уровень</a:t>
             </a:r>
+            <a:endParaRPr lang="ru-RU" smtClean="0"/>
           </a:p>
           <a:p>
             <a:pPr lvl="4"/>
@@ -1593,7 +1574,6 @@
           <a:p>
             <a:fld id="{1E2D0E0F-ED9D-458D-B1A4-A7EFADFABF45}" type="datetimeFigureOut">
               <a:rPr lang="ru-RU" smtClean="0"/>
-              <a:t>25.04.2015</a:t>
             </a:fld>
             <a:endParaRPr lang="ru-RU"/>
           </a:p>
@@ -1635,18 +1615,12 @@
           <a:p>
             <a:fld id="{D469450B-3650-4FFE-9C68-A0877C04C1E3}" type="slidenum">
               <a:rPr lang="ru-RU" smtClean="0"/>
-              <a:t>‹#›</a:t>
             </a:fld>
             <a:endParaRPr lang="ru-RU"/>
           </a:p>
         </p:txBody>
       </p:sp>
     </p:spTree>
-    <p:extLst>
-      <p:ext uri="{BB962C8B-B14F-4D97-AF65-F5344CB8AC3E}">
-        <p14:creationId xmlns:p14="http://schemas.microsoft.com/office/powerpoint/2010/main" val="2607215998"/>
-      </p:ext>
-    </p:extLst>
   </p:cSld>
   <p:clrMapOvr>
     <a:masterClrMapping/>
@@ -1767,6 +1741,7 @@
               <a:rPr lang="ru-RU" smtClean="0"/>
               <a:t>Образец текста</a:t>
             </a:r>
+            <a:endParaRPr lang="ru-RU" smtClean="0"/>
           </a:p>
         </p:txBody>
       </p:sp>
@@ -1795,6 +1770,7 @@
               <a:rPr lang="ru-RU" smtClean="0"/>
               <a:t>Образец текста</a:t>
             </a:r>
+            <a:endParaRPr lang="ru-RU" smtClean="0"/>
           </a:p>
           <a:p>
             <a:pPr lvl="1"/>
@@ -1802,6 +1778,7 @@
               <a:rPr lang="ru-RU" smtClean="0"/>
               <a:t>Второй уровень</a:t>
             </a:r>
+            <a:endParaRPr lang="ru-RU" smtClean="0"/>
           </a:p>
           <a:p>
             <a:pPr lvl="2"/>
@@ -1809,6 +1786,7 @@
               <a:rPr lang="ru-RU" smtClean="0"/>
               <a:t>Третий уровень</a:t>
             </a:r>
+            <a:endParaRPr lang="ru-RU" smtClean="0"/>
           </a:p>
           <a:p>
             <a:pPr lvl="3"/>
@@ -1816,6 +1794,7 @@
               <a:rPr lang="ru-RU" smtClean="0"/>
               <a:t>Четвертый уровень</a:t>
             </a:r>
+            <a:endParaRPr lang="ru-RU" smtClean="0"/>
           </a:p>
           <a:p>
             <a:pPr lvl="4"/>
@@ -1895,6 +1874,7 @@
               <a:rPr lang="ru-RU" smtClean="0"/>
               <a:t>Образец текста</a:t>
             </a:r>
+            <a:endParaRPr lang="ru-RU" smtClean="0"/>
           </a:p>
         </p:txBody>
       </p:sp>
@@ -1923,6 +1903,7 @@
               <a:rPr lang="ru-RU" smtClean="0"/>
               <a:t>Образец текста</a:t>
             </a:r>
+            <a:endParaRPr lang="ru-RU" smtClean="0"/>
           </a:p>
           <a:p>
             <a:pPr lvl="1"/>
@@ -1930,6 +1911,7 @@
               <a:rPr lang="ru-RU" smtClean="0"/>
               <a:t>Второй уровень</a:t>
             </a:r>
+            <a:endParaRPr lang="ru-RU" smtClean="0"/>
           </a:p>
           <a:p>
             <a:pPr lvl="2"/>
@@ -1937,6 +1919,7 @@
               <a:rPr lang="ru-RU" smtClean="0"/>
               <a:t>Третий уровень</a:t>
             </a:r>
+            <a:endParaRPr lang="ru-RU" smtClean="0"/>
           </a:p>
           <a:p>
             <a:pPr lvl="3"/>
@@ -1944,6 +1927,7 @@
               <a:rPr lang="ru-RU" smtClean="0"/>
               <a:t>Четвертый уровень</a:t>
             </a:r>
+            <a:endParaRPr lang="ru-RU" smtClean="0"/>
           </a:p>
           <a:p>
             <a:pPr lvl="4"/>
@@ -1972,7 +1956,6 @@
           <a:p>
             <a:fld id="{1E2D0E0F-ED9D-458D-B1A4-A7EFADFABF45}" type="datetimeFigureOut">
               <a:rPr lang="ru-RU" smtClean="0"/>
-              <a:t>25.04.2015</a:t>
             </a:fld>
             <a:endParaRPr lang="ru-RU"/>
           </a:p>
@@ -2014,18 +1997,12 @@
           <a:p>
             <a:fld id="{D469450B-3650-4FFE-9C68-A0877C04C1E3}" type="slidenum">
               <a:rPr lang="ru-RU" smtClean="0"/>
-              <a:t>‹#›</a:t>
             </a:fld>
             <a:endParaRPr lang="ru-RU"/>
           </a:p>
         </p:txBody>
       </p:sp>
     </p:spTree>
-    <p:extLst>
-      <p:ext uri="{BB962C8B-B14F-4D97-AF65-F5344CB8AC3E}">
-        <p14:creationId xmlns:p14="http://schemas.microsoft.com/office/powerpoint/2010/main" val="1597526680"/>
-      </p:ext>
-    </p:extLst>
   </p:cSld>
   <p:clrMapOvr>
     <a:masterClrMapping/>
@@ -2090,7 +2067,6 @@
           <a:p>
             <a:fld id="{1E2D0E0F-ED9D-458D-B1A4-A7EFADFABF45}" type="datetimeFigureOut">
               <a:rPr lang="ru-RU" smtClean="0"/>
-              <a:t>25.04.2015</a:t>
             </a:fld>
             <a:endParaRPr lang="ru-RU"/>
           </a:p>
@@ -2132,18 +2108,12 @@
           <a:p>
             <a:fld id="{D469450B-3650-4FFE-9C68-A0877C04C1E3}" type="slidenum">
               <a:rPr lang="ru-RU" smtClean="0"/>
-              <a:t>‹#›</a:t>
             </a:fld>
             <a:endParaRPr lang="ru-RU"/>
           </a:p>
         </p:txBody>
       </p:sp>
     </p:spTree>
-    <p:extLst>
-      <p:ext uri="{BB962C8B-B14F-4D97-AF65-F5344CB8AC3E}">
-        <p14:creationId xmlns:p14="http://schemas.microsoft.com/office/powerpoint/2010/main" val="2366909677"/>
-      </p:ext>
-    </p:extLst>
   </p:cSld>
   <p:clrMapOvr>
     <a:masterClrMapping/>
@@ -2152,7 +2122,7 @@
 </file>
 
 <file path=ppt/slideLayouts/slideLayout7.xml><?xml version="1.0" encoding="utf-8"?>
-<p:sldLayout xmlns:a="http://schemas.openxmlformats.org/drawingml/2006/main" xmlns:r="http://schemas.openxmlformats.org/officeDocument/2006/relationships" xmlns:p="http://schemas.openxmlformats.org/presentationml/2006/main" showMasterSp="0" type="blank" preserve="1">
+<p:sldLayout xmlns:a="http://schemas.openxmlformats.org/drawingml/2006/main" xmlns:r="http://schemas.openxmlformats.org/officeDocument/2006/relationships" xmlns:p="http://schemas.openxmlformats.org/presentationml/2006/main" type="blank" preserve="1" showMasterSp="0">
   <p:cSld name="Пустой слайд">
     <p:spTree>
       <p:nvGrpSpPr>
@@ -2261,7 +2231,6 @@
           <a:p>
             <a:fld id="{1E2D0E0F-ED9D-458D-B1A4-A7EFADFABF45}" type="datetimeFigureOut">
               <a:rPr lang="ru-RU" smtClean="0"/>
-              <a:t>25.04.2015</a:t>
             </a:fld>
             <a:endParaRPr lang="ru-RU"/>
           </a:p>
@@ -2311,18 +2280,12 @@
           <a:p>
             <a:fld id="{D469450B-3650-4FFE-9C68-A0877C04C1E3}" type="slidenum">
               <a:rPr lang="ru-RU" smtClean="0"/>
-              <a:t>‹#›</a:t>
             </a:fld>
             <a:endParaRPr lang="ru-RU"/>
           </a:p>
         </p:txBody>
       </p:sp>
     </p:spTree>
-    <p:extLst>
-      <p:ext uri="{BB962C8B-B14F-4D97-AF65-F5344CB8AC3E}">
-        <p14:creationId xmlns:p14="http://schemas.microsoft.com/office/powerpoint/2010/main" val="2527367130"/>
-      </p:ext>
-    </p:extLst>
   </p:cSld>
   <p:clrMapOvr>
     <a:masterClrMapping/>
@@ -2331,7 +2294,7 @@
 </file>
 
 <file path=ppt/slideLayouts/slideLayout8.xml><?xml version="1.0" encoding="utf-8"?>
-<p:sldLayout xmlns:a="http://schemas.openxmlformats.org/drawingml/2006/main" xmlns:r="http://schemas.openxmlformats.org/officeDocument/2006/relationships" xmlns:p="http://schemas.openxmlformats.org/presentationml/2006/main" showMasterSp="0" type="objTx" preserve="1">
+<p:sldLayout xmlns:a="http://schemas.openxmlformats.org/drawingml/2006/main" xmlns:r="http://schemas.openxmlformats.org/officeDocument/2006/relationships" xmlns:p="http://schemas.openxmlformats.org/presentationml/2006/main" type="objTx" preserve="1" showMasterSp="0">
   <p:cSld name="Объект с подписью">
     <p:spTree>
       <p:nvGrpSpPr>
@@ -2486,6 +2449,7 @@
               <a:rPr lang="ru-RU" smtClean="0"/>
               <a:t>Образец текста</a:t>
             </a:r>
+            <a:endParaRPr lang="ru-RU" smtClean="0"/>
           </a:p>
           <a:p>
             <a:pPr lvl="1"/>
@@ -2493,6 +2457,7 @@
               <a:rPr lang="ru-RU" smtClean="0"/>
               <a:t>Второй уровень</a:t>
             </a:r>
+            <a:endParaRPr lang="ru-RU" smtClean="0"/>
           </a:p>
           <a:p>
             <a:pPr lvl="2"/>
@@ -2500,6 +2465,7 @@
               <a:rPr lang="ru-RU" smtClean="0"/>
               <a:t>Третий уровень</a:t>
             </a:r>
+            <a:endParaRPr lang="ru-RU" smtClean="0"/>
           </a:p>
           <a:p>
             <a:pPr lvl="3"/>
@@ -2507,6 +2473,7 @@
               <a:rPr lang="ru-RU" smtClean="0"/>
               <a:t>Четвертый уровень</a:t>
             </a:r>
+            <a:endParaRPr lang="ru-RU" smtClean="0"/>
           </a:p>
           <a:p>
             <a:pPr lvl="4"/>
@@ -2586,6 +2553,7 @@
               <a:rPr lang="ru-RU" smtClean="0"/>
               <a:t>Образец текста</a:t>
             </a:r>
+            <a:endParaRPr lang="ru-RU" smtClean="0"/>
           </a:p>
         </p:txBody>
       </p:sp>
@@ -2615,7 +2583,6 @@
           <a:p>
             <a:fld id="{1E2D0E0F-ED9D-458D-B1A4-A7EFADFABF45}" type="datetimeFigureOut">
               <a:rPr lang="ru-RU" smtClean="0"/>
-              <a:t>25.04.2015</a:t>
             </a:fld>
             <a:endParaRPr lang="ru-RU"/>
           </a:p>
@@ -2678,18 +2645,12 @@
           <a:p>
             <a:fld id="{D469450B-3650-4FFE-9C68-A0877C04C1E3}" type="slidenum">
               <a:rPr lang="ru-RU" smtClean="0"/>
-              <a:t>‹#›</a:t>
             </a:fld>
             <a:endParaRPr lang="ru-RU"/>
           </a:p>
         </p:txBody>
       </p:sp>
     </p:spTree>
-    <p:extLst>
-      <p:ext uri="{BB962C8B-B14F-4D97-AF65-F5344CB8AC3E}">
-        <p14:creationId xmlns:p14="http://schemas.microsoft.com/office/powerpoint/2010/main" val="457794557"/>
-      </p:ext>
-    </p:extLst>
   </p:cSld>
   <p:clrMapOvr>
     <a:masterClrMapping/>
@@ -2698,7 +2659,7 @@
 </file>
 
 <file path=ppt/slideLayouts/slideLayout9.xml><?xml version="1.0" encoding="utf-8"?>
-<p:sldLayout xmlns:a="http://schemas.openxmlformats.org/drawingml/2006/main" xmlns:r="http://schemas.openxmlformats.org/officeDocument/2006/relationships" xmlns:p="http://schemas.openxmlformats.org/presentationml/2006/main" showMasterSp="0" type="picTx" preserve="1">
+<p:sldLayout xmlns:a="http://schemas.openxmlformats.org/drawingml/2006/main" xmlns:r="http://schemas.openxmlformats.org/officeDocument/2006/relationships" xmlns:p="http://schemas.openxmlformats.org/presentationml/2006/main" type="picTx" preserve="1" showMasterSp="0">
   <p:cSld name="Рисунок с подписью">
     <p:spTree>
       <p:nvGrpSpPr>
@@ -2972,6 +2933,7 @@
               <a:rPr lang="ru-RU" smtClean="0"/>
               <a:t>Образец текста</a:t>
             </a:r>
+            <a:endParaRPr lang="ru-RU" smtClean="0"/>
           </a:p>
         </p:txBody>
       </p:sp>
@@ -2992,7 +2954,6 @@
           <a:p>
             <a:fld id="{1E2D0E0F-ED9D-458D-B1A4-A7EFADFABF45}" type="datetimeFigureOut">
               <a:rPr lang="ru-RU" smtClean="0"/>
-              <a:t>25.04.2015</a:t>
             </a:fld>
             <a:endParaRPr lang="ru-RU"/>
           </a:p>
@@ -3034,18 +2995,12 @@
           <a:p>
             <a:fld id="{D469450B-3650-4FFE-9C68-A0877C04C1E3}" type="slidenum">
               <a:rPr lang="ru-RU" smtClean="0"/>
-              <a:t>‹#›</a:t>
             </a:fld>
             <a:endParaRPr lang="ru-RU"/>
           </a:p>
         </p:txBody>
       </p:sp>
     </p:spTree>
-    <p:extLst>
-      <p:ext uri="{BB962C8B-B14F-4D97-AF65-F5344CB8AC3E}">
-        <p14:creationId xmlns:p14="http://schemas.microsoft.com/office/powerpoint/2010/main" val="2039418425"/>
-      </p:ext>
-    </p:extLst>
   </p:cSld>
   <p:clrMapOvr>
     <a:masterClrMapping/>
@@ -3214,6 +3169,7 @@
               <a:rPr lang="ru-RU" smtClean="0"/>
               <a:t>Образец текста</a:t>
             </a:r>
+            <a:endParaRPr lang="ru-RU" smtClean="0"/>
           </a:p>
           <a:p>
             <a:pPr lvl="1"/>
@@ -3221,6 +3177,7 @@
               <a:rPr lang="ru-RU" smtClean="0"/>
               <a:t>Второй уровень</a:t>
             </a:r>
+            <a:endParaRPr lang="ru-RU" smtClean="0"/>
           </a:p>
           <a:p>
             <a:pPr lvl="2"/>
@@ -3228,6 +3185,7 @@
               <a:rPr lang="ru-RU" smtClean="0"/>
               <a:t>Третий уровень</a:t>
             </a:r>
+            <a:endParaRPr lang="ru-RU" smtClean="0"/>
           </a:p>
           <a:p>
             <a:pPr lvl="3"/>
@@ -3235,6 +3193,7 @@
               <a:rPr lang="ru-RU" smtClean="0"/>
               <a:t>Четвертый уровень</a:t>
             </a:r>
+            <a:endParaRPr lang="ru-RU" smtClean="0"/>
           </a:p>
           <a:p>
             <a:pPr lvl="4"/>
@@ -3279,7 +3238,6 @@
           <a:p>
             <a:fld id="{1E2D0E0F-ED9D-458D-B1A4-A7EFADFABF45}" type="datetimeFigureOut">
               <a:rPr lang="ru-RU" smtClean="0"/>
-              <a:t>25.04.2015</a:t>
             </a:fld>
             <a:endParaRPr lang="ru-RU"/>
           </a:p>
@@ -3353,7 +3311,6 @@
           <a:p>
             <a:fld id="{D469450B-3650-4FFE-9C68-A0877C04C1E3}" type="slidenum">
               <a:rPr lang="ru-RU" smtClean="0"/>
-              <a:t>‹#›</a:t>
             </a:fld>
             <a:endParaRPr lang="ru-RU"/>
           </a:p>
@@ -3398,25 +3355,20 @@
         </p:style>
       </p:cxnSp>
     </p:spTree>
-    <p:extLst>
-      <p:ext uri="{BB962C8B-B14F-4D97-AF65-F5344CB8AC3E}">
-        <p14:creationId xmlns:p14="http://schemas.microsoft.com/office/powerpoint/2010/main" val="270945428"/>
-      </p:ext>
-    </p:extLst>
   </p:cSld>
   <p:clrMap bg1="lt1" tx1="dk1" bg2="lt2" tx2="dk2" accent1="accent1" accent2="accent2" accent3="accent3" accent4="accent4" accent5="accent5" accent6="accent6" hlink="hlink" folHlink="folHlink"/>
   <p:sldLayoutIdLst>
-    <p:sldLayoutId id="2147483969" r:id="rId1"/>
-    <p:sldLayoutId id="2147483970" r:id="rId2"/>
-    <p:sldLayoutId id="2147483971" r:id="rId3"/>
-    <p:sldLayoutId id="2147483972" r:id="rId4"/>
-    <p:sldLayoutId id="2147483973" r:id="rId5"/>
-    <p:sldLayoutId id="2147483974" r:id="rId6"/>
-    <p:sldLayoutId id="2147483975" r:id="rId7"/>
-    <p:sldLayoutId id="2147483976" r:id="rId8"/>
-    <p:sldLayoutId id="2147483977" r:id="rId9"/>
-    <p:sldLayoutId id="2147483978" r:id="rId10"/>
-    <p:sldLayoutId id="2147483979" r:id="rId11"/>
+    <p:sldLayoutId id="2147483649" r:id="rId1"/>
+    <p:sldLayoutId id="2147483650" r:id="rId2"/>
+    <p:sldLayoutId id="2147483651" r:id="rId3"/>
+    <p:sldLayoutId id="2147483652" r:id="rId4"/>
+    <p:sldLayoutId id="2147483653" r:id="rId5"/>
+    <p:sldLayoutId id="2147483654" r:id="rId6"/>
+    <p:sldLayoutId id="2147483655" r:id="rId7"/>
+    <p:sldLayoutId id="2147483656" r:id="rId8"/>
+    <p:sldLayoutId id="2147483657" r:id="rId9"/>
+    <p:sldLayoutId id="2147483658" r:id="rId10"/>
+    <p:sldLayoutId id="2147483659" r:id="rId11"/>
   </p:sldLayoutIdLst>
   <p:txStyles>
     <p:titleStyle>
@@ -3470,7 +3422,7 @@
           <a:cs typeface="+mn-cs"/>
         </a:defRPr>
       </a:lvl1pPr>
-      <a:lvl2pPr marL="384048" indent="-182880" algn="l" defTabSz="914400" rtl="0" eaLnBrk="1" latinLnBrk="0" hangingPunct="1">
+      <a:lvl2pPr marL="384175" indent="-182880" algn="l" defTabSz="914400" rtl="0" eaLnBrk="1" latinLnBrk="0" hangingPunct="1">
         <a:lnSpc>
           <a:spcPct val="90000"/>
         </a:lnSpc>
@@ -3483,7 +3435,7 @@
         <a:buClr>
           <a:schemeClr val="accent1"/>
         </a:buClr>
-        <a:buFont typeface="Calibri" pitchFamily="34" charset="0"/>
+        <a:buFont typeface="Calibri" panose="020F0502020204030204" pitchFamily="34" charset="0"/>
         <a:buChar char="◦"/>
         <a:defRPr sz="1800" kern="1200">
           <a:solidFill>
@@ -3497,7 +3449,7 @@
           <a:cs typeface="+mn-cs"/>
         </a:defRPr>
       </a:lvl2pPr>
-      <a:lvl3pPr marL="566928" indent="-182880" algn="l" defTabSz="914400" rtl="0" eaLnBrk="1" latinLnBrk="0" hangingPunct="1">
+      <a:lvl3pPr marL="567055" indent="-182880" algn="l" defTabSz="914400" rtl="0" eaLnBrk="1" latinLnBrk="0" hangingPunct="1">
         <a:lnSpc>
           <a:spcPct val="90000"/>
         </a:lnSpc>
@@ -3510,7 +3462,7 @@
         <a:buClr>
           <a:schemeClr val="accent1"/>
         </a:buClr>
-        <a:buFont typeface="Calibri" pitchFamily="34" charset="0"/>
+        <a:buFont typeface="Calibri" panose="020F0502020204030204" pitchFamily="34" charset="0"/>
         <a:buChar char="◦"/>
         <a:defRPr sz="1400" kern="1200">
           <a:solidFill>
@@ -3524,7 +3476,7 @@
           <a:cs typeface="+mn-cs"/>
         </a:defRPr>
       </a:lvl3pPr>
-      <a:lvl4pPr marL="749808" indent="-182880" algn="l" defTabSz="914400" rtl="0" eaLnBrk="1" latinLnBrk="0" hangingPunct="1">
+      <a:lvl4pPr marL="749935" indent="-182880" algn="l" defTabSz="914400" rtl="0" eaLnBrk="1" latinLnBrk="0" hangingPunct="1">
         <a:lnSpc>
           <a:spcPct val="90000"/>
         </a:lnSpc>
@@ -3537,7 +3489,7 @@
         <a:buClr>
           <a:schemeClr val="accent1"/>
         </a:buClr>
-        <a:buFont typeface="Calibri" pitchFamily="34" charset="0"/>
+        <a:buFont typeface="Calibri" panose="020F0502020204030204" pitchFamily="34" charset="0"/>
         <a:buChar char="◦"/>
         <a:defRPr sz="1400" kern="1200">
           <a:solidFill>
@@ -3551,7 +3503,7 @@
           <a:cs typeface="+mn-cs"/>
         </a:defRPr>
       </a:lvl4pPr>
-      <a:lvl5pPr marL="932688" indent="-182880" algn="l" defTabSz="914400" rtl="0" eaLnBrk="1" latinLnBrk="0" hangingPunct="1">
+      <a:lvl5pPr marL="932815" indent="-182880" algn="l" defTabSz="914400" rtl="0" eaLnBrk="1" latinLnBrk="0" hangingPunct="1">
         <a:lnSpc>
           <a:spcPct val="90000"/>
         </a:lnSpc>
@@ -3564,7 +3516,7 @@
         <a:buClr>
           <a:schemeClr val="accent1"/>
         </a:buClr>
-        <a:buFont typeface="Calibri" pitchFamily="34" charset="0"/>
+        <a:buFont typeface="Calibri" panose="020F0502020204030204" pitchFamily="34" charset="0"/>
         <a:buChar char="◦"/>
         <a:defRPr sz="1400" kern="1200">
           <a:solidFill>
@@ -3578,7 +3530,7 @@
           <a:cs typeface="+mn-cs"/>
         </a:defRPr>
       </a:lvl5pPr>
-      <a:lvl6pPr marL="1100000" indent="-228600" algn="l" defTabSz="914400" rtl="0" eaLnBrk="1" latinLnBrk="0" hangingPunct="1">
+      <a:lvl6pPr marL="1099820" indent="-228600" algn="l" defTabSz="914400" rtl="0" eaLnBrk="1" latinLnBrk="0" hangingPunct="1">
         <a:lnSpc>
           <a:spcPct val="90000"/>
         </a:lnSpc>
@@ -3591,7 +3543,7 @@
         <a:buClr>
           <a:schemeClr val="accent1"/>
         </a:buClr>
-        <a:buFont typeface="Calibri" pitchFamily="34" charset="0"/>
+        <a:buFont typeface="Calibri" panose="020F0502020204030204" pitchFamily="34" charset="0"/>
         <a:buChar char="◦"/>
         <a:defRPr sz="1400" kern="1200">
           <a:solidFill>
@@ -3605,7 +3557,7 @@
           <a:cs typeface="+mn-cs"/>
         </a:defRPr>
       </a:lvl6pPr>
-      <a:lvl7pPr marL="1300000" indent="-228600" algn="l" defTabSz="914400" rtl="0" eaLnBrk="1" latinLnBrk="0" hangingPunct="1">
+      <a:lvl7pPr marL="1299845" indent="-228600" algn="l" defTabSz="914400" rtl="0" eaLnBrk="1" latinLnBrk="0" hangingPunct="1">
         <a:lnSpc>
           <a:spcPct val="90000"/>
         </a:lnSpc>
@@ -3618,7 +3570,7 @@
         <a:buClr>
           <a:schemeClr val="accent1"/>
         </a:buClr>
-        <a:buFont typeface="Calibri" pitchFamily="34" charset="0"/>
+        <a:buFont typeface="Calibri" panose="020F0502020204030204" pitchFamily="34" charset="0"/>
         <a:buChar char="◦"/>
         <a:defRPr sz="1400" kern="1200">
           <a:solidFill>
@@ -3632,7 +3584,7 @@
           <a:cs typeface="+mn-cs"/>
         </a:defRPr>
       </a:lvl7pPr>
-      <a:lvl8pPr marL="1500000" indent="-228600" algn="l" defTabSz="914400" rtl="0" eaLnBrk="1" latinLnBrk="0" hangingPunct="1">
+      <a:lvl8pPr marL="1499870" indent="-228600" algn="l" defTabSz="914400" rtl="0" eaLnBrk="1" latinLnBrk="0" hangingPunct="1">
         <a:lnSpc>
           <a:spcPct val="90000"/>
         </a:lnSpc>
@@ -3645,7 +3597,7 @@
         <a:buClr>
           <a:schemeClr val="accent1"/>
         </a:buClr>
-        <a:buFont typeface="Calibri" pitchFamily="34" charset="0"/>
+        <a:buFont typeface="Calibri" panose="020F0502020204030204" pitchFamily="34" charset="0"/>
         <a:buChar char="◦"/>
         <a:defRPr sz="1400" kern="1200">
           <a:solidFill>
@@ -3659,7 +3611,7 @@
           <a:cs typeface="+mn-cs"/>
         </a:defRPr>
       </a:lvl8pPr>
-      <a:lvl9pPr marL="1700000" indent="-228600" algn="l" defTabSz="914400" rtl="0" eaLnBrk="1" latinLnBrk="0" hangingPunct="1">
+      <a:lvl9pPr marL="1699895" indent="-228600" algn="l" defTabSz="914400" rtl="0" eaLnBrk="1" latinLnBrk="0" hangingPunct="1">
         <a:lnSpc>
           <a:spcPct val="90000"/>
         </a:lnSpc>
@@ -3672,7 +3624,7 @@
         <a:buClr>
           <a:schemeClr val="accent1"/>
         </a:buClr>
-        <a:buFont typeface="Calibri" pitchFamily="34" charset="0"/>
+        <a:buFont typeface="Calibri" panose="020F0502020204030204" pitchFamily="34" charset="0"/>
         <a:buChar char="◦"/>
         <a:defRPr sz="1400" kern="1200">
           <a:solidFill>
@@ -3809,13 +3761,7 @@
           <p:cNvGraphicFramePr>
             <a:graphicFrameLocks noGrp="1"/>
           </p:cNvGraphicFramePr>
-          <p:nvPr>
-            <p:extLst>
-              <p:ext uri="{D42A27DB-BD31-4B8C-83A1-F6EECF244321}">
-                <p14:modId xmlns:p14="http://schemas.microsoft.com/office/powerpoint/2010/main" val="3811093847"/>
-              </p:ext>
-            </p:extLst>
-          </p:nvPr>
+          <p:nvPr/>
         </p:nvGraphicFramePr>
         <p:xfrm>
           <a:off x="0" y="0"/>
@@ -3828,8 +3774,8 @@
                 <a:tableStyleId>{10A1B5D5-9B99-4C35-A422-299274C87663}</a:tableStyleId>
               </a:tblPr>
               <a:tblGrid>
-                <a:gridCol w="3685936"/>
-                <a:gridCol w="1740632"/>
+                <a:gridCol w="1924050"/>
+                <a:gridCol w="3502518"/>
                 <a:gridCol w="3505264"/>
                 <a:gridCol w="3260168"/>
               </a:tblGrid>
@@ -3839,32 +3785,27 @@
                     <a:bodyPr/>
                     <a:lstStyle/>
                     <a:p>
-                      <a:pPr algn="ctr">
-                        <a:lnSpc>
-                          <a:spcPct val="107000"/>
-                        </a:lnSpc>
-                        <a:spcAft>
-                          <a:spcPts val="0"/>
-                        </a:spcAft>
-                      </a:pPr>
-                      <a:r>
-                        <a:rPr lang="ru-RU" sz="2000" b="1" dirty="0">
-                          <a:effectLst/>
-                          <a:latin typeface="Calibri" panose="020F0502020204030204" pitchFamily="34" charset="0"/>
-                          <a:ea typeface="Calibri" panose="020F0502020204030204" pitchFamily="34" charset="0"/>
-                          <a:cs typeface="Times New Roman" panose="02020603050405020304" pitchFamily="18" charset="0"/>
-                        </a:rPr>
-                        <a:t>НАКШАТРА</a:t>
-                      </a:r>
-                      <a:endParaRPr lang="ru-RU" sz="1100" dirty="0">
-                        <a:effectLst/>
-                        <a:latin typeface="Calibri" panose="020F0502020204030204" pitchFamily="34" charset="0"/>
-                        <a:ea typeface="Calibri" panose="020F0502020204030204" pitchFamily="34" charset="0"/>
-                        <a:cs typeface="Times New Roman" panose="02020603050405020304" pitchFamily="18" charset="0"/>
+                      <a:pPr algn="ctr" fontAlgn="ctr"/>
+                      <a:r>
+                        <a:rPr sz="1400" b="1" i="0">
+                          <a:solidFill>
+                            <a:srgbClr val="FFFFFF"/>
+                          </a:solidFill>
+                          <a:latin typeface="Calibri" panose="020F0502020204030204"/>
+                          <a:ea typeface="Calibri" panose="020F0502020204030204"/>
+                        </a:rPr>
+                        <a:t>УПРАВИТЕЛЬ</a:t>
+                      </a:r>
+                      <a:endParaRPr sz="1400" b="1" i="0">
+                        <a:solidFill>
+                          <a:srgbClr val="FFFFFF"/>
+                        </a:solidFill>
+                        <a:latin typeface="Calibri" panose="020F0502020204030204"/>
+                        <a:ea typeface="Calibri" panose="020F0502020204030204"/>
                       </a:endParaRPr>
                     </a:p>
                   </a:txBody>
-                  <a:tcPr marL="68580" marR="68580" marT="0" marB="0" anchor="ctr">
+                  <a:tcPr marL="7937" marR="7937" marT="7937" marB="0" anchor="ctr" anchorCtr="0">
                     <a:lnR w="12700" cap="flat" cmpd="sng" algn="ctr">
                       <a:solidFill>
                         <a:schemeClr val="bg2">
@@ -3883,32 +3824,27 @@
                     <a:bodyPr/>
                     <a:lstStyle/>
                     <a:p>
-                      <a:pPr algn="ctr">
-                        <a:lnSpc>
-                          <a:spcPct val="107000"/>
-                        </a:lnSpc>
-                        <a:spcAft>
-                          <a:spcPts val="0"/>
-                        </a:spcAft>
-                      </a:pPr>
-                      <a:r>
-                        <a:rPr lang="ru-RU" sz="2000" b="1" dirty="0">
-                          <a:effectLst/>
-                          <a:latin typeface="Calibri" panose="020F0502020204030204" pitchFamily="34" charset="0"/>
-                          <a:ea typeface="Calibri" panose="020F0502020204030204" pitchFamily="34" charset="0"/>
-                          <a:cs typeface="Times New Roman" panose="02020603050405020304" pitchFamily="18" charset="0"/>
-                        </a:rPr>
-                        <a:t>УПРАВИТЕЛЬ</a:t>
-                      </a:r>
-                      <a:endParaRPr lang="ru-RU" sz="1100" dirty="0">
-                        <a:effectLst/>
-                        <a:latin typeface="Calibri" panose="020F0502020204030204" pitchFamily="34" charset="0"/>
-                        <a:ea typeface="Calibri" panose="020F0502020204030204" pitchFamily="34" charset="0"/>
-                        <a:cs typeface="Times New Roman" panose="02020603050405020304" pitchFamily="18" charset="0"/>
+                      <a:pPr algn="ctr" fontAlgn="ctr"/>
+                      <a:r>
+                        <a:rPr sz="1400" b="1" i="0">
+                          <a:solidFill>
+                            <a:srgbClr val="FFFFFF"/>
+                          </a:solidFill>
+                          <a:latin typeface="Calibri" panose="020F0502020204030204"/>
+                          <a:ea typeface="Calibri" panose="020F0502020204030204"/>
+                        </a:rPr>
+                        <a:t>НАКШАТРА</a:t>
+                      </a:r>
+                      <a:endParaRPr sz="1400" b="1" i="0">
+                        <a:solidFill>
+                          <a:srgbClr val="FFFFFF"/>
+                        </a:solidFill>
+                        <a:latin typeface="Calibri" panose="020F0502020204030204"/>
+                        <a:ea typeface="Calibri" panose="020F0502020204030204"/>
                       </a:endParaRPr>
                     </a:p>
                   </a:txBody>
-                  <a:tcPr marL="68580" marR="68580" marT="0" marB="0" anchor="ctr">
+                  <a:tcPr marL="7937" marR="7937" marT="7937" marB="0" anchor="ctr" anchorCtr="0">
                     <a:lnL w="12700" cap="flat" cmpd="sng" algn="ctr">
                       <a:solidFill>
                         <a:schemeClr val="bg2">
@@ -3938,32 +3874,27 @@
                     <a:bodyPr/>
                     <a:lstStyle/>
                     <a:p>
-                      <a:pPr algn="ctr">
-                        <a:lnSpc>
-                          <a:spcPct val="107000"/>
-                        </a:lnSpc>
-                        <a:spcAft>
-                          <a:spcPts val="0"/>
-                        </a:spcAft>
-                      </a:pPr>
-                      <a:r>
-                        <a:rPr lang="ru-RU" sz="2000" b="1" dirty="0">
-                          <a:effectLst/>
-                          <a:latin typeface="Calibri" panose="020F0502020204030204" pitchFamily="34" charset="0"/>
-                          <a:ea typeface="Calibri" panose="020F0502020204030204" pitchFamily="34" charset="0"/>
-                          <a:cs typeface="Times New Roman" panose="02020603050405020304" pitchFamily="18" charset="0"/>
+                      <a:pPr algn="ctr" fontAlgn="ctr"/>
+                      <a:r>
+                        <a:rPr sz="1400" b="1" i="0">
+                          <a:solidFill>
+                            <a:srgbClr val="FFFFFF"/>
+                          </a:solidFill>
+                          <a:latin typeface="Calibri" panose="020F0502020204030204"/>
+                          <a:ea typeface="Calibri" panose="020F0502020204030204"/>
                         </a:rPr>
                         <a:t>НАКШАТРА</a:t>
                       </a:r>
-                      <a:endParaRPr lang="ru-RU" sz="1100" dirty="0">
-                        <a:effectLst/>
-                        <a:latin typeface="Calibri" panose="020F0502020204030204" pitchFamily="34" charset="0"/>
-                        <a:ea typeface="Calibri" panose="020F0502020204030204" pitchFamily="34" charset="0"/>
-                        <a:cs typeface="Times New Roman" panose="02020603050405020304" pitchFamily="18" charset="0"/>
+                      <a:endParaRPr sz="1400" b="1" i="0">
+                        <a:solidFill>
+                          <a:srgbClr val="FFFFFF"/>
+                        </a:solidFill>
+                        <a:latin typeface="Calibri" panose="020F0502020204030204"/>
+                        <a:ea typeface="Calibri" panose="020F0502020204030204"/>
                       </a:endParaRPr>
                     </a:p>
                   </a:txBody>
-                  <a:tcPr marL="68580" marR="68580" marT="0" marB="0" anchor="ctr">
+                  <a:tcPr marL="7937" marR="7937" marT="7937" marB="0" anchor="ctr" anchorCtr="0">
                     <a:lnL w="12700" cap="flat" cmpd="sng" algn="ctr">
                       <a:solidFill>
                         <a:schemeClr val="bg2">
@@ -3993,32 +3924,27 @@
                     <a:bodyPr/>
                     <a:lstStyle/>
                     <a:p>
-                      <a:pPr algn="ctr">
-                        <a:lnSpc>
-                          <a:spcPct val="107000"/>
-                        </a:lnSpc>
-                        <a:spcAft>
-                          <a:spcPts val="0"/>
-                        </a:spcAft>
-                      </a:pPr>
-                      <a:r>
-                        <a:rPr lang="ru-RU" sz="2000" b="1" dirty="0">
-                          <a:effectLst/>
-                          <a:latin typeface="Calibri" panose="020F0502020204030204" pitchFamily="34" charset="0"/>
-                          <a:ea typeface="Calibri" panose="020F0502020204030204" pitchFamily="34" charset="0"/>
-                          <a:cs typeface="Times New Roman" panose="02020603050405020304" pitchFamily="18" charset="0"/>
+                      <a:pPr algn="ctr" fontAlgn="ctr"/>
+                      <a:r>
+                        <a:rPr sz="1400" b="1" i="0">
+                          <a:solidFill>
+                            <a:srgbClr val="FFFFFF"/>
+                          </a:solidFill>
+                          <a:latin typeface="Calibri" panose="020F0502020204030204"/>
+                          <a:ea typeface="Calibri" panose="020F0502020204030204"/>
                         </a:rPr>
                         <a:t>НАКШАТРА</a:t>
                       </a:r>
-                      <a:endParaRPr lang="ru-RU" sz="1100" dirty="0">
-                        <a:effectLst/>
-                        <a:latin typeface="Calibri" panose="020F0502020204030204" pitchFamily="34" charset="0"/>
-                        <a:ea typeface="Calibri" panose="020F0502020204030204" pitchFamily="34" charset="0"/>
-                        <a:cs typeface="Times New Roman" panose="02020603050405020304" pitchFamily="18" charset="0"/>
+                      <a:endParaRPr sz="1400" b="1" i="0">
+                        <a:solidFill>
+                          <a:srgbClr val="FFFFFF"/>
+                        </a:solidFill>
+                        <a:latin typeface="Calibri" panose="020F0502020204030204"/>
+                        <a:ea typeface="Calibri" panose="020F0502020204030204"/>
                       </a:endParaRPr>
                     </a:p>
                   </a:txBody>
-                  <a:tcPr marL="68580" marR="68580" marT="0" marB="0" anchor="ctr">
+                  <a:tcPr marL="7937" marR="7937" marT="7937" marB="0" anchor="ctr" anchorCtr="0">
                     <a:lnL w="12700" cap="flat" cmpd="sng" algn="ctr">
                       <a:solidFill>
                         <a:schemeClr val="bg2">
@@ -4039,88 +3965,27 @@
                     <a:bodyPr/>
                     <a:lstStyle/>
                     <a:p>
-                      <a:pPr lvl="0" algn="ctr"/>
-                      <a:r>
-                        <a:rPr lang="ru-RU" sz="2000" b="1" kern="1200" dirty="0" smtClean="0">
-                          <a:solidFill>
-                            <a:schemeClr val="dk1"/>
-                          </a:solidFill>
-                          <a:effectLst/>
-                          <a:latin typeface="+mn-lt"/>
-                          <a:ea typeface="+mn-ea"/>
-                          <a:cs typeface="+mn-cs"/>
-                        </a:rPr>
-                        <a:t>1. </a:t>
-                      </a:r>
-                      <a:r>
-                        <a:rPr lang="ru-RU" sz="2000" b="1" kern="1200" dirty="0" err="1" smtClean="0">
-                          <a:solidFill>
-                            <a:schemeClr val="dk1"/>
-                          </a:solidFill>
-                          <a:effectLst/>
-                          <a:latin typeface="+mn-lt"/>
-                          <a:ea typeface="+mn-ea"/>
-                          <a:cs typeface="+mn-cs"/>
-                        </a:rPr>
-                        <a:t>Ашвини</a:t>
-                      </a:r>
-                      <a:endParaRPr lang="ru-RU" sz="2000" b="1" kern="1200" dirty="0" smtClean="0">
+                      <a:pPr algn="ctr" fontAlgn="ctr"/>
+                      <a:r>
+                        <a:rPr sz="1400" b="1" i="0">
+                          <a:solidFill>
+                            <a:srgbClr val="000000"/>
+                          </a:solidFill>
+                          <a:latin typeface="Calibri" panose="020F0502020204030204"/>
+                          <a:ea typeface="Calibri" panose="020F0502020204030204"/>
+                        </a:rPr>
+                        <a:t>Кету</a:t>
+                      </a:r>
+                      <a:endParaRPr sz="1400" b="1" i="0">
                         <a:solidFill>
-                          <a:schemeClr val="dk1"/>
+                          <a:srgbClr val="000000"/>
                         </a:solidFill>
-                        <a:effectLst/>
-                        <a:latin typeface="+mn-lt"/>
-                        <a:ea typeface="+mn-ea"/>
-                        <a:cs typeface="+mn-cs"/>
-                      </a:endParaRPr>
-                    </a:p>
-                    <a:p>
-                      <a:pPr algn="ctr"/>
-                      <a:r>
-                        <a:rPr lang="ru-RU" sz="2000" b="1" kern="1200" dirty="0" smtClean="0">
-                          <a:solidFill>
-                            <a:schemeClr val="dk1"/>
-                          </a:solidFill>
-                          <a:effectLst/>
-                          <a:latin typeface="+mn-lt"/>
-                          <a:ea typeface="+mn-ea"/>
-                          <a:cs typeface="+mn-cs"/>
-                        </a:rPr>
-                        <a:t>0°</a:t>
-                      </a:r>
-                      <a:r>
-                        <a:rPr lang="en-US" sz="2000" b="1" kern="1200" dirty="0" smtClean="0">
-                          <a:solidFill>
-                            <a:schemeClr val="dk1"/>
-                          </a:solidFill>
-                          <a:effectLst/>
-                          <a:latin typeface="+mn-lt"/>
-                          <a:ea typeface="+mn-ea"/>
-                          <a:cs typeface="+mn-cs"/>
-                        </a:rPr>
-                        <a:t>00</a:t>
-                      </a:r>
-                      <a:r>
-                        <a:rPr lang="ru-RU" sz="2000" b="1" kern="1200" dirty="0" smtClean="0">
-                          <a:solidFill>
-                            <a:schemeClr val="dk1"/>
-                          </a:solidFill>
-                          <a:effectLst/>
-                          <a:latin typeface="+mn-lt"/>
-                          <a:ea typeface="+mn-ea"/>
-                          <a:cs typeface="+mn-cs"/>
-                        </a:rPr>
-                        <a:t> - 13°20´Овна</a:t>
-                      </a:r>
-                      <a:endParaRPr lang="ru-RU" sz="2000" b="1" dirty="0">
-                        <a:effectLst/>
-                        <a:latin typeface="Calibri" panose="020F0502020204030204" pitchFamily="34" charset="0"/>
-                        <a:ea typeface="Calibri" panose="020F0502020204030204" pitchFamily="34" charset="0"/>
-                        <a:cs typeface="Times New Roman" panose="02020603050405020304" pitchFamily="18" charset="0"/>
+                        <a:latin typeface="Calibri" panose="020F0502020204030204"/>
+                        <a:ea typeface="Calibri" panose="020F0502020204030204"/>
                       </a:endParaRPr>
                     </a:p>
                   </a:txBody>
-                  <a:tcPr marL="68580" marR="68580" marT="0" marB="0" anchor="ctr">
+                  <a:tcPr marL="7937" marR="7937" marT="7937" marB="0" anchor="ctr" anchorCtr="0">
                     <a:lnR w="12700" cap="flat" cmpd="sng" algn="ctr">
                       <a:solidFill>
                         <a:schemeClr val="bg2">
@@ -4139,15 +4004,65 @@
                     <a:bodyPr/>
                     <a:lstStyle/>
                     <a:p>
-                      <a:pPr algn="ctr"/>
-                      <a:r>
-                        <a:rPr lang="ru-RU" sz="2400" b="1" dirty="0" smtClean="0"/>
-                        <a:t>Кету</a:t>
-                      </a:r>
-                      <a:endParaRPr lang="ru-RU" sz="2400" b="1" dirty="0"/>
+                      <a:pPr algn="ctr" fontAlgn="ctr"/>
+                      <a:r>
+                        <a:rPr sz="1400" b="1" i="0">
+                          <a:solidFill>
+                            <a:srgbClr val="000000"/>
+                          </a:solidFill>
+                          <a:latin typeface="Calibri" panose="020F0502020204030204"/>
+                          <a:ea typeface="Calibri" panose="020F0502020204030204"/>
+                        </a:rPr>
+                        <a:t>1. Ашвини</a:t>
+                      </a:r>
+                      <a:br>
+                        <a:rPr sz="1400" b="1" i="0">
+                          <a:solidFill>
+                            <a:srgbClr val="000000"/>
+                          </a:solidFill>
+                          <a:latin typeface="Calibri" panose="020F0502020204030204"/>
+                          <a:ea typeface="Calibri" panose="020F0502020204030204"/>
+                        </a:rPr>
+                      </a:br>
+                      <a:r>
+                        <a:rPr sz="1400" b="1" i="0">
+                          <a:solidFill>
+                            <a:srgbClr val="000000"/>
+                          </a:solidFill>
+                          <a:latin typeface="Calibri" panose="020F0502020204030204"/>
+                          <a:ea typeface="Calibri" panose="020F0502020204030204"/>
+                        </a:rPr>
+                        <a:t>020°36′ - 033°56′</a:t>
+                      </a:r>
+                      <a:br>
+                        <a:rPr sz="1400" b="1" i="0">
+                          <a:solidFill>
+                            <a:srgbClr val="000000"/>
+                          </a:solidFill>
+                          <a:latin typeface="Calibri" panose="020F0502020204030204"/>
+                          <a:ea typeface="Calibri" panose="020F0502020204030204"/>
+                        </a:rPr>
+                      </a:br>
+                      <a:r>
+                        <a:rPr sz="1400" b="1" i="0">
+                          <a:solidFill>
+                            <a:srgbClr val="000000"/>
+                          </a:solidFill>
+                          <a:latin typeface="Calibri" panose="020F0502020204030204"/>
+                          <a:ea typeface="Calibri" panose="020F0502020204030204"/>
+                        </a:rPr>
+                        <a:t>Рыбы → Овен</a:t>
+                      </a:r>
+                      <a:endParaRPr sz="1400" b="1" i="0">
+                        <a:solidFill>
+                          <a:srgbClr val="000000"/>
+                        </a:solidFill>
+                        <a:latin typeface="Calibri" panose="020F0502020204030204"/>
+                        <a:ea typeface="Calibri" panose="020F0502020204030204"/>
+                      </a:endParaRPr>
                     </a:p>
                   </a:txBody>
-                  <a:tcPr anchor="ctr">
+                  <a:tcPr marL="7937" marR="7937" marT="7937" marB="0" anchor="ctr" anchorCtr="0">
                     <a:lnL w="12700" cap="flat" cmpd="sng" algn="ctr">
                       <a:solidFill>
                         <a:schemeClr val="bg2">
@@ -4177,59 +4092,65 @@
                     <a:bodyPr/>
                     <a:lstStyle/>
                     <a:p>
-                      <a:pPr algn="ctr"/>
-                      <a:r>
-                        <a:rPr lang="ru-RU" sz="2000" b="1" kern="1200" dirty="0" smtClean="0">
-                          <a:solidFill>
-                            <a:schemeClr val="dk1"/>
-                          </a:solidFill>
-                          <a:effectLst/>
-                          <a:latin typeface="+mn-lt"/>
-                          <a:ea typeface="+mn-ea"/>
-                          <a:cs typeface="+mn-cs"/>
-                        </a:rPr>
-                        <a:t>10. </a:t>
-                      </a:r>
-                      <a:r>
-                        <a:rPr lang="ru-RU" sz="2000" b="1" kern="1200" dirty="0" err="1" smtClean="0">
-                          <a:solidFill>
-                            <a:schemeClr val="dk1"/>
-                          </a:solidFill>
-                          <a:effectLst/>
-                          <a:latin typeface="+mn-lt"/>
-                          <a:ea typeface="+mn-ea"/>
-                          <a:cs typeface="+mn-cs"/>
-                        </a:rPr>
-                        <a:t>Магха</a:t>
-                      </a:r>
-                      <a:endParaRPr lang="ru-RU" sz="2000" b="1" kern="1200" dirty="0" smtClean="0">
+                      <a:pPr algn="ctr" fontAlgn="ctr"/>
+                      <a:r>
+                        <a:rPr sz="1400" b="1" i="0">
+                          <a:solidFill>
+                            <a:srgbClr val="000000"/>
+                          </a:solidFill>
+                          <a:latin typeface="Calibri" panose="020F0502020204030204"/>
+                          <a:ea typeface="Calibri" panose="020F0502020204030204"/>
+                        </a:rPr>
+                        <a:t>10. Магха</a:t>
+                      </a:r>
+                      <a:br>
+                        <a:rPr sz="1400" b="1" i="0">
+                          <a:solidFill>
+                            <a:srgbClr val="000000"/>
+                          </a:solidFill>
+                          <a:latin typeface="Calibri" panose="020F0502020204030204"/>
+                          <a:ea typeface="Calibri" panose="020F0502020204030204"/>
+                        </a:rPr>
+                      </a:br>
+                      <a:r>
+                        <a:rPr sz="1400" b="1" i="0">
+                          <a:solidFill>
+                            <a:srgbClr val="000000"/>
+                          </a:solidFill>
+                          <a:latin typeface="Calibri" panose="020F0502020204030204"/>
+                          <a:ea typeface="Calibri" panose="020F0502020204030204"/>
+                        </a:rPr>
+                        <a:t>140°36′ - 153°56′</a:t>
+                      </a:r>
+                      <a:br>
+                        <a:rPr sz="1400" b="1" i="0">
+                          <a:solidFill>
+                            <a:srgbClr val="000000"/>
+                          </a:solidFill>
+                          <a:latin typeface="Calibri" panose="020F0502020204030204"/>
+                          <a:ea typeface="Calibri" panose="020F0502020204030204"/>
+                        </a:rPr>
+                      </a:br>
+                      <a:r>
+                        <a:rPr sz="1400" b="1" i="0">
+                          <a:solidFill>
+                            <a:srgbClr val="000000"/>
+                          </a:solidFill>
+                          <a:latin typeface="Calibri" panose="020F0502020204030204"/>
+                          <a:ea typeface="Calibri" panose="020F0502020204030204"/>
+                        </a:rPr>
+                        <a:t>Лев</a:t>
+                      </a:r>
+                      <a:endParaRPr sz="1400" b="1" i="0">
                         <a:solidFill>
-                          <a:schemeClr val="dk1"/>
+                          <a:srgbClr val="000000"/>
                         </a:solidFill>
-                        <a:effectLst/>
-                        <a:latin typeface="+mn-lt"/>
-                        <a:ea typeface="+mn-ea"/>
-                        <a:cs typeface="+mn-cs"/>
+                        <a:latin typeface="Calibri" panose="020F0502020204030204"/>
+                        <a:ea typeface="Calibri" panose="020F0502020204030204"/>
                       </a:endParaRPr>
                     </a:p>
-                    <a:p>
-                      <a:pPr algn="ctr"/>
-                      <a:r>
-                        <a:rPr lang="ru-RU" sz="2000" b="1" kern="1200" dirty="0" smtClean="0">
-                          <a:solidFill>
-                            <a:schemeClr val="dk1"/>
-                          </a:solidFill>
-                          <a:effectLst/>
-                          <a:latin typeface="+mn-lt"/>
-                          <a:ea typeface="+mn-ea"/>
-                          <a:cs typeface="+mn-cs"/>
-                        </a:rPr>
-                        <a:t>0°00-13°20´ Льва</a:t>
-                      </a:r>
-                      <a:endParaRPr lang="ru-RU" sz="2000" b="1" dirty="0"/>
-                    </a:p>
                   </a:txBody>
-                  <a:tcPr anchor="ctr">
+                  <a:tcPr marL="7937" marR="7937" marT="7937" marB="0" anchor="ctr" anchorCtr="0">
                     <a:lnL w="12700" cap="flat" cmpd="sng" algn="ctr">
                       <a:solidFill>
                         <a:schemeClr val="bg2">
@@ -4259,38 +4180,65 @@
                     <a:bodyPr/>
                     <a:lstStyle/>
                     <a:p>
-                      <a:pPr algn="ctr"/>
-                      <a:r>
-                        <a:rPr lang="ru-RU" sz="2000" b="1" kern="1200" dirty="0" smtClean="0">
-                          <a:solidFill>
-                            <a:schemeClr val="dk1"/>
-                          </a:solidFill>
-                          <a:effectLst/>
-                          <a:latin typeface="+mn-lt"/>
-                          <a:ea typeface="+mn-ea"/>
-                          <a:cs typeface="+mn-cs"/>
+                      <a:pPr algn="ctr" fontAlgn="ctr"/>
+                      <a:r>
+                        <a:rPr sz="1400" b="1" i="0">
+                          <a:solidFill>
+                            <a:srgbClr val="000000"/>
+                          </a:solidFill>
+                          <a:latin typeface="Calibri" panose="020F0502020204030204"/>
+                          <a:ea typeface="Calibri" panose="020F0502020204030204"/>
                         </a:rPr>
                         <a:t>19. Мула</a:t>
                       </a:r>
-                    </a:p>
-                    <a:p>
-                      <a:pPr algn="ctr"/>
-                      <a:r>
-                        <a:rPr lang="ru-RU" sz="2000" b="1" kern="1200" dirty="0" smtClean="0">
-                          <a:solidFill>
-                            <a:schemeClr val="dk1"/>
-                          </a:solidFill>
-                          <a:effectLst/>
-                          <a:latin typeface="+mn-lt"/>
-                          <a:ea typeface="+mn-ea"/>
-                          <a:cs typeface="+mn-cs"/>
-                        </a:rPr>
-                        <a:t>0°00-13°20´ Стрельца</a:t>
-                      </a:r>
-                      <a:endParaRPr lang="ru-RU" sz="2000" b="1" dirty="0"/>
+                      <a:br>
+                        <a:rPr sz="1400" b="1" i="0">
+                          <a:solidFill>
+                            <a:srgbClr val="000000"/>
+                          </a:solidFill>
+                          <a:latin typeface="Calibri" panose="020F0502020204030204"/>
+                          <a:ea typeface="Calibri" panose="020F0502020204030204"/>
+                        </a:rPr>
+                      </a:br>
+                      <a:r>
+                        <a:rPr sz="1400" b="1" i="0">
+                          <a:solidFill>
+                            <a:srgbClr val="000000"/>
+                          </a:solidFill>
+                          <a:latin typeface="Calibri" panose="020F0502020204030204"/>
+                          <a:ea typeface="Calibri" panose="020F0502020204030204"/>
+                        </a:rPr>
+                        <a:t>260°36′ - 273°56′</a:t>
+                      </a:r>
+                      <a:br>
+                        <a:rPr sz="1400" b="1" i="0">
+                          <a:solidFill>
+                            <a:srgbClr val="000000"/>
+                          </a:solidFill>
+                          <a:latin typeface="Calibri" panose="020F0502020204030204"/>
+                          <a:ea typeface="Calibri" panose="020F0502020204030204"/>
+                        </a:rPr>
+                      </a:br>
+                      <a:r>
+                        <a:rPr sz="1400" b="1" i="0">
+                          <a:solidFill>
+                            <a:srgbClr val="000000"/>
+                          </a:solidFill>
+                          <a:latin typeface="Calibri" panose="020F0502020204030204"/>
+                          <a:ea typeface="Calibri" panose="020F0502020204030204"/>
+                        </a:rPr>
+                        <a:t>Скорпион → Стрелец</a:t>
+                      </a:r>
+                      <a:endParaRPr sz="1400" b="1" i="0">
+                        <a:solidFill>
+                          <a:srgbClr val="000000"/>
+                        </a:solidFill>
+                        <a:latin typeface="Calibri" panose="020F0502020204030204"/>
+                        <a:ea typeface="Calibri" panose="020F0502020204030204"/>
+                      </a:endParaRPr>
                     </a:p>
                   </a:txBody>
-                  <a:tcPr anchor="ctr">
+                  <a:tcPr marL="7937" marR="7937" marT="7937" marB="0" anchor="ctr" anchorCtr="0">
                     <a:lnL w="12700" cap="flat" cmpd="sng" algn="ctr">
                       <a:solidFill>
                         <a:schemeClr val="bg2">
@@ -4311,64 +4259,27 @@
                     <a:bodyPr/>
                     <a:lstStyle/>
                     <a:p>
-                      <a:pPr lvl="0" algn="ctr"/>
-                      <a:r>
-                        <a:rPr lang="ru-RU" sz="2000" b="1" kern="1200" dirty="0" smtClean="0">
-                          <a:solidFill>
-                            <a:schemeClr val="dk1"/>
-                          </a:solidFill>
-                          <a:effectLst/>
-                          <a:latin typeface="+mn-lt"/>
-                          <a:ea typeface="+mn-ea"/>
-                          <a:cs typeface="+mn-cs"/>
-                        </a:rPr>
-                        <a:t>2. </a:t>
-                      </a:r>
-                      <a:r>
-                        <a:rPr lang="ru-RU" sz="2000" b="1" kern="1200" dirty="0" err="1" smtClean="0">
-                          <a:solidFill>
-                            <a:schemeClr val="dk1"/>
-                          </a:solidFill>
-                          <a:effectLst/>
-                          <a:latin typeface="+mn-lt"/>
-                          <a:ea typeface="+mn-ea"/>
-                          <a:cs typeface="+mn-cs"/>
-                        </a:rPr>
-                        <a:t>Бхарани</a:t>
-                      </a:r>
-                      <a:endParaRPr lang="ru-RU" sz="2000" b="1" kern="1200" dirty="0" smtClean="0">
+                      <a:pPr algn="ctr" fontAlgn="ctr"/>
+                      <a:r>
+                        <a:rPr sz="1400" b="1" i="0">
+                          <a:solidFill>
+                            <a:srgbClr val="000000"/>
+                          </a:solidFill>
+                          <a:latin typeface="Calibri" panose="020F0502020204030204"/>
+                          <a:ea typeface="Calibri" panose="020F0502020204030204"/>
+                        </a:rPr>
+                        <a:t>Венера</a:t>
+                      </a:r>
+                      <a:endParaRPr sz="1400" b="1" i="0">
                         <a:solidFill>
-                          <a:schemeClr val="dk1"/>
+                          <a:srgbClr val="000000"/>
                         </a:solidFill>
-                        <a:effectLst/>
-                        <a:latin typeface="+mn-lt"/>
-                        <a:ea typeface="+mn-ea"/>
-                        <a:cs typeface="+mn-cs"/>
-                      </a:endParaRPr>
-                    </a:p>
-                    <a:p>
-                      <a:pPr algn="ctr"/>
-                      <a:r>
-                        <a:rPr lang="ru-RU" sz="2000" b="1" kern="1200" dirty="0" smtClean="0">
-                          <a:solidFill>
-                            <a:schemeClr val="dk1"/>
-                          </a:solidFill>
-                          <a:effectLst/>
-                          <a:latin typeface="+mn-lt"/>
-                          <a:ea typeface="+mn-ea"/>
-                          <a:cs typeface="+mn-cs"/>
-                        </a:rPr>
-                        <a:t>13°20´- 26°40´Овна</a:t>
-                      </a:r>
-                      <a:endParaRPr lang="ru-RU" sz="2000" b="1" dirty="0">
-                        <a:effectLst/>
-                        <a:latin typeface="Calibri" panose="020F0502020204030204" pitchFamily="34" charset="0"/>
-                        <a:ea typeface="Calibri" panose="020F0502020204030204" pitchFamily="34" charset="0"/>
-                        <a:cs typeface="Times New Roman" panose="02020603050405020304" pitchFamily="18" charset="0"/>
+                        <a:latin typeface="Calibri" panose="020F0502020204030204"/>
+                        <a:ea typeface="Calibri" panose="020F0502020204030204"/>
                       </a:endParaRPr>
                     </a:p>
                   </a:txBody>
-                  <a:tcPr marL="68580" marR="68580" marT="0" marB="0" anchor="ctr">
+                  <a:tcPr marL="7937" marR="7937" marT="7937" marB="0" anchor="ctr" anchorCtr="0">
                     <a:lnR w="12700" cap="flat" cmpd="sng" algn="ctr">
                       <a:solidFill>
                         <a:schemeClr val="bg2">
@@ -4387,15 +4298,65 @@
                     <a:bodyPr/>
                     <a:lstStyle/>
                     <a:p>
-                      <a:pPr algn="ctr"/>
-                      <a:r>
-                        <a:rPr lang="ru-RU" sz="2400" b="1" dirty="0" smtClean="0"/>
-                        <a:t>Венера</a:t>
-                      </a:r>
-                      <a:endParaRPr lang="ru-RU" sz="2400" b="1" dirty="0"/>
+                      <a:pPr algn="ctr" fontAlgn="ctr"/>
+                      <a:r>
+                        <a:rPr sz="1400" b="1" i="0">
+                          <a:solidFill>
+                            <a:srgbClr val="000000"/>
+                          </a:solidFill>
+                          <a:latin typeface="Calibri" panose="020F0502020204030204"/>
+                          <a:ea typeface="Calibri" panose="020F0502020204030204"/>
+                        </a:rPr>
+                        <a:t>2. Бхарани</a:t>
+                      </a:r>
+                      <a:br>
+                        <a:rPr sz="1400" b="1" i="0">
+                          <a:solidFill>
+                            <a:srgbClr val="000000"/>
+                          </a:solidFill>
+                          <a:latin typeface="Calibri" panose="020F0502020204030204"/>
+                          <a:ea typeface="Calibri" panose="020F0502020204030204"/>
+                        </a:rPr>
+                      </a:br>
+                      <a:r>
+                        <a:rPr sz="1400" b="1" i="0">
+                          <a:solidFill>
+                            <a:srgbClr val="000000"/>
+                          </a:solidFill>
+                          <a:latin typeface="Calibri" panose="020F0502020204030204"/>
+                          <a:ea typeface="Calibri" panose="020F0502020204030204"/>
+                        </a:rPr>
+                        <a:t>033°56′ - 047°16′</a:t>
+                      </a:r>
+                      <a:br>
+                        <a:rPr sz="1400" b="1" i="0">
+                          <a:solidFill>
+                            <a:srgbClr val="000000"/>
+                          </a:solidFill>
+                          <a:latin typeface="Calibri" panose="020F0502020204030204"/>
+                          <a:ea typeface="Calibri" panose="020F0502020204030204"/>
+                        </a:rPr>
+                      </a:br>
+                      <a:r>
+                        <a:rPr sz="1400" b="1" i="0">
+                          <a:solidFill>
+                            <a:srgbClr val="000000"/>
+                          </a:solidFill>
+                          <a:latin typeface="Calibri" panose="020F0502020204030204"/>
+                          <a:ea typeface="Calibri" panose="020F0502020204030204"/>
+                        </a:rPr>
+                        <a:t>Овен</a:t>
+                      </a:r>
+                      <a:endParaRPr sz="1400" b="1" i="0">
+                        <a:solidFill>
+                          <a:srgbClr val="000000"/>
+                        </a:solidFill>
+                        <a:latin typeface="Calibri" panose="020F0502020204030204"/>
+                        <a:ea typeface="Calibri" panose="020F0502020204030204"/>
+                      </a:endParaRPr>
                     </a:p>
                   </a:txBody>
-                  <a:tcPr anchor="ctr">
+                  <a:tcPr marL="7937" marR="7937" marT="7937" marB="0" anchor="ctr" anchorCtr="0">
                     <a:lnL w="12700" cap="flat" cmpd="sng" algn="ctr">
                       <a:solidFill>
                         <a:schemeClr val="bg2">
@@ -4425,59 +4386,65 @@
                     <a:bodyPr/>
                     <a:lstStyle/>
                     <a:p>
-                      <a:pPr algn="ctr"/>
-                      <a:r>
-                        <a:rPr lang="ru-RU" sz="2000" b="1" kern="1200" dirty="0" smtClean="0">
-                          <a:solidFill>
-                            <a:schemeClr val="dk1"/>
-                          </a:solidFill>
-                          <a:effectLst/>
-                          <a:latin typeface="+mn-lt"/>
-                          <a:ea typeface="+mn-ea"/>
-                          <a:cs typeface="+mn-cs"/>
-                        </a:rPr>
-                        <a:t>11. </a:t>
-                      </a:r>
-                      <a:r>
-                        <a:rPr lang="ru-RU" sz="2000" b="1" kern="1200" dirty="0" err="1" smtClean="0">
-                          <a:solidFill>
-                            <a:schemeClr val="dk1"/>
-                          </a:solidFill>
-                          <a:effectLst/>
-                          <a:latin typeface="+mn-lt"/>
-                          <a:ea typeface="+mn-ea"/>
-                          <a:cs typeface="+mn-cs"/>
-                        </a:rPr>
-                        <a:t>Пурвапхалгуни</a:t>
-                      </a:r>
-                      <a:endParaRPr lang="ru-RU" sz="2000" b="1" kern="1200" dirty="0" smtClean="0">
+                      <a:pPr algn="ctr" fontAlgn="ctr"/>
+                      <a:r>
+                        <a:rPr sz="1400" b="1" i="0">
+                          <a:solidFill>
+                            <a:srgbClr val="000000"/>
+                          </a:solidFill>
+                          <a:latin typeface="Calibri" panose="020F0502020204030204"/>
+                          <a:ea typeface="Calibri" panose="020F0502020204030204"/>
+                        </a:rPr>
+                        <a:t>11. Пурвапхалгуни</a:t>
+                      </a:r>
+                      <a:br>
+                        <a:rPr sz="1400" b="1" i="0">
+                          <a:solidFill>
+                            <a:srgbClr val="000000"/>
+                          </a:solidFill>
+                          <a:latin typeface="Calibri" panose="020F0502020204030204"/>
+                          <a:ea typeface="Calibri" panose="020F0502020204030204"/>
+                        </a:rPr>
+                      </a:br>
+                      <a:r>
+                        <a:rPr sz="1400" b="1" i="0">
+                          <a:solidFill>
+                            <a:srgbClr val="000000"/>
+                          </a:solidFill>
+                          <a:latin typeface="Calibri" panose="020F0502020204030204"/>
+                          <a:ea typeface="Calibri" panose="020F0502020204030204"/>
+                        </a:rPr>
+                        <a:t>153°56′ - 167°16′</a:t>
+                      </a:r>
+                      <a:br>
+                        <a:rPr sz="1400" b="1" i="0">
+                          <a:solidFill>
+                            <a:srgbClr val="000000"/>
+                          </a:solidFill>
+                          <a:latin typeface="Calibri" panose="020F0502020204030204"/>
+                          <a:ea typeface="Calibri" panose="020F0502020204030204"/>
+                        </a:rPr>
+                      </a:br>
+                      <a:r>
+                        <a:rPr sz="1400" b="1" i="0">
+                          <a:solidFill>
+                            <a:srgbClr val="000000"/>
+                          </a:solidFill>
+                          <a:latin typeface="Calibri" panose="020F0502020204030204"/>
+                          <a:ea typeface="Calibri" panose="020F0502020204030204"/>
+                        </a:rPr>
+                        <a:t>Лев</a:t>
+                      </a:r>
+                      <a:endParaRPr sz="1400" b="1" i="0">
                         <a:solidFill>
-                          <a:schemeClr val="dk1"/>
+                          <a:srgbClr val="000000"/>
                         </a:solidFill>
-                        <a:effectLst/>
-                        <a:latin typeface="+mn-lt"/>
-                        <a:ea typeface="+mn-ea"/>
-                        <a:cs typeface="+mn-cs"/>
+                        <a:latin typeface="Calibri" panose="020F0502020204030204"/>
+                        <a:ea typeface="Calibri" panose="020F0502020204030204"/>
                       </a:endParaRPr>
                     </a:p>
-                    <a:p>
-                      <a:pPr algn="ctr"/>
-                      <a:r>
-                        <a:rPr lang="ru-RU" sz="2000" b="1" kern="1200" dirty="0" smtClean="0">
-                          <a:solidFill>
-                            <a:schemeClr val="dk1"/>
-                          </a:solidFill>
-                          <a:effectLst/>
-                          <a:latin typeface="+mn-lt"/>
-                          <a:ea typeface="+mn-ea"/>
-                          <a:cs typeface="+mn-cs"/>
-                        </a:rPr>
-                        <a:t>13°20´- 26°40´Льва</a:t>
-                      </a:r>
-                      <a:endParaRPr lang="ru-RU" sz="2000" b="1" dirty="0"/>
-                    </a:p>
                   </a:txBody>
-                  <a:tcPr anchor="ctr">
+                  <a:tcPr marL="7937" marR="7937" marT="7937" marB="0" anchor="ctr" anchorCtr="0">
                     <a:lnL w="12700" cap="flat" cmpd="sng" algn="ctr">
                       <a:solidFill>
                         <a:schemeClr val="bg2">
@@ -4507,59 +4474,65 @@
                     <a:bodyPr/>
                     <a:lstStyle/>
                     <a:p>
-                      <a:pPr algn="ctr"/>
-                      <a:r>
-                        <a:rPr lang="ru-RU" sz="2000" b="1" kern="1200" dirty="0" smtClean="0">
-                          <a:solidFill>
-                            <a:schemeClr val="dk1"/>
-                          </a:solidFill>
-                          <a:effectLst/>
-                          <a:latin typeface="+mn-lt"/>
-                          <a:ea typeface="+mn-ea"/>
-                          <a:cs typeface="+mn-cs"/>
-                        </a:rPr>
-                        <a:t>20. </a:t>
-                      </a:r>
-                      <a:r>
-                        <a:rPr lang="ru-RU" sz="2000" b="1" kern="1200" dirty="0" err="1" smtClean="0">
-                          <a:solidFill>
-                            <a:schemeClr val="dk1"/>
-                          </a:solidFill>
-                          <a:effectLst/>
-                          <a:latin typeface="+mn-lt"/>
-                          <a:ea typeface="+mn-ea"/>
-                          <a:cs typeface="+mn-cs"/>
-                        </a:rPr>
-                        <a:t>Пурвашадха</a:t>
-                      </a:r>
-                      <a:endParaRPr lang="ru-RU" sz="2000" b="1" kern="1200" dirty="0" smtClean="0">
+                      <a:pPr algn="ctr" fontAlgn="ctr"/>
+                      <a:r>
+                        <a:rPr sz="1400" b="1" i="0">
+                          <a:solidFill>
+                            <a:srgbClr val="000000"/>
+                          </a:solidFill>
+                          <a:latin typeface="Calibri" panose="020F0502020204030204"/>
+                          <a:ea typeface="Calibri" panose="020F0502020204030204"/>
+                        </a:rPr>
+                        <a:t>20. Пурваашадха</a:t>
+                      </a:r>
+                      <a:br>
+                        <a:rPr sz="1400" b="1" i="0">
+                          <a:solidFill>
+                            <a:srgbClr val="000000"/>
+                          </a:solidFill>
+                          <a:latin typeface="Calibri" panose="020F0502020204030204"/>
+                          <a:ea typeface="Calibri" panose="020F0502020204030204"/>
+                        </a:rPr>
+                      </a:br>
+                      <a:r>
+                        <a:rPr sz="1400" b="1" i="0">
+                          <a:solidFill>
+                            <a:srgbClr val="000000"/>
+                          </a:solidFill>
+                          <a:latin typeface="Calibri" panose="020F0502020204030204"/>
+                          <a:ea typeface="Calibri" panose="020F0502020204030204"/>
+                        </a:rPr>
+                        <a:t>273°56′ - 287°16′</a:t>
+                      </a:r>
+                      <a:br>
+                        <a:rPr sz="1400" b="1" i="0">
+                          <a:solidFill>
+                            <a:srgbClr val="000000"/>
+                          </a:solidFill>
+                          <a:latin typeface="Calibri" panose="020F0502020204030204"/>
+                          <a:ea typeface="Calibri" panose="020F0502020204030204"/>
+                        </a:rPr>
+                      </a:br>
+                      <a:r>
+                        <a:rPr sz="1400" b="1" i="0">
+                          <a:solidFill>
+                            <a:srgbClr val="000000"/>
+                          </a:solidFill>
+                          <a:latin typeface="Calibri" panose="020F0502020204030204"/>
+                          <a:ea typeface="Calibri" panose="020F0502020204030204"/>
+                        </a:rPr>
+                        <a:t>Стрелец</a:t>
+                      </a:r>
+                      <a:endParaRPr sz="1400" b="1" i="0">
                         <a:solidFill>
-                          <a:schemeClr val="dk1"/>
+                          <a:srgbClr val="000000"/>
                         </a:solidFill>
-                        <a:effectLst/>
-                        <a:latin typeface="+mn-lt"/>
-                        <a:ea typeface="+mn-ea"/>
-                        <a:cs typeface="+mn-cs"/>
+                        <a:latin typeface="Calibri" panose="020F0502020204030204"/>
+                        <a:ea typeface="Calibri" panose="020F0502020204030204"/>
                       </a:endParaRPr>
                     </a:p>
-                    <a:p>
-                      <a:pPr algn="ctr"/>
-                      <a:r>
-                        <a:rPr lang="ru-RU" sz="2000" b="1" kern="1200" dirty="0" smtClean="0">
-                          <a:solidFill>
-                            <a:schemeClr val="dk1"/>
-                          </a:solidFill>
-                          <a:effectLst/>
-                          <a:latin typeface="+mn-lt"/>
-                          <a:ea typeface="+mn-ea"/>
-                          <a:cs typeface="+mn-cs"/>
-                        </a:rPr>
-                        <a:t>13°20´-26°40´Стрельца</a:t>
-                      </a:r>
-                      <a:endParaRPr lang="ru-RU" sz="2000" b="1" dirty="0"/>
-                    </a:p>
                   </a:txBody>
-                  <a:tcPr anchor="ctr">
+                  <a:tcPr marL="7937" marR="7937" marT="7937" marB="0" anchor="ctr" anchorCtr="0">
                     <a:lnL w="12700" cap="flat" cmpd="sng" algn="ctr">
                       <a:solidFill>
                         <a:schemeClr val="bg2">
@@ -4580,64 +4553,27 @@
                     <a:bodyPr/>
                     <a:lstStyle/>
                     <a:p>
-                      <a:pPr lvl="0" algn="ctr"/>
-                      <a:r>
-                        <a:rPr lang="ru-RU" sz="2000" b="1" kern="1200" dirty="0" smtClean="0">
-                          <a:solidFill>
-                            <a:schemeClr val="dk1"/>
-                          </a:solidFill>
-                          <a:effectLst/>
-                          <a:latin typeface="+mn-lt"/>
-                          <a:ea typeface="+mn-ea"/>
-                          <a:cs typeface="+mn-cs"/>
-                        </a:rPr>
-                        <a:t>3. </a:t>
-                      </a:r>
-                      <a:r>
-                        <a:rPr lang="ru-RU" sz="2000" b="1" kern="1200" dirty="0" err="1" smtClean="0">
-                          <a:solidFill>
-                            <a:schemeClr val="dk1"/>
-                          </a:solidFill>
-                          <a:effectLst/>
-                          <a:latin typeface="+mn-lt"/>
-                          <a:ea typeface="+mn-ea"/>
-                          <a:cs typeface="+mn-cs"/>
-                        </a:rPr>
-                        <a:t>Криттика</a:t>
-                      </a:r>
-                      <a:endParaRPr lang="ru-RU" sz="2000" b="1" kern="1200" dirty="0" smtClean="0">
+                      <a:pPr algn="ctr" fontAlgn="ctr"/>
+                      <a:r>
+                        <a:rPr sz="1400" b="1" i="0">
+                          <a:solidFill>
+                            <a:srgbClr val="000000"/>
+                          </a:solidFill>
+                          <a:latin typeface="Calibri" panose="020F0502020204030204"/>
+                          <a:ea typeface="Calibri" panose="020F0502020204030204"/>
+                        </a:rPr>
+                        <a:t>Солнце</a:t>
+                      </a:r>
+                      <a:endParaRPr sz="1400" b="1" i="0">
                         <a:solidFill>
-                          <a:schemeClr val="dk1"/>
+                          <a:srgbClr val="000000"/>
                         </a:solidFill>
-                        <a:effectLst/>
-                        <a:latin typeface="+mn-lt"/>
-                        <a:ea typeface="+mn-ea"/>
-                        <a:cs typeface="+mn-cs"/>
-                      </a:endParaRPr>
-                    </a:p>
-                    <a:p>
-                      <a:pPr algn="ctr"/>
-                      <a:r>
-                        <a:rPr lang="ru-RU" sz="2000" b="1" kern="1200" dirty="0" smtClean="0">
-                          <a:solidFill>
-                            <a:schemeClr val="dk1"/>
-                          </a:solidFill>
-                          <a:effectLst/>
-                          <a:latin typeface="+mn-lt"/>
-                          <a:ea typeface="+mn-ea"/>
-                          <a:cs typeface="+mn-cs"/>
-                        </a:rPr>
-                        <a:t>26°40´Овна - 10°00´Тельца</a:t>
-                      </a:r>
-                      <a:endParaRPr lang="ru-RU" sz="2000" b="1" dirty="0">
-                        <a:effectLst/>
-                        <a:latin typeface="Calibri" panose="020F0502020204030204" pitchFamily="34" charset="0"/>
-                        <a:ea typeface="Calibri" panose="020F0502020204030204" pitchFamily="34" charset="0"/>
-                        <a:cs typeface="Times New Roman" panose="02020603050405020304" pitchFamily="18" charset="0"/>
+                        <a:latin typeface="Calibri" panose="020F0502020204030204"/>
+                        <a:ea typeface="Calibri" panose="020F0502020204030204"/>
                       </a:endParaRPr>
                     </a:p>
                   </a:txBody>
-                  <a:tcPr marL="68580" marR="68580" marT="0" marB="0" anchor="ctr">
+                  <a:tcPr marL="7937" marR="7937" marT="7937" marB="0" anchor="ctr" anchorCtr="0">
                     <a:lnR w="12700" cap="flat" cmpd="sng" algn="ctr">
                       <a:solidFill>
                         <a:schemeClr val="bg2">
@@ -4656,15 +4592,65 @@
                     <a:bodyPr/>
                     <a:lstStyle/>
                     <a:p>
-                      <a:pPr algn="ctr"/>
-                      <a:r>
-                        <a:rPr lang="ru-RU" sz="2400" b="1" dirty="0" smtClean="0"/>
-                        <a:t>Солнце</a:t>
-                      </a:r>
-                      <a:endParaRPr lang="ru-RU" sz="2400" b="1" dirty="0"/>
+                      <a:pPr algn="ctr" fontAlgn="ctr"/>
+                      <a:r>
+                        <a:rPr sz="1400" b="1" i="0">
+                          <a:solidFill>
+                            <a:srgbClr val="000000"/>
+                          </a:solidFill>
+                          <a:latin typeface="Calibri" panose="020F0502020204030204"/>
+                          <a:ea typeface="Calibri" panose="020F0502020204030204"/>
+                        </a:rPr>
+                        <a:t>3. Криттика</a:t>
+                      </a:r>
+                      <a:br>
+                        <a:rPr sz="1400" b="1" i="0">
+                          <a:solidFill>
+                            <a:srgbClr val="000000"/>
+                          </a:solidFill>
+                          <a:latin typeface="Calibri" panose="020F0502020204030204"/>
+                          <a:ea typeface="Calibri" panose="020F0502020204030204"/>
+                        </a:rPr>
+                      </a:br>
+                      <a:r>
+                        <a:rPr sz="1400" b="1" i="0">
+                          <a:solidFill>
+                            <a:srgbClr val="000000"/>
+                          </a:solidFill>
+                          <a:latin typeface="Calibri" panose="020F0502020204030204"/>
+                          <a:ea typeface="Calibri" panose="020F0502020204030204"/>
+                        </a:rPr>
+                        <a:t>047°16′ - 060°36′</a:t>
+                      </a:r>
+                      <a:br>
+                        <a:rPr sz="1400" b="1" i="0">
+                          <a:solidFill>
+                            <a:srgbClr val="000000"/>
+                          </a:solidFill>
+                          <a:latin typeface="Calibri" panose="020F0502020204030204"/>
+                          <a:ea typeface="Calibri" panose="020F0502020204030204"/>
+                        </a:rPr>
+                      </a:br>
+                      <a:r>
+                        <a:rPr sz="1400" b="1" i="0">
+                          <a:solidFill>
+                            <a:srgbClr val="000000"/>
+                          </a:solidFill>
+                          <a:latin typeface="Calibri" panose="020F0502020204030204"/>
+                          <a:ea typeface="Calibri" panose="020F0502020204030204"/>
+                        </a:rPr>
+                        <a:t>Овен → Телец</a:t>
+                      </a:r>
+                      <a:endParaRPr sz="1400" b="1" i="0">
+                        <a:solidFill>
+                          <a:srgbClr val="000000"/>
+                        </a:solidFill>
+                        <a:latin typeface="Calibri" panose="020F0502020204030204"/>
+                        <a:ea typeface="Calibri" panose="020F0502020204030204"/>
+                      </a:endParaRPr>
                     </a:p>
                   </a:txBody>
-                  <a:tcPr anchor="ctr">
+                  <a:tcPr marL="7937" marR="7937" marT="7937" marB="0" anchor="ctr" anchorCtr="0">
                     <a:lnL w="12700" cap="flat" cmpd="sng" algn="ctr">
                       <a:solidFill>
                         <a:schemeClr val="bg2">
@@ -4694,59 +4680,65 @@
                     <a:bodyPr/>
                     <a:lstStyle/>
                     <a:p>
-                      <a:pPr algn="ctr"/>
-                      <a:r>
-                        <a:rPr lang="ru-RU" sz="2000" b="1" kern="1200" dirty="0" smtClean="0">
-                          <a:solidFill>
-                            <a:schemeClr val="dk1"/>
-                          </a:solidFill>
-                          <a:effectLst/>
-                          <a:latin typeface="+mn-lt"/>
-                          <a:ea typeface="+mn-ea"/>
-                          <a:cs typeface="+mn-cs"/>
-                        </a:rPr>
-                        <a:t>12. </a:t>
-                      </a:r>
-                      <a:r>
-                        <a:rPr lang="ru-RU" sz="2000" b="1" kern="1200" dirty="0" err="1" smtClean="0">
-                          <a:solidFill>
-                            <a:schemeClr val="dk1"/>
-                          </a:solidFill>
-                          <a:effectLst/>
-                          <a:latin typeface="+mn-lt"/>
-                          <a:ea typeface="+mn-ea"/>
-                          <a:cs typeface="+mn-cs"/>
-                        </a:rPr>
-                        <a:t>Уттарапхалгуни</a:t>
-                      </a:r>
-                      <a:endParaRPr lang="ru-RU" sz="2000" b="1" kern="1200" dirty="0" smtClean="0">
+                      <a:pPr algn="ctr" fontAlgn="ctr"/>
+                      <a:r>
+                        <a:rPr sz="1400" b="1" i="0">
+                          <a:solidFill>
+                            <a:srgbClr val="000000"/>
+                          </a:solidFill>
+                          <a:latin typeface="Calibri" panose="020F0502020204030204"/>
+                          <a:ea typeface="Calibri" panose="020F0502020204030204"/>
+                        </a:rPr>
+                        <a:t>12. Уттарапхалгуни</a:t>
+                      </a:r>
+                      <a:br>
+                        <a:rPr sz="1400" b="1" i="0">
+                          <a:solidFill>
+                            <a:srgbClr val="000000"/>
+                          </a:solidFill>
+                          <a:latin typeface="Calibri" panose="020F0502020204030204"/>
+                          <a:ea typeface="Calibri" panose="020F0502020204030204"/>
+                        </a:rPr>
+                      </a:br>
+                      <a:r>
+                        <a:rPr sz="1400" b="1" i="0">
+                          <a:solidFill>
+                            <a:srgbClr val="000000"/>
+                          </a:solidFill>
+                          <a:latin typeface="Calibri" panose="020F0502020204030204"/>
+                          <a:ea typeface="Calibri" panose="020F0502020204030204"/>
+                        </a:rPr>
+                        <a:t>167°16′ - 180°36′</a:t>
+                      </a:r>
+                      <a:br>
+                        <a:rPr sz="1400" b="1" i="0">
+                          <a:solidFill>
+                            <a:srgbClr val="000000"/>
+                          </a:solidFill>
+                          <a:latin typeface="Calibri" panose="020F0502020204030204"/>
+                          <a:ea typeface="Calibri" panose="020F0502020204030204"/>
+                        </a:rPr>
+                      </a:br>
+                      <a:r>
+                        <a:rPr sz="1400" b="1" i="0">
+                          <a:solidFill>
+                            <a:srgbClr val="000000"/>
+                          </a:solidFill>
+                          <a:latin typeface="Calibri" panose="020F0502020204030204"/>
+                          <a:ea typeface="Calibri" panose="020F0502020204030204"/>
+                        </a:rPr>
+                        <a:t>Лев → Дева</a:t>
+                      </a:r>
+                      <a:endParaRPr sz="1400" b="1" i="0">
                         <a:solidFill>
-                          <a:schemeClr val="dk1"/>
+                          <a:srgbClr val="000000"/>
                         </a:solidFill>
-                        <a:effectLst/>
-                        <a:latin typeface="+mn-lt"/>
-                        <a:ea typeface="+mn-ea"/>
-                        <a:cs typeface="+mn-cs"/>
+                        <a:latin typeface="Calibri" panose="020F0502020204030204"/>
+                        <a:ea typeface="Calibri" panose="020F0502020204030204"/>
                       </a:endParaRPr>
                     </a:p>
-                    <a:p>
-                      <a:pPr algn="ctr"/>
-                      <a:r>
-                        <a:rPr lang="ru-RU" sz="2000" b="1" kern="1200" dirty="0" smtClean="0">
-                          <a:solidFill>
-                            <a:schemeClr val="dk1"/>
-                          </a:solidFill>
-                          <a:effectLst/>
-                          <a:latin typeface="+mn-lt"/>
-                          <a:ea typeface="+mn-ea"/>
-                          <a:cs typeface="+mn-cs"/>
-                        </a:rPr>
-                        <a:t>26°40´ Льва - 10°00´ Девы</a:t>
-                      </a:r>
-                      <a:endParaRPr lang="ru-RU" sz="2000" b="1" dirty="0"/>
-                    </a:p>
                   </a:txBody>
-                  <a:tcPr anchor="ctr">
+                  <a:tcPr marL="7937" marR="7937" marT="7937" marB="0" anchor="ctr" anchorCtr="0">
                     <a:lnL w="12700" cap="flat" cmpd="sng" algn="ctr">
                       <a:solidFill>
                         <a:schemeClr val="bg2">
@@ -4776,83 +4768,65 @@
                     <a:bodyPr/>
                     <a:lstStyle/>
                     <a:p>
-                      <a:pPr algn="ctr"/>
-                      <a:r>
-                        <a:rPr lang="ru-RU" sz="2000" b="1" kern="1200" dirty="0" smtClean="0">
-                          <a:solidFill>
-                            <a:schemeClr val="dk1"/>
-                          </a:solidFill>
-                          <a:effectLst/>
-                          <a:latin typeface="+mn-lt"/>
-                          <a:ea typeface="+mn-ea"/>
-                          <a:cs typeface="+mn-cs"/>
-                        </a:rPr>
-                        <a:t>21. </a:t>
-                      </a:r>
-                      <a:r>
-                        <a:rPr lang="ru-RU" sz="2000" b="1" kern="1200" dirty="0" err="1" smtClean="0">
-                          <a:solidFill>
-                            <a:schemeClr val="dk1"/>
-                          </a:solidFill>
-                          <a:effectLst/>
-                          <a:latin typeface="+mn-lt"/>
-                          <a:ea typeface="+mn-ea"/>
-                          <a:cs typeface="+mn-cs"/>
-                        </a:rPr>
-                        <a:t>Уттарашадха</a:t>
-                      </a:r>
-                      <a:endParaRPr lang="ru-RU" sz="2000" b="1" kern="1200" dirty="0" smtClean="0">
+                      <a:pPr algn="ctr" fontAlgn="ctr"/>
+                      <a:r>
+                        <a:rPr sz="1400" b="1" i="0">
+                          <a:solidFill>
+                            <a:srgbClr val="000000"/>
+                          </a:solidFill>
+                          <a:latin typeface="Calibri" panose="020F0502020204030204"/>
+                          <a:ea typeface="Calibri" panose="020F0502020204030204"/>
+                        </a:rPr>
+                        <a:t>21. Уттараашадха</a:t>
+                      </a:r>
+                      <a:br>
+                        <a:rPr sz="1400" b="1" i="0">
+                          <a:solidFill>
+                            <a:srgbClr val="000000"/>
+                          </a:solidFill>
+                          <a:latin typeface="Calibri" panose="020F0502020204030204"/>
+                          <a:ea typeface="Calibri" panose="020F0502020204030204"/>
+                        </a:rPr>
+                      </a:br>
+                      <a:r>
+                        <a:rPr sz="1400" b="1" i="0">
+                          <a:solidFill>
+                            <a:srgbClr val="000000"/>
+                          </a:solidFill>
+                          <a:latin typeface="Calibri" panose="020F0502020204030204"/>
+                          <a:ea typeface="Calibri" panose="020F0502020204030204"/>
+                        </a:rPr>
+                        <a:t>287°16′ - 300°36′</a:t>
+                      </a:r>
+                      <a:br>
+                        <a:rPr sz="1400" b="1" i="0">
+                          <a:solidFill>
+                            <a:srgbClr val="000000"/>
+                          </a:solidFill>
+                          <a:latin typeface="Calibri" panose="020F0502020204030204"/>
+                          <a:ea typeface="Calibri" panose="020F0502020204030204"/>
+                        </a:rPr>
+                      </a:br>
+                      <a:r>
+                        <a:rPr sz="1400" b="1" i="0">
+                          <a:solidFill>
+                            <a:srgbClr val="000000"/>
+                          </a:solidFill>
+                          <a:latin typeface="Calibri" panose="020F0502020204030204"/>
+                          <a:ea typeface="Calibri" panose="020F0502020204030204"/>
+                        </a:rPr>
+                        <a:t>Стрелец → Козерог</a:t>
+                      </a:r>
+                      <a:endParaRPr sz="1400" b="1" i="0">
                         <a:solidFill>
-                          <a:schemeClr val="dk1"/>
+                          <a:srgbClr val="000000"/>
                         </a:solidFill>
-                        <a:effectLst/>
-                        <a:latin typeface="+mn-lt"/>
-                        <a:ea typeface="+mn-ea"/>
-                        <a:cs typeface="+mn-cs"/>
+                        <a:latin typeface="Calibri" panose="020F0502020204030204"/>
+                        <a:ea typeface="Calibri" panose="020F0502020204030204"/>
                       </a:endParaRPr>
                     </a:p>
-                    <a:p>
-                      <a:pPr algn="l"/>
-                      <a:r>
-                        <a:rPr lang="ru-RU" sz="1800" b="1" kern="1200" dirty="0" smtClean="0">
-                          <a:solidFill>
-                            <a:schemeClr val="dk1"/>
-                          </a:solidFill>
-                          <a:effectLst/>
-                          <a:latin typeface="+mn-lt"/>
-                          <a:ea typeface="+mn-ea"/>
-                          <a:cs typeface="+mn-cs"/>
-                        </a:rPr>
-                        <a:t>26°40</a:t>
-                      </a:r>
-                      <a:r>
-                        <a:rPr lang="ru-RU" sz="1800" b="1" kern="1200" baseline="0" dirty="0" smtClean="0">
-                          <a:solidFill>
-                            <a:schemeClr val="dk1"/>
-                          </a:solidFill>
-                          <a:effectLst/>
-                          <a:latin typeface="+mn-lt"/>
-                          <a:ea typeface="+mn-ea"/>
-                          <a:cs typeface="+mn-cs"/>
-                        </a:rPr>
-                        <a:t> </a:t>
-                      </a:r>
-                      <a:r>
-                        <a:rPr lang="ru-RU" sz="1800" b="1" kern="1200" dirty="0" smtClean="0">
-                          <a:solidFill>
-                            <a:schemeClr val="dk1"/>
-                          </a:solidFill>
-                          <a:effectLst/>
-                          <a:latin typeface="+mn-lt"/>
-                          <a:ea typeface="+mn-ea"/>
-                          <a:cs typeface="+mn-cs"/>
-                        </a:rPr>
-                        <a:t>Стрельца-10°00 Козерога</a:t>
-                      </a:r>
-                      <a:endParaRPr lang="ru-RU" sz="1800" b="1" dirty="0"/>
-                    </a:p>
                   </a:txBody>
-                  <a:tcPr anchor="ctr">
+                  <a:tcPr marL="7937" marR="7937" marT="7937" marB="0" anchor="ctr" anchorCtr="0">
                     <a:lnL w="12700" cap="flat" cmpd="sng" algn="ctr">
                       <a:solidFill>
                         <a:schemeClr val="bg2">
@@ -4873,64 +4847,27 @@
                     <a:bodyPr/>
                     <a:lstStyle/>
                     <a:p>
-                      <a:pPr lvl="0" algn="ctr"/>
-                      <a:r>
-                        <a:rPr lang="ru-RU" sz="2000" b="1" kern="1200" dirty="0" smtClean="0">
-                          <a:solidFill>
-                            <a:schemeClr val="dk1"/>
-                          </a:solidFill>
-                          <a:effectLst/>
-                          <a:latin typeface="+mn-lt"/>
-                          <a:ea typeface="+mn-ea"/>
-                          <a:cs typeface="+mn-cs"/>
-                        </a:rPr>
-                        <a:t>4. </a:t>
-                      </a:r>
-                      <a:r>
-                        <a:rPr lang="ru-RU" sz="2000" b="1" kern="1200" dirty="0" err="1" smtClean="0">
-                          <a:solidFill>
-                            <a:schemeClr val="dk1"/>
-                          </a:solidFill>
-                          <a:effectLst/>
-                          <a:latin typeface="+mn-lt"/>
-                          <a:ea typeface="+mn-ea"/>
-                          <a:cs typeface="+mn-cs"/>
-                        </a:rPr>
-                        <a:t>Рохини</a:t>
-                      </a:r>
-                      <a:endParaRPr lang="ru-RU" sz="2000" b="1" kern="1200" dirty="0" smtClean="0">
+                      <a:pPr algn="ctr" fontAlgn="ctr"/>
+                      <a:r>
+                        <a:rPr sz="1400" b="1" i="0">
+                          <a:solidFill>
+                            <a:srgbClr val="000000"/>
+                          </a:solidFill>
+                          <a:latin typeface="Calibri" panose="020F0502020204030204"/>
+                          <a:ea typeface="Calibri" panose="020F0502020204030204"/>
+                        </a:rPr>
+                        <a:t>Луна</a:t>
+                      </a:r>
+                      <a:endParaRPr sz="1400" b="1" i="0">
                         <a:solidFill>
-                          <a:schemeClr val="dk1"/>
+                          <a:srgbClr val="000000"/>
                         </a:solidFill>
-                        <a:effectLst/>
-                        <a:latin typeface="+mn-lt"/>
-                        <a:ea typeface="+mn-ea"/>
-                        <a:cs typeface="+mn-cs"/>
-                      </a:endParaRPr>
-                    </a:p>
-                    <a:p>
-                      <a:pPr algn="ctr"/>
-                      <a:r>
-                        <a:rPr lang="ru-RU" sz="2000" b="1" kern="1200" dirty="0" smtClean="0">
-                          <a:solidFill>
-                            <a:schemeClr val="dk1"/>
-                          </a:solidFill>
-                          <a:effectLst/>
-                          <a:latin typeface="+mn-lt"/>
-                          <a:ea typeface="+mn-ea"/>
-                          <a:cs typeface="+mn-cs"/>
-                        </a:rPr>
-                        <a:t>10°00´- 23°20´Тельца</a:t>
-                      </a:r>
-                      <a:endParaRPr lang="ru-RU" sz="2000" b="1" dirty="0">
-                        <a:effectLst/>
-                        <a:latin typeface="Calibri" panose="020F0502020204030204" pitchFamily="34" charset="0"/>
-                        <a:ea typeface="Calibri" panose="020F0502020204030204" pitchFamily="34" charset="0"/>
-                        <a:cs typeface="Times New Roman" panose="02020603050405020304" pitchFamily="18" charset="0"/>
+                        <a:latin typeface="Calibri" panose="020F0502020204030204"/>
+                        <a:ea typeface="Calibri" panose="020F0502020204030204"/>
                       </a:endParaRPr>
                     </a:p>
                   </a:txBody>
-                  <a:tcPr marL="68580" marR="68580" marT="0" marB="0" anchor="ctr">
+                  <a:tcPr marL="7937" marR="7937" marT="7937" marB="0" anchor="ctr" anchorCtr="0">
                     <a:lnR w="12700" cap="flat" cmpd="sng" algn="ctr">
                       <a:solidFill>
                         <a:schemeClr val="bg2">
@@ -4949,15 +4886,65 @@
                     <a:bodyPr/>
                     <a:lstStyle/>
                     <a:p>
-                      <a:pPr algn="ctr"/>
-                      <a:r>
-                        <a:rPr lang="ru-RU" sz="2400" b="1" dirty="0" smtClean="0"/>
-                        <a:t>Луна</a:t>
-                      </a:r>
-                      <a:endParaRPr lang="ru-RU" sz="2400" b="1" dirty="0"/>
+                      <a:pPr algn="ctr" fontAlgn="ctr"/>
+                      <a:r>
+                        <a:rPr sz="1400" b="1" i="0">
+                          <a:solidFill>
+                            <a:srgbClr val="000000"/>
+                          </a:solidFill>
+                          <a:latin typeface="Calibri" panose="020F0502020204030204"/>
+                          <a:ea typeface="Calibri" panose="020F0502020204030204"/>
+                        </a:rPr>
+                        <a:t>4. Рохини</a:t>
+                      </a:r>
+                      <a:br>
+                        <a:rPr sz="1400" b="1" i="0">
+                          <a:solidFill>
+                            <a:srgbClr val="000000"/>
+                          </a:solidFill>
+                          <a:latin typeface="Calibri" panose="020F0502020204030204"/>
+                          <a:ea typeface="Calibri" panose="020F0502020204030204"/>
+                        </a:rPr>
+                      </a:br>
+                      <a:r>
+                        <a:rPr sz="1400" b="1" i="0">
+                          <a:solidFill>
+                            <a:srgbClr val="000000"/>
+                          </a:solidFill>
+                          <a:latin typeface="Calibri" panose="020F0502020204030204"/>
+                          <a:ea typeface="Calibri" panose="020F0502020204030204"/>
+                        </a:rPr>
+                        <a:t>060°36′ - 073°56′</a:t>
+                      </a:r>
+                      <a:br>
+                        <a:rPr sz="1400" b="1" i="0">
+                          <a:solidFill>
+                            <a:srgbClr val="000000"/>
+                          </a:solidFill>
+                          <a:latin typeface="Calibri" panose="020F0502020204030204"/>
+                          <a:ea typeface="Calibri" panose="020F0502020204030204"/>
+                        </a:rPr>
+                      </a:br>
+                      <a:r>
+                        <a:rPr sz="1400" b="1" i="0">
+                          <a:solidFill>
+                            <a:srgbClr val="000000"/>
+                          </a:solidFill>
+                          <a:latin typeface="Calibri" panose="020F0502020204030204"/>
+                          <a:ea typeface="Calibri" panose="020F0502020204030204"/>
+                        </a:rPr>
+                        <a:t>Телец</a:t>
+                      </a:r>
+                      <a:endParaRPr sz="1400" b="1" i="0">
+                        <a:solidFill>
+                          <a:srgbClr val="000000"/>
+                        </a:solidFill>
+                        <a:latin typeface="Calibri" panose="020F0502020204030204"/>
+                        <a:ea typeface="Calibri" panose="020F0502020204030204"/>
+                      </a:endParaRPr>
                     </a:p>
                   </a:txBody>
-                  <a:tcPr anchor="ctr">
+                  <a:tcPr marL="7937" marR="7937" marT="7937" marB="0" anchor="ctr" anchorCtr="0">
                     <a:lnL w="12700" cap="flat" cmpd="sng" algn="ctr">
                       <a:solidFill>
                         <a:schemeClr val="bg2">
@@ -4987,59 +4974,65 @@
                     <a:bodyPr/>
                     <a:lstStyle/>
                     <a:p>
-                      <a:pPr algn="ctr"/>
-                      <a:r>
-                        <a:rPr lang="ru-RU" sz="2000" b="1" kern="1200" dirty="0" smtClean="0">
-                          <a:solidFill>
-                            <a:schemeClr val="dk1"/>
-                          </a:solidFill>
-                          <a:effectLst/>
-                          <a:latin typeface="+mn-lt"/>
-                          <a:ea typeface="+mn-ea"/>
-                          <a:cs typeface="+mn-cs"/>
-                        </a:rPr>
-                        <a:t>13. </a:t>
-                      </a:r>
-                      <a:r>
-                        <a:rPr lang="ru-RU" sz="2000" b="1" kern="1200" dirty="0" err="1" smtClean="0">
-                          <a:solidFill>
-                            <a:schemeClr val="dk1"/>
-                          </a:solidFill>
-                          <a:effectLst/>
-                          <a:latin typeface="+mn-lt"/>
-                          <a:ea typeface="+mn-ea"/>
-                          <a:cs typeface="+mn-cs"/>
-                        </a:rPr>
-                        <a:t>Хаста</a:t>
-                      </a:r>
-                      <a:endParaRPr lang="ru-RU" sz="2000" b="1" kern="1200" dirty="0" smtClean="0">
+                      <a:pPr algn="ctr" fontAlgn="ctr"/>
+                      <a:r>
+                        <a:rPr sz="1400" b="1" i="0">
+                          <a:solidFill>
+                            <a:srgbClr val="000000"/>
+                          </a:solidFill>
+                          <a:latin typeface="Calibri" panose="020F0502020204030204"/>
+                          <a:ea typeface="Calibri" panose="020F0502020204030204"/>
+                        </a:rPr>
+                        <a:t>13. Хаста</a:t>
+                      </a:r>
+                      <a:br>
+                        <a:rPr sz="1400" b="1" i="0">
+                          <a:solidFill>
+                            <a:srgbClr val="000000"/>
+                          </a:solidFill>
+                          <a:latin typeface="Calibri" panose="020F0502020204030204"/>
+                          <a:ea typeface="Calibri" panose="020F0502020204030204"/>
+                        </a:rPr>
+                      </a:br>
+                      <a:r>
+                        <a:rPr sz="1400" b="1" i="0">
+                          <a:solidFill>
+                            <a:srgbClr val="000000"/>
+                          </a:solidFill>
+                          <a:latin typeface="Calibri" panose="020F0502020204030204"/>
+                          <a:ea typeface="Calibri" panose="020F0502020204030204"/>
+                        </a:rPr>
+                        <a:t>180°36′ - 193°56′</a:t>
+                      </a:r>
+                      <a:br>
+                        <a:rPr sz="1400" b="1" i="0">
+                          <a:solidFill>
+                            <a:srgbClr val="000000"/>
+                          </a:solidFill>
+                          <a:latin typeface="Calibri" panose="020F0502020204030204"/>
+                          <a:ea typeface="Calibri" panose="020F0502020204030204"/>
+                        </a:rPr>
+                      </a:br>
+                      <a:r>
+                        <a:rPr sz="1400" b="1" i="0">
+                          <a:solidFill>
+                            <a:srgbClr val="000000"/>
+                          </a:solidFill>
+                          <a:latin typeface="Calibri" panose="020F0502020204030204"/>
+                          <a:ea typeface="Calibri" panose="020F0502020204030204"/>
+                        </a:rPr>
+                        <a:t>Дева</a:t>
+                      </a:r>
+                      <a:endParaRPr sz="1400" b="1" i="0">
                         <a:solidFill>
-                          <a:schemeClr val="dk1"/>
+                          <a:srgbClr val="000000"/>
                         </a:solidFill>
-                        <a:effectLst/>
-                        <a:latin typeface="+mn-lt"/>
-                        <a:ea typeface="+mn-ea"/>
-                        <a:cs typeface="+mn-cs"/>
+                        <a:latin typeface="Calibri" panose="020F0502020204030204"/>
+                        <a:ea typeface="Calibri" panose="020F0502020204030204"/>
                       </a:endParaRPr>
                     </a:p>
-                    <a:p>
-                      <a:pPr algn="ctr"/>
-                      <a:r>
-                        <a:rPr lang="ru-RU" sz="2000" b="1" kern="1200" dirty="0" smtClean="0">
-                          <a:solidFill>
-                            <a:schemeClr val="dk1"/>
-                          </a:solidFill>
-                          <a:effectLst/>
-                          <a:latin typeface="+mn-lt"/>
-                          <a:ea typeface="+mn-ea"/>
-                          <a:cs typeface="+mn-cs"/>
-                        </a:rPr>
-                        <a:t>10°00´- 23°20´Девы</a:t>
-                      </a:r>
-                      <a:endParaRPr lang="ru-RU" sz="2000" b="1" dirty="0"/>
-                    </a:p>
                   </a:txBody>
-                  <a:tcPr anchor="ctr">
+                  <a:tcPr marL="7937" marR="7937" marT="7937" marB="0" anchor="ctr" anchorCtr="0">
                     <a:lnL w="12700" cap="flat" cmpd="sng" algn="ctr">
                       <a:solidFill>
                         <a:schemeClr val="bg2">
@@ -5069,83 +5062,65 @@
                     <a:bodyPr/>
                     <a:lstStyle/>
                     <a:p>
-                      <a:pPr algn="ctr"/>
-                      <a:r>
-                        <a:rPr lang="ru-RU" sz="2000" b="1" kern="1200" dirty="0" smtClean="0">
-                          <a:solidFill>
-                            <a:schemeClr val="dk1"/>
-                          </a:solidFill>
-                          <a:effectLst/>
-                          <a:latin typeface="+mn-lt"/>
-                          <a:ea typeface="+mn-ea"/>
-                          <a:cs typeface="+mn-cs"/>
-                        </a:rPr>
-                        <a:t>22. </a:t>
-                      </a:r>
-                      <a:r>
-                        <a:rPr lang="ru-RU" sz="2000" b="1" kern="1200" dirty="0" err="1" smtClean="0">
-                          <a:solidFill>
-                            <a:schemeClr val="dk1"/>
-                          </a:solidFill>
-                          <a:effectLst/>
-                          <a:latin typeface="+mn-lt"/>
-                          <a:ea typeface="+mn-ea"/>
-                          <a:cs typeface="+mn-cs"/>
-                        </a:rPr>
-                        <a:t>Шравана</a:t>
-                      </a:r>
-                      <a:endParaRPr lang="ru-RU" sz="2000" b="1" kern="1200" dirty="0" smtClean="0">
+                      <a:pPr algn="ctr" fontAlgn="ctr"/>
+                      <a:r>
+                        <a:rPr sz="1400" b="1" i="0">
+                          <a:solidFill>
+                            <a:srgbClr val="000000"/>
+                          </a:solidFill>
+                          <a:latin typeface="Calibri" panose="020F0502020204030204"/>
+                          <a:ea typeface="Calibri" panose="020F0502020204030204"/>
+                        </a:rPr>
+                        <a:t>22. Шравана</a:t>
+                      </a:r>
+                      <a:br>
+                        <a:rPr sz="1400" b="1" i="0">
+                          <a:solidFill>
+                            <a:srgbClr val="000000"/>
+                          </a:solidFill>
+                          <a:latin typeface="Calibri" panose="020F0502020204030204"/>
+                          <a:ea typeface="Calibri" panose="020F0502020204030204"/>
+                        </a:rPr>
+                      </a:br>
+                      <a:r>
+                        <a:rPr sz="1400" b="1" i="0">
+                          <a:solidFill>
+                            <a:srgbClr val="000000"/>
+                          </a:solidFill>
+                          <a:latin typeface="Calibri" panose="020F0502020204030204"/>
+                          <a:ea typeface="Calibri" panose="020F0502020204030204"/>
+                        </a:rPr>
+                        <a:t>300°36′ - 313°56′</a:t>
+                      </a:r>
+                      <a:br>
+                        <a:rPr sz="1400" b="1" i="0">
+                          <a:solidFill>
+                            <a:srgbClr val="000000"/>
+                          </a:solidFill>
+                          <a:latin typeface="Calibri" panose="020F0502020204030204"/>
+                          <a:ea typeface="Calibri" panose="020F0502020204030204"/>
+                        </a:rPr>
+                      </a:br>
+                      <a:r>
+                        <a:rPr sz="1400" b="1" i="0">
+                          <a:solidFill>
+                            <a:srgbClr val="000000"/>
+                          </a:solidFill>
+                          <a:latin typeface="Calibri" panose="020F0502020204030204"/>
+                          <a:ea typeface="Calibri" panose="020F0502020204030204"/>
+                        </a:rPr>
+                        <a:t>Козерог</a:t>
+                      </a:r>
+                      <a:endParaRPr sz="1400" b="1" i="0">
                         <a:solidFill>
-                          <a:schemeClr val="dk1"/>
+                          <a:srgbClr val="000000"/>
                         </a:solidFill>
-                        <a:effectLst/>
-                        <a:latin typeface="+mn-lt"/>
-                        <a:ea typeface="+mn-ea"/>
-                        <a:cs typeface="+mn-cs"/>
+                        <a:latin typeface="Calibri" panose="020F0502020204030204"/>
+                        <a:ea typeface="Calibri" panose="020F0502020204030204"/>
                       </a:endParaRPr>
                     </a:p>
-                    <a:p>
-                      <a:pPr algn="ctr"/>
-                      <a:r>
-                        <a:rPr lang="ru-RU" sz="2000" b="1" kern="1200" dirty="0" smtClean="0">
-                          <a:solidFill>
-                            <a:schemeClr val="dk1"/>
-                          </a:solidFill>
-                          <a:effectLst/>
-                          <a:latin typeface="+mn-lt"/>
-                          <a:ea typeface="+mn-ea"/>
-                          <a:cs typeface="+mn-cs"/>
-                        </a:rPr>
-                        <a:t>10°00´- 23</a:t>
-                      </a:r>
-                      <a:r>
-                        <a:rPr lang="en-US" sz="2000" b="1" kern="1200" dirty="0" smtClean="0">
-                          <a:solidFill>
-                            <a:schemeClr val="dk1"/>
-                          </a:solidFill>
-                          <a:effectLst/>
-                          <a:latin typeface="+mn-lt"/>
-                          <a:ea typeface="+mn-ea"/>
-                          <a:cs typeface="+mn-cs"/>
-                        </a:rPr>
-                        <a:t>°20´</a:t>
-                      </a:r>
-                      <a:r>
-                        <a:rPr lang="ru-RU" sz="2000" b="1" kern="1200" dirty="0" smtClean="0">
-                          <a:solidFill>
-                            <a:schemeClr val="dk1"/>
-                          </a:solidFill>
-                          <a:effectLst/>
-                          <a:latin typeface="+mn-lt"/>
-                          <a:ea typeface="+mn-ea"/>
-                          <a:cs typeface="+mn-cs"/>
-                        </a:rPr>
-                        <a:t>Козерога</a:t>
-                      </a:r>
-                      <a:endParaRPr lang="ru-RU" sz="2000" b="1" dirty="0"/>
-                    </a:p>
                   </a:txBody>
-                  <a:tcPr anchor="ctr">
+                  <a:tcPr marL="7937" marR="7937" marT="7937" marB="0" anchor="ctr" anchorCtr="0">
                     <a:lnL w="12700" cap="flat" cmpd="sng" algn="ctr">
                       <a:solidFill>
                         <a:schemeClr val="bg2">
@@ -5166,88 +5141,27 @@
                     <a:bodyPr/>
                     <a:lstStyle/>
                     <a:p>
-                      <a:pPr lvl="0" algn="ctr"/>
-                      <a:r>
-                        <a:rPr lang="ru-RU" sz="2000" b="1" kern="1200" dirty="0" smtClean="0">
-                          <a:solidFill>
-                            <a:schemeClr val="dk1"/>
-                          </a:solidFill>
-                          <a:effectLst/>
-                          <a:latin typeface="+mn-lt"/>
-                          <a:ea typeface="+mn-ea"/>
-                          <a:cs typeface="+mn-cs"/>
-                        </a:rPr>
-                        <a:t>5. </a:t>
-                      </a:r>
-                      <a:r>
-                        <a:rPr lang="ru-RU" sz="2000" b="1" kern="1200" dirty="0" err="1" smtClean="0">
-                          <a:solidFill>
-                            <a:schemeClr val="dk1"/>
-                          </a:solidFill>
-                          <a:effectLst/>
-                          <a:latin typeface="+mn-lt"/>
-                          <a:ea typeface="+mn-ea"/>
-                          <a:cs typeface="+mn-cs"/>
-                        </a:rPr>
-                        <a:t>Мригашира</a:t>
-                      </a:r>
-                      <a:endParaRPr lang="ru-RU" sz="2000" b="1" kern="1200" dirty="0" smtClean="0">
+                      <a:pPr algn="ctr" fontAlgn="ctr"/>
+                      <a:r>
+                        <a:rPr sz="1400" b="1" i="0">
+                          <a:solidFill>
+                            <a:srgbClr val="000000"/>
+                          </a:solidFill>
+                          <a:latin typeface="Calibri" panose="020F0502020204030204"/>
+                          <a:ea typeface="Calibri" panose="020F0502020204030204"/>
+                        </a:rPr>
+                        <a:t>Марс</a:t>
+                      </a:r>
+                      <a:endParaRPr sz="1400" b="1" i="0">
                         <a:solidFill>
-                          <a:schemeClr val="dk1"/>
+                          <a:srgbClr val="000000"/>
                         </a:solidFill>
-                        <a:effectLst/>
-                        <a:latin typeface="+mn-lt"/>
-                        <a:ea typeface="+mn-ea"/>
-                        <a:cs typeface="+mn-cs"/>
-                      </a:endParaRPr>
-                    </a:p>
-                    <a:p>
-                      <a:pPr algn="ctr"/>
-                      <a:r>
-                        <a:rPr lang="en-US" sz="2000" b="1" kern="1200" dirty="0" smtClean="0">
-                          <a:solidFill>
-                            <a:schemeClr val="dk1"/>
-                          </a:solidFill>
-                          <a:effectLst/>
-                          <a:latin typeface="+mn-lt"/>
-                          <a:ea typeface="+mn-ea"/>
-                          <a:cs typeface="+mn-cs"/>
-                        </a:rPr>
-                        <a:t>23°20´</a:t>
-                      </a:r>
-                      <a:r>
-                        <a:rPr lang="ru-RU" sz="2000" b="1" kern="1200" dirty="0" smtClean="0">
-                          <a:solidFill>
-                            <a:schemeClr val="dk1"/>
-                          </a:solidFill>
-                          <a:effectLst/>
-                          <a:latin typeface="+mn-lt"/>
-                          <a:ea typeface="+mn-ea"/>
-                          <a:cs typeface="+mn-cs"/>
-                        </a:rPr>
-                        <a:t>Тельца</a:t>
-                      </a:r>
-                      <a:r>
-                        <a:rPr lang="en-US" sz="2000" b="1" kern="1200" dirty="0" smtClean="0">
-                          <a:solidFill>
-                            <a:schemeClr val="dk1"/>
-                          </a:solidFill>
-                          <a:effectLst/>
-                          <a:latin typeface="+mn-lt"/>
-                          <a:ea typeface="+mn-ea"/>
-                          <a:cs typeface="+mn-cs"/>
-                        </a:rPr>
-                        <a:t>-6°40´Близнецов</a:t>
-                      </a:r>
-                      <a:endParaRPr lang="ru-RU" sz="2000" b="1" dirty="0">
-                        <a:effectLst/>
-                        <a:latin typeface="Calibri" panose="020F0502020204030204" pitchFamily="34" charset="0"/>
-                        <a:ea typeface="Calibri" panose="020F0502020204030204" pitchFamily="34" charset="0"/>
-                        <a:cs typeface="Times New Roman" panose="02020603050405020304" pitchFamily="18" charset="0"/>
+                        <a:latin typeface="Calibri" panose="020F0502020204030204"/>
+                        <a:ea typeface="Calibri" panose="020F0502020204030204"/>
                       </a:endParaRPr>
                     </a:p>
                   </a:txBody>
-                  <a:tcPr marL="68580" marR="68580" marT="0" marB="0" anchor="ctr">
+                  <a:tcPr marL="7937" marR="7937" marT="7937" marB="0" anchor="ctr" anchorCtr="0">
                     <a:lnR w="12700" cap="flat" cmpd="sng" algn="ctr">
                       <a:solidFill>
                         <a:schemeClr val="bg2">
@@ -5266,15 +5180,65 @@
                     <a:bodyPr/>
                     <a:lstStyle/>
                     <a:p>
-                      <a:pPr algn="ctr"/>
-                      <a:r>
-                        <a:rPr lang="ru-RU" sz="2400" b="1" dirty="0" smtClean="0"/>
-                        <a:t>Марс</a:t>
-                      </a:r>
-                      <a:endParaRPr lang="ru-RU" sz="2400" b="1" dirty="0"/>
+                      <a:pPr algn="ctr" fontAlgn="ctr"/>
+                      <a:r>
+                        <a:rPr sz="1400" b="1" i="0">
+                          <a:solidFill>
+                            <a:srgbClr val="000000"/>
+                          </a:solidFill>
+                          <a:latin typeface="Calibri" panose="020F0502020204030204"/>
+                          <a:ea typeface="Calibri" panose="020F0502020204030204"/>
+                        </a:rPr>
+                        <a:t>5. Мригашира</a:t>
+                      </a:r>
+                      <a:br>
+                        <a:rPr sz="1400" b="1" i="0">
+                          <a:solidFill>
+                            <a:srgbClr val="000000"/>
+                          </a:solidFill>
+                          <a:latin typeface="Calibri" panose="020F0502020204030204"/>
+                          <a:ea typeface="Calibri" panose="020F0502020204030204"/>
+                        </a:rPr>
+                      </a:br>
+                      <a:r>
+                        <a:rPr sz="1400" b="1" i="0">
+                          <a:solidFill>
+                            <a:srgbClr val="000000"/>
+                          </a:solidFill>
+                          <a:latin typeface="Calibri" panose="020F0502020204030204"/>
+                          <a:ea typeface="Calibri" panose="020F0502020204030204"/>
+                        </a:rPr>
+                        <a:t>073°56′ - 087°16′</a:t>
+                      </a:r>
+                      <a:br>
+                        <a:rPr sz="1400" b="1" i="0">
+                          <a:solidFill>
+                            <a:srgbClr val="000000"/>
+                          </a:solidFill>
+                          <a:latin typeface="Calibri" panose="020F0502020204030204"/>
+                          <a:ea typeface="Calibri" panose="020F0502020204030204"/>
+                        </a:rPr>
+                      </a:br>
+                      <a:r>
+                        <a:rPr sz="1400" b="1" i="0">
+                          <a:solidFill>
+                            <a:srgbClr val="000000"/>
+                          </a:solidFill>
+                          <a:latin typeface="Calibri" panose="020F0502020204030204"/>
+                          <a:ea typeface="Calibri" panose="020F0502020204030204"/>
+                        </a:rPr>
+                        <a:t>Телец</a:t>
+                      </a:r>
+                      <a:endParaRPr sz="1400" b="1" i="0">
+                        <a:solidFill>
+                          <a:srgbClr val="000000"/>
+                        </a:solidFill>
+                        <a:latin typeface="Calibri" panose="020F0502020204030204"/>
+                        <a:ea typeface="Calibri" panose="020F0502020204030204"/>
+                      </a:endParaRPr>
                     </a:p>
                   </a:txBody>
-                  <a:tcPr anchor="ctr">
+                  <a:tcPr marL="7937" marR="7937" marT="7937" marB="0" anchor="ctr" anchorCtr="0">
                     <a:lnL w="12700" cap="flat" cmpd="sng" algn="ctr">
                       <a:solidFill>
                         <a:schemeClr val="bg2">
@@ -5304,59 +5268,65 @@
                     <a:bodyPr/>
                     <a:lstStyle/>
                     <a:p>
-                      <a:pPr algn="ctr"/>
-                      <a:r>
-                        <a:rPr lang="ru-RU" sz="2000" b="1" kern="1200" dirty="0" smtClean="0">
-                          <a:solidFill>
-                            <a:schemeClr val="dk1"/>
-                          </a:solidFill>
-                          <a:effectLst/>
-                          <a:latin typeface="+mn-lt"/>
-                          <a:ea typeface="+mn-ea"/>
-                          <a:cs typeface="+mn-cs"/>
-                        </a:rPr>
-                        <a:t>14. </a:t>
-                      </a:r>
-                      <a:r>
-                        <a:rPr lang="ru-RU" sz="2000" b="1" kern="1200" dirty="0" err="1" smtClean="0">
-                          <a:solidFill>
-                            <a:schemeClr val="dk1"/>
-                          </a:solidFill>
-                          <a:effectLst/>
-                          <a:latin typeface="+mn-lt"/>
-                          <a:ea typeface="+mn-ea"/>
-                          <a:cs typeface="+mn-cs"/>
-                        </a:rPr>
-                        <a:t>Читра</a:t>
-                      </a:r>
-                      <a:endParaRPr lang="ru-RU" sz="2000" b="1" kern="1200" dirty="0" smtClean="0">
+                      <a:pPr algn="ctr" fontAlgn="ctr"/>
+                      <a:r>
+                        <a:rPr sz="1400" b="1" i="0">
+                          <a:solidFill>
+                            <a:srgbClr val="000000"/>
+                          </a:solidFill>
+                          <a:latin typeface="Calibri" panose="020F0502020204030204"/>
+                          <a:ea typeface="Calibri" panose="020F0502020204030204"/>
+                        </a:rPr>
+                        <a:t>14. Читра</a:t>
+                      </a:r>
+                      <a:br>
+                        <a:rPr sz="1400" b="1" i="0">
+                          <a:solidFill>
+                            <a:srgbClr val="000000"/>
+                          </a:solidFill>
+                          <a:latin typeface="Calibri" panose="020F0502020204030204"/>
+                          <a:ea typeface="Calibri" panose="020F0502020204030204"/>
+                        </a:rPr>
+                      </a:br>
+                      <a:r>
+                        <a:rPr sz="1400" b="1" i="0">
+                          <a:solidFill>
+                            <a:srgbClr val="000000"/>
+                          </a:solidFill>
+                          <a:latin typeface="Calibri" panose="020F0502020204030204"/>
+                          <a:ea typeface="Calibri" panose="020F0502020204030204"/>
+                        </a:rPr>
+                        <a:t>193°56′ - 207°16′</a:t>
+                      </a:r>
+                      <a:br>
+                        <a:rPr sz="1400" b="1" i="0">
+                          <a:solidFill>
+                            <a:srgbClr val="000000"/>
+                          </a:solidFill>
+                          <a:latin typeface="Calibri" panose="020F0502020204030204"/>
+                          <a:ea typeface="Calibri" panose="020F0502020204030204"/>
+                        </a:rPr>
+                      </a:br>
+                      <a:r>
+                        <a:rPr sz="1400" b="1" i="0">
+                          <a:solidFill>
+                            <a:srgbClr val="000000"/>
+                          </a:solidFill>
+                          <a:latin typeface="Calibri" panose="020F0502020204030204"/>
+                          <a:ea typeface="Calibri" panose="020F0502020204030204"/>
+                        </a:rPr>
+                        <a:t>Дева</a:t>
+                      </a:r>
+                      <a:endParaRPr sz="1400" b="1" i="0">
                         <a:solidFill>
-                          <a:schemeClr val="dk1"/>
+                          <a:srgbClr val="000000"/>
                         </a:solidFill>
-                        <a:effectLst/>
-                        <a:latin typeface="+mn-lt"/>
-                        <a:ea typeface="+mn-ea"/>
-                        <a:cs typeface="+mn-cs"/>
+                        <a:latin typeface="Calibri" panose="020F0502020204030204"/>
+                        <a:ea typeface="Calibri" panose="020F0502020204030204"/>
                       </a:endParaRPr>
                     </a:p>
-                    <a:p>
-                      <a:pPr algn="ctr"/>
-                      <a:r>
-                        <a:rPr lang="ru-RU" sz="1800" b="1" kern="1200" dirty="0" smtClean="0">
-                          <a:solidFill>
-                            <a:schemeClr val="dk1"/>
-                          </a:solidFill>
-                          <a:effectLst/>
-                          <a:latin typeface="+mn-lt"/>
-                          <a:ea typeface="+mn-ea"/>
-                          <a:cs typeface="+mn-cs"/>
-                        </a:rPr>
-                        <a:t>23°20´ Девы - 6°40´ Весов</a:t>
-                      </a:r>
-                      <a:endParaRPr lang="ru-RU" sz="1800" b="1" dirty="0"/>
-                    </a:p>
                   </a:txBody>
-                  <a:tcPr anchor="ctr">
+                  <a:tcPr marL="7937" marR="7937" marT="7937" marB="0" anchor="ctr" anchorCtr="0">
                     <a:lnL w="12700" cap="flat" cmpd="sng" algn="ctr">
                       <a:solidFill>
                         <a:schemeClr val="bg2">
@@ -5386,59 +5356,65 @@
                     <a:bodyPr/>
                     <a:lstStyle/>
                     <a:p>
-                      <a:pPr algn="ctr"/>
-                      <a:r>
-                        <a:rPr lang="ru-RU" sz="2000" b="1" kern="1200" dirty="0" smtClean="0">
-                          <a:solidFill>
-                            <a:schemeClr val="dk1"/>
-                          </a:solidFill>
-                          <a:effectLst/>
-                          <a:latin typeface="+mn-lt"/>
-                          <a:ea typeface="+mn-ea"/>
-                          <a:cs typeface="+mn-cs"/>
-                        </a:rPr>
-                        <a:t>23. </a:t>
-                      </a:r>
-                      <a:r>
-                        <a:rPr lang="ru-RU" sz="2000" b="1" kern="1200" dirty="0" err="1" smtClean="0">
-                          <a:solidFill>
-                            <a:schemeClr val="dk1"/>
-                          </a:solidFill>
-                          <a:effectLst/>
-                          <a:latin typeface="+mn-lt"/>
-                          <a:ea typeface="+mn-ea"/>
-                          <a:cs typeface="+mn-cs"/>
-                        </a:rPr>
-                        <a:t>Дхаништха</a:t>
-                      </a:r>
-                      <a:endParaRPr lang="ru-RU" sz="2000" b="1" kern="1200" dirty="0" smtClean="0">
+                      <a:pPr algn="ctr" fontAlgn="ctr"/>
+                      <a:r>
+                        <a:rPr sz="1400" b="1" i="0">
+                          <a:solidFill>
+                            <a:srgbClr val="000000"/>
+                          </a:solidFill>
+                          <a:latin typeface="Calibri" panose="020F0502020204030204"/>
+                          <a:ea typeface="Calibri" panose="020F0502020204030204"/>
+                        </a:rPr>
+                        <a:t>23. Дхаништха</a:t>
+                      </a:r>
+                      <a:br>
+                        <a:rPr sz="1400" b="1" i="0">
+                          <a:solidFill>
+                            <a:srgbClr val="000000"/>
+                          </a:solidFill>
+                          <a:latin typeface="Calibri" panose="020F0502020204030204"/>
+                          <a:ea typeface="Calibri" panose="020F0502020204030204"/>
+                        </a:rPr>
+                      </a:br>
+                      <a:r>
+                        <a:rPr sz="1400" b="1" i="0">
+                          <a:solidFill>
+                            <a:srgbClr val="000000"/>
+                          </a:solidFill>
+                          <a:latin typeface="Calibri" panose="020F0502020204030204"/>
+                          <a:ea typeface="Calibri" panose="020F0502020204030204"/>
+                        </a:rPr>
+                        <a:t>313°56′ - 327°16′</a:t>
+                      </a:r>
+                      <a:br>
+                        <a:rPr sz="1400" b="1" i="0">
+                          <a:solidFill>
+                            <a:srgbClr val="000000"/>
+                          </a:solidFill>
+                          <a:latin typeface="Calibri" panose="020F0502020204030204"/>
+                          <a:ea typeface="Calibri" panose="020F0502020204030204"/>
+                        </a:rPr>
+                      </a:br>
+                      <a:r>
+                        <a:rPr sz="1400" b="1" i="0">
+                          <a:solidFill>
+                            <a:srgbClr val="000000"/>
+                          </a:solidFill>
+                          <a:latin typeface="Calibri" panose="020F0502020204030204"/>
+                          <a:ea typeface="Calibri" panose="020F0502020204030204"/>
+                        </a:rPr>
+                        <a:t>Козерог</a:t>
+                      </a:r>
+                      <a:endParaRPr sz="1400" b="1" i="0">
                         <a:solidFill>
-                          <a:schemeClr val="dk1"/>
+                          <a:srgbClr val="000000"/>
                         </a:solidFill>
-                        <a:effectLst/>
-                        <a:latin typeface="+mn-lt"/>
-                        <a:ea typeface="+mn-ea"/>
-                        <a:cs typeface="+mn-cs"/>
+                        <a:latin typeface="Calibri" panose="020F0502020204030204"/>
+                        <a:ea typeface="Calibri" panose="020F0502020204030204"/>
                       </a:endParaRPr>
                     </a:p>
-                    <a:p>
-                      <a:pPr algn="ctr"/>
-                      <a:r>
-                        <a:rPr lang="ru-RU" sz="1800" b="1" kern="1200" dirty="0" smtClean="0">
-                          <a:solidFill>
-                            <a:schemeClr val="dk1"/>
-                          </a:solidFill>
-                          <a:effectLst/>
-                          <a:latin typeface="+mn-lt"/>
-                          <a:ea typeface="+mn-ea"/>
-                          <a:cs typeface="+mn-cs"/>
-                        </a:rPr>
-                        <a:t>23°20´Козерога-6°40´ Водолея</a:t>
-                      </a:r>
-                      <a:endParaRPr lang="ru-RU" sz="1800" b="1" dirty="0"/>
-                    </a:p>
                   </a:txBody>
-                  <a:tcPr anchor="ctr">
+                  <a:tcPr marL="7937" marR="7937" marT="7937" marB="0" anchor="ctr" anchorCtr="0">
                     <a:lnL w="12700" cap="flat" cmpd="sng" algn="ctr">
                       <a:solidFill>
                         <a:schemeClr val="bg2">
@@ -5459,64 +5435,27 @@
                     <a:bodyPr/>
                     <a:lstStyle/>
                     <a:p>
-                      <a:pPr lvl="0" algn="ctr"/>
-                      <a:r>
-                        <a:rPr lang="ru-RU" sz="2000" b="1" kern="1200" dirty="0" smtClean="0">
-                          <a:solidFill>
-                            <a:schemeClr val="dk1"/>
-                          </a:solidFill>
-                          <a:effectLst/>
-                          <a:latin typeface="+mn-lt"/>
-                          <a:ea typeface="+mn-ea"/>
-                          <a:cs typeface="+mn-cs"/>
-                        </a:rPr>
-                        <a:t>6. </a:t>
-                      </a:r>
-                      <a:r>
-                        <a:rPr lang="ru-RU" sz="2000" b="1" kern="1200" dirty="0" err="1" smtClean="0">
-                          <a:solidFill>
-                            <a:schemeClr val="dk1"/>
-                          </a:solidFill>
-                          <a:effectLst/>
-                          <a:latin typeface="+mn-lt"/>
-                          <a:ea typeface="+mn-ea"/>
-                          <a:cs typeface="+mn-cs"/>
-                        </a:rPr>
-                        <a:t>Ардра</a:t>
-                      </a:r>
-                      <a:endParaRPr lang="ru-RU" sz="2000" b="1" kern="1200" dirty="0" smtClean="0">
+                      <a:pPr algn="ctr" fontAlgn="ctr"/>
+                      <a:r>
+                        <a:rPr sz="1400" b="1" i="0">
+                          <a:solidFill>
+                            <a:srgbClr val="000000"/>
+                          </a:solidFill>
+                          <a:latin typeface="Calibri" panose="020F0502020204030204"/>
+                          <a:ea typeface="Calibri" panose="020F0502020204030204"/>
+                        </a:rPr>
+                        <a:t>Раху</a:t>
+                      </a:r>
+                      <a:endParaRPr sz="1400" b="1" i="0">
                         <a:solidFill>
-                          <a:schemeClr val="dk1"/>
+                          <a:srgbClr val="000000"/>
                         </a:solidFill>
-                        <a:effectLst/>
-                        <a:latin typeface="+mn-lt"/>
-                        <a:ea typeface="+mn-ea"/>
-                        <a:cs typeface="+mn-cs"/>
-                      </a:endParaRPr>
-                    </a:p>
-                    <a:p>
-                      <a:pPr algn="ctr"/>
-                      <a:r>
-                        <a:rPr lang="ru-RU" sz="2000" b="1" kern="1200" dirty="0" smtClean="0">
-                          <a:solidFill>
-                            <a:schemeClr val="dk1"/>
-                          </a:solidFill>
-                          <a:effectLst/>
-                          <a:latin typeface="+mn-lt"/>
-                          <a:ea typeface="+mn-ea"/>
-                          <a:cs typeface="+mn-cs"/>
-                        </a:rPr>
-                        <a:t>6°40´- 20°00´Близнецов</a:t>
-                      </a:r>
-                      <a:endParaRPr lang="ru-RU" sz="2000" b="1" dirty="0">
-                        <a:effectLst/>
-                        <a:latin typeface="Calibri" panose="020F0502020204030204" pitchFamily="34" charset="0"/>
-                        <a:ea typeface="Calibri" panose="020F0502020204030204" pitchFamily="34" charset="0"/>
-                        <a:cs typeface="Times New Roman" panose="02020603050405020304" pitchFamily="18" charset="0"/>
+                        <a:latin typeface="Calibri" panose="020F0502020204030204"/>
+                        <a:ea typeface="Calibri" panose="020F0502020204030204"/>
                       </a:endParaRPr>
                     </a:p>
                   </a:txBody>
-                  <a:tcPr marL="68580" marR="68580" marT="0" marB="0" anchor="ctr">
+                  <a:tcPr marL="7937" marR="7937" marT="7937" marB="0" anchor="ctr" anchorCtr="0">
                     <a:lnR w="12700" cap="flat" cmpd="sng" algn="ctr">
                       <a:solidFill>
                         <a:schemeClr val="bg2">
@@ -5535,15 +5474,65 @@
                     <a:bodyPr/>
                     <a:lstStyle/>
                     <a:p>
-                      <a:pPr algn="ctr"/>
-                      <a:r>
-                        <a:rPr lang="ru-RU" sz="2400" b="1" dirty="0" err="1" smtClean="0"/>
-                        <a:t>Раху</a:t>
-                      </a:r>
-                      <a:endParaRPr lang="ru-RU" sz="2400" b="1" dirty="0"/>
+                      <a:pPr algn="ctr" fontAlgn="ctr"/>
+                      <a:r>
+                        <a:rPr sz="1400" b="1" i="0">
+                          <a:solidFill>
+                            <a:srgbClr val="000000"/>
+                          </a:solidFill>
+                          <a:latin typeface="Calibri" panose="020F0502020204030204"/>
+                          <a:ea typeface="Calibri" panose="020F0502020204030204"/>
+                        </a:rPr>
+                        <a:t>6. Ардра</a:t>
+                      </a:r>
+                      <a:br>
+                        <a:rPr sz="1400" b="1" i="0">
+                          <a:solidFill>
+                            <a:srgbClr val="000000"/>
+                          </a:solidFill>
+                          <a:latin typeface="Calibri" panose="020F0502020204030204"/>
+                          <a:ea typeface="Calibri" panose="020F0502020204030204"/>
+                        </a:rPr>
+                      </a:br>
+                      <a:r>
+                        <a:rPr sz="1400" b="1" i="0">
+                          <a:solidFill>
+                            <a:srgbClr val="000000"/>
+                          </a:solidFill>
+                          <a:latin typeface="Calibri" panose="020F0502020204030204"/>
+                          <a:ea typeface="Calibri" panose="020F0502020204030204"/>
+                        </a:rPr>
+                        <a:t>087°16′ - 100°36′</a:t>
+                      </a:r>
+                      <a:br>
+                        <a:rPr sz="1400" b="1" i="0">
+                          <a:solidFill>
+                            <a:srgbClr val="000000"/>
+                          </a:solidFill>
+                          <a:latin typeface="Calibri" panose="020F0502020204030204"/>
+                          <a:ea typeface="Calibri" panose="020F0502020204030204"/>
+                        </a:rPr>
+                      </a:br>
+                      <a:r>
+                        <a:rPr sz="1400" b="1" i="0">
+                          <a:solidFill>
+                            <a:srgbClr val="000000"/>
+                          </a:solidFill>
+                          <a:latin typeface="Calibri" panose="020F0502020204030204"/>
+                          <a:ea typeface="Calibri" panose="020F0502020204030204"/>
+                        </a:rPr>
+                        <a:t>Телец → Близнецы</a:t>
+                      </a:r>
+                      <a:endParaRPr sz="1400" b="1" i="0">
+                        <a:solidFill>
+                          <a:srgbClr val="000000"/>
+                        </a:solidFill>
+                        <a:latin typeface="Calibri" panose="020F0502020204030204"/>
+                        <a:ea typeface="Calibri" panose="020F0502020204030204"/>
+                      </a:endParaRPr>
                     </a:p>
                   </a:txBody>
-                  <a:tcPr anchor="ctr">
+                  <a:tcPr marL="7937" marR="7937" marT="7937" marB="0" anchor="ctr" anchorCtr="0">
                     <a:lnL w="12700" cap="flat" cmpd="sng" algn="ctr">
                       <a:solidFill>
                         <a:schemeClr val="bg2">
@@ -5573,83 +5562,65 @@
                     <a:bodyPr/>
                     <a:lstStyle/>
                     <a:p>
-                      <a:pPr algn="ctr"/>
-                      <a:r>
-                        <a:rPr lang="ru-RU" sz="2000" b="1" kern="1200" dirty="0" smtClean="0">
-                          <a:solidFill>
-                            <a:schemeClr val="dk1"/>
-                          </a:solidFill>
-                          <a:effectLst/>
-                          <a:latin typeface="+mn-lt"/>
-                          <a:ea typeface="+mn-ea"/>
-                          <a:cs typeface="+mn-cs"/>
-                        </a:rPr>
-                        <a:t>15. </a:t>
-                      </a:r>
-                      <a:r>
-                        <a:rPr lang="ru-RU" sz="2000" b="1" kern="1200" dirty="0" err="1" smtClean="0">
-                          <a:solidFill>
-                            <a:schemeClr val="dk1"/>
-                          </a:solidFill>
-                          <a:effectLst/>
-                          <a:latin typeface="+mn-lt"/>
-                          <a:ea typeface="+mn-ea"/>
-                          <a:cs typeface="+mn-cs"/>
-                        </a:rPr>
-                        <a:t>Свати</a:t>
-                      </a:r>
-                      <a:endParaRPr lang="ru-RU" sz="2000" b="1" kern="1200" dirty="0" smtClean="0">
+                      <a:pPr algn="ctr" fontAlgn="ctr"/>
+                      <a:r>
+                        <a:rPr sz="1400" b="1" i="0">
+                          <a:solidFill>
+                            <a:srgbClr val="000000"/>
+                          </a:solidFill>
+                          <a:latin typeface="Calibri" panose="020F0502020204030204"/>
+                          <a:ea typeface="Calibri" panose="020F0502020204030204"/>
+                        </a:rPr>
+                        <a:t>15. Свати</a:t>
+                      </a:r>
+                      <a:br>
+                        <a:rPr sz="1400" b="1" i="0">
+                          <a:solidFill>
+                            <a:srgbClr val="000000"/>
+                          </a:solidFill>
+                          <a:latin typeface="Calibri" panose="020F0502020204030204"/>
+                          <a:ea typeface="Calibri" panose="020F0502020204030204"/>
+                        </a:rPr>
+                      </a:br>
+                      <a:r>
+                        <a:rPr sz="1400" b="1" i="0">
+                          <a:solidFill>
+                            <a:srgbClr val="000000"/>
+                          </a:solidFill>
+                          <a:latin typeface="Calibri" panose="020F0502020204030204"/>
+                          <a:ea typeface="Calibri" panose="020F0502020204030204"/>
+                        </a:rPr>
+                        <a:t>207°16′ - 220°36′</a:t>
+                      </a:r>
+                      <a:br>
+                        <a:rPr sz="1400" b="1" i="0">
+                          <a:solidFill>
+                            <a:srgbClr val="000000"/>
+                          </a:solidFill>
+                          <a:latin typeface="Calibri" panose="020F0502020204030204"/>
+                          <a:ea typeface="Calibri" panose="020F0502020204030204"/>
+                        </a:rPr>
+                      </a:br>
+                      <a:r>
+                        <a:rPr sz="1400" b="1" i="0">
+                          <a:solidFill>
+                            <a:srgbClr val="000000"/>
+                          </a:solidFill>
+                          <a:latin typeface="Calibri" panose="020F0502020204030204"/>
+                          <a:ea typeface="Calibri" panose="020F0502020204030204"/>
+                        </a:rPr>
+                        <a:t>Дева → Весы</a:t>
+                      </a:r>
+                      <a:endParaRPr sz="1400" b="1" i="0">
                         <a:solidFill>
-                          <a:schemeClr val="dk1"/>
+                          <a:srgbClr val="000000"/>
                         </a:solidFill>
-                        <a:effectLst/>
-                        <a:latin typeface="+mn-lt"/>
-                        <a:ea typeface="+mn-ea"/>
-                        <a:cs typeface="+mn-cs"/>
+                        <a:latin typeface="Calibri" panose="020F0502020204030204"/>
+                        <a:ea typeface="Calibri" panose="020F0502020204030204"/>
                       </a:endParaRPr>
                     </a:p>
-                    <a:p>
-                      <a:pPr algn="ctr"/>
-                      <a:r>
-                        <a:rPr lang="ru-RU" sz="2000" b="1" kern="1200" dirty="0" smtClean="0">
-                          <a:solidFill>
-                            <a:schemeClr val="dk1"/>
-                          </a:solidFill>
-                          <a:effectLst/>
-                          <a:latin typeface="+mn-lt"/>
-                          <a:ea typeface="+mn-ea"/>
-                          <a:cs typeface="+mn-cs"/>
-                        </a:rPr>
-                        <a:t>6°40</a:t>
-                      </a:r>
-                      <a:r>
-                        <a:rPr lang="en-US" sz="2000" b="1" kern="1200" dirty="0" smtClean="0">
-                          <a:solidFill>
-                            <a:schemeClr val="dk1"/>
-                          </a:solidFill>
-                          <a:effectLst/>
-                          <a:latin typeface="+mn-lt"/>
-                          <a:ea typeface="+mn-ea"/>
-                          <a:cs typeface="+mn-cs"/>
-                        </a:rPr>
-                        <a:t>´- 20°00´</a:t>
-                      </a:r>
-                      <a:r>
-                        <a:rPr lang="ru-RU" sz="2000" b="1" kern="1200" dirty="0" smtClean="0">
-                          <a:solidFill>
-                            <a:schemeClr val="dk1"/>
-                          </a:solidFill>
-                          <a:effectLst/>
-                          <a:latin typeface="+mn-lt"/>
-                          <a:ea typeface="+mn-ea"/>
-                          <a:cs typeface="+mn-cs"/>
-                        </a:rPr>
-                        <a:t>Весов</a:t>
-                      </a:r>
-                      <a:endParaRPr lang="ru-RU" sz="2000" b="1" dirty="0"/>
-                    </a:p>
                   </a:txBody>
-                  <a:tcPr anchor="ctr">
+                  <a:tcPr marL="7937" marR="7937" marT="7937" marB="0" anchor="ctr" anchorCtr="0">
                     <a:lnL w="12700" cap="flat" cmpd="sng" algn="ctr">
                       <a:solidFill>
                         <a:schemeClr val="bg2">
@@ -5679,59 +5650,65 @@
                     <a:bodyPr/>
                     <a:lstStyle/>
                     <a:p>
-                      <a:pPr algn="ctr"/>
-                      <a:r>
-                        <a:rPr lang="ru-RU" sz="2000" b="1" kern="1200" dirty="0" smtClean="0">
-                          <a:solidFill>
-                            <a:schemeClr val="dk1"/>
-                          </a:solidFill>
-                          <a:effectLst/>
-                          <a:latin typeface="+mn-lt"/>
-                          <a:ea typeface="+mn-ea"/>
-                          <a:cs typeface="+mn-cs"/>
-                        </a:rPr>
-                        <a:t>24. </a:t>
-                      </a:r>
-                      <a:r>
-                        <a:rPr lang="ru-RU" sz="2000" b="1" kern="1200" dirty="0" err="1" smtClean="0">
-                          <a:solidFill>
-                            <a:schemeClr val="dk1"/>
-                          </a:solidFill>
-                          <a:effectLst/>
-                          <a:latin typeface="+mn-lt"/>
-                          <a:ea typeface="+mn-ea"/>
-                          <a:cs typeface="+mn-cs"/>
-                        </a:rPr>
-                        <a:t>Сатабхиша</a:t>
-                      </a:r>
-                      <a:endParaRPr lang="ru-RU" sz="2000" b="1" kern="1200" dirty="0" smtClean="0">
+                      <a:pPr algn="ctr" fontAlgn="ctr"/>
+                      <a:r>
+                        <a:rPr sz="1400" b="1" i="0">
+                          <a:solidFill>
+                            <a:srgbClr val="000000"/>
+                          </a:solidFill>
+                          <a:latin typeface="Calibri" panose="020F0502020204030204"/>
+                          <a:ea typeface="Calibri" panose="020F0502020204030204"/>
+                        </a:rPr>
+                        <a:t>24. Сатабхиша</a:t>
+                      </a:r>
+                      <a:br>
+                        <a:rPr sz="1400" b="1" i="0">
+                          <a:solidFill>
+                            <a:srgbClr val="000000"/>
+                          </a:solidFill>
+                          <a:latin typeface="Calibri" panose="020F0502020204030204"/>
+                          <a:ea typeface="Calibri" panose="020F0502020204030204"/>
+                        </a:rPr>
+                      </a:br>
+                      <a:r>
+                        <a:rPr sz="1400" b="1" i="0">
+                          <a:solidFill>
+                            <a:srgbClr val="000000"/>
+                          </a:solidFill>
+                          <a:latin typeface="Calibri" panose="020F0502020204030204"/>
+                          <a:ea typeface="Calibri" panose="020F0502020204030204"/>
+                        </a:rPr>
+                        <a:t>327°16′ - 340°36′</a:t>
+                      </a:r>
+                      <a:br>
+                        <a:rPr sz="1400" b="1" i="0">
+                          <a:solidFill>
+                            <a:srgbClr val="000000"/>
+                          </a:solidFill>
+                          <a:latin typeface="Calibri" panose="020F0502020204030204"/>
+                          <a:ea typeface="Calibri" panose="020F0502020204030204"/>
+                        </a:rPr>
+                      </a:br>
+                      <a:r>
+                        <a:rPr sz="1400" b="1" i="0">
+                          <a:solidFill>
+                            <a:srgbClr val="000000"/>
+                          </a:solidFill>
+                          <a:latin typeface="Calibri" panose="020F0502020204030204"/>
+                          <a:ea typeface="Calibri" panose="020F0502020204030204"/>
+                        </a:rPr>
+                        <a:t>Козерог → Водолей</a:t>
+                      </a:r>
+                      <a:endParaRPr sz="1400" b="1" i="0">
                         <a:solidFill>
-                          <a:schemeClr val="dk1"/>
+                          <a:srgbClr val="000000"/>
                         </a:solidFill>
-                        <a:effectLst/>
-                        <a:latin typeface="+mn-lt"/>
-                        <a:ea typeface="+mn-ea"/>
-                        <a:cs typeface="+mn-cs"/>
+                        <a:latin typeface="Calibri" panose="020F0502020204030204"/>
+                        <a:ea typeface="Calibri" panose="020F0502020204030204"/>
                       </a:endParaRPr>
                     </a:p>
-                    <a:p>
-                      <a:pPr algn="ctr"/>
-                      <a:r>
-                        <a:rPr lang="ru-RU" sz="2000" b="1" kern="1200" dirty="0" smtClean="0">
-                          <a:solidFill>
-                            <a:schemeClr val="dk1"/>
-                          </a:solidFill>
-                          <a:effectLst/>
-                          <a:latin typeface="+mn-lt"/>
-                          <a:ea typeface="+mn-ea"/>
-                          <a:cs typeface="+mn-cs"/>
-                        </a:rPr>
-                        <a:t>6°40´- 20°00´Водолея</a:t>
-                      </a:r>
-                      <a:endParaRPr lang="ru-RU" sz="2000" b="1" dirty="0"/>
-                    </a:p>
                   </a:txBody>
-                  <a:tcPr anchor="ctr">
+                  <a:tcPr marL="7937" marR="7937" marT="7937" marB="0" anchor="ctr" anchorCtr="0">
                     <a:lnL w="12700" cap="flat" cmpd="sng" algn="ctr">
                       <a:solidFill>
                         <a:schemeClr val="bg2">
@@ -5752,88 +5729,27 @@
                     <a:bodyPr/>
                     <a:lstStyle/>
                     <a:p>
-                      <a:pPr lvl="0" algn="ctr"/>
-                      <a:r>
-                        <a:rPr lang="ru-RU" sz="2000" b="1" kern="1200" dirty="0" smtClean="0">
-                          <a:solidFill>
-                            <a:schemeClr val="dk1"/>
-                          </a:solidFill>
-                          <a:effectLst/>
-                          <a:latin typeface="+mn-lt"/>
-                          <a:ea typeface="+mn-ea"/>
-                          <a:cs typeface="+mn-cs"/>
-                        </a:rPr>
-                        <a:t>7. </a:t>
-                      </a:r>
-                      <a:r>
-                        <a:rPr lang="ru-RU" sz="2000" b="1" kern="1200" dirty="0" err="1" smtClean="0">
-                          <a:solidFill>
-                            <a:schemeClr val="dk1"/>
-                          </a:solidFill>
-                          <a:effectLst/>
-                          <a:latin typeface="+mn-lt"/>
-                          <a:ea typeface="+mn-ea"/>
-                          <a:cs typeface="+mn-cs"/>
-                        </a:rPr>
-                        <a:t>Пунарвасу</a:t>
-                      </a:r>
-                      <a:endParaRPr lang="ru-RU" sz="2000" b="1" kern="1200" dirty="0" smtClean="0">
+                      <a:pPr algn="ctr" fontAlgn="ctr"/>
+                      <a:r>
+                        <a:rPr sz="1400" b="1" i="0">
+                          <a:solidFill>
+                            <a:srgbClr val="000000"/>
+                          </a:solidFill>
+                          <a:latin typeface="Calibri" panose="020F0502020204030204"/>
+                          <a:ea typeface="Calibri" panose="020F0502020204030204"/>
+                        </a:rPr>
+                        <a:t>Юпитер</a:t>
+                      </a:r>
+                      <a:endParaRPr sz="1400" b="1" i="0">
                         <a:solidFill>
-                          <a:schemeClr val="dk1"/>
+                          <a:srgbClr val="000000"/>
                         </a:solidFill>
-                        <a:effectLst/>
-                        <a:latin typeface="+mn-lt"/>
-                        <a:ea typeface="+mn-ea"/>
-                        <a:cs typeface="+mn-cs"/>
-                      </a:endParaRPr>
-                    </a:p>
-                    <a:p>
-                      <a:pPr lvl="0" algn="ctr"/>
-                      <a:r>
-                        <a:rPr lang="ru-RU" sz="1800" b="1" kern="1200" dirty="0" smtClean="0">
-                          <a:solidFill>
-                            <a:schemeClr val="dk1"/>
-                          </a:solidFill>
-                          <a:effectLst/>
-                          <a:latin typeface="+mn-lt"/>
-                          <a:ea typeface="+mn-ea"/>
-                          <a:cs typeface="+mn-cs"/>
-                        </a:rPr>
-                        <a:t>20°00´Близнецов</a:t>
-                      </a:r>
-                      <a:r>
-                        <a:rPr lang="ru-RU" sz="1800" b="1" kern="1200" baseline="0" dirty="0" smtClean="0">
-                          <a:solidFill>
-                            <a:schemeClr val="dk1"/>
-                          </a:solidFill>
-                          <a:effectLst/>
-                          <a:latin typeface="+mn-lt"/>
-                          <a:ea typeface="+mn-ea"/>
-                          <a:cs typeface="+mn-cs"/>
-                        </a:rPr>
-                        <a:t> </a:t>
-                      </a:r>
-                      <a:r>
-                        <a:rPr lang="ru-RU" sz="1800" b="1" kern="1200" dirty="0" smtClean="0">
-                          <a:solidFill>
-                            <a:schemeClr val="dk1"/>
-                          </a:solidFill>
-                          <a:effectLst/>
-                          <a:latin typeface="+mn-lt"/>
-                          <a:ea typeface="+mn-ea"/>
-                          <a:cs typeface="+mn-cs"/>
-                        </a:rPr>
-                        <a:t>- 3°20´Рака</a:t>
-                      </a:r>
-                      <a:endParaRPr lang="ru-RU" sz="1800" b="1" dirty="0">
-                        <a:effectLst/>
-                        <a:latin typeface="Calibri" panose="020F0502020204030204" pitchFamily="34" charset="0"/>
-                        <a:ea typeface="Calibri" panose="020F0502020204030204" pitchFamily="34" charset="0"/>
-                        <a:cs typeface="Times New Roman" panose="02020603050405020304" pitchFamily="18" charset="0"/>
+                        <a:latin typeface="Calibri" panose="020F0502020204030204"/>
+                        <a:ea typeface="Calibri" panose="020F0502020204030204"/>
                       </a:endParaRPr>
                     </a:p>
                   </a:txBody>
-                  <a:tcPr marL="68580" marR="68580" marT="0" marB="0" anchor="ctr">
+                  <a:tcPr marL="7937" marR="7937" marT="7937" marB="0" anchor="ctr" anchorCtr="0">
                     <a:lnR w="12700" cap="flat" cmpd="sng" algn="ctr">
                       <a:solidFill>
                         <a:schemeClr val="bg2">
@@ -5852,15 +5768,65 @@
                     <a:bodyPr/>
                     <a:lstStyle/>
                     <a:p>
-                      <a:pPr algn="ctr"/>
-                      <a:r>
-                        <a:rPr lang="ru-RU" sz="2400" b="1" dirty="0" smtClean="0"/>
-                        <a:t>Юпитер</a:t>
-                      </a:r>
-                      <a:endParaRPr lang="ru-RU" sz="2400" b="1" dirty="0"/>
+                      <a:pPr algn="ctr" fontAlgn="ctr"/>
+                      <a:r>
+                        <a:rPr sz="1400" b="1" i="0">
+                          <a:solidFill>
+                            <a:srgbClr val="000000"/>
+                          </a:solidFill>
+                          <a:latin typeface="Calibri" panose="020F0502020204030204"/>
+                          <a:ea typeface="Calibri" panose="020F0502020204030204"/>
+                        </a:rPr>
+                        <a:t>7. Пунарвасу</a:t>
+                      </a:r>
+                      <a:br>
+                        <a:rPr sz="1400" b="1" i="0">
+                          <a:solidFill>
+                            <a:srgbClr val="000000"/>
+                          </a:solidFill>
+                          <a:latin typeface="Calibri" panose="020F0502020204030204"/>
+                          <a:ea typeface="Calibri" panose="020F0502020204030204"/>
+                        </a:rPr>
+                      </a:br>
+                      <a:r>
+                        <a:rPr sz="1400" b="1" i="0">
+                          <a:solidFill>
+                            <a:srgbClr val="000000"/>
+                          </a:solidFill>
+                          <a:latin typeface="Calibri" panose="020F0502020204030204"/>
+                          <a:ea typeface="Calibri" panose="020F0502020204030204"/>
+                        </a:rPr>
+                        <a:t>100°36′ - 113°56′</a:t>
+                      </a:r>
+                      <a:br>
+                        <a:rPr sz="1400" b="1" i="0">
+                          <a:solidFill>
+                            <a:srgbClr val="000000"/>
+                          </a:solidFill>
+                          <a:latin typeface="Calibri" panose="020F0502020204030204"/>
+                          <a:ea typeface="Calibri" panose="020F0502020204030204"/>
+                        </a:rPr>
+                      </a:br>
+                      <a:r>
+                        <a:rPr sz="1400" b="1" i="0">
+                          <a:solidFill>
+                            <a:srgbClr val="000000"/>
+                          </a:solidFill>
+                          <a:latin typeface="Calibri" panose="020F0502020204030204"/>
+                          <a:ea typeface="Calibri" panose="020F0502020204030204"/>
+                        </a:rPr>
+                        <a:t>Близнецы</a:t>
+                      </a:r>
+                      <a:endParaRPr sz="1400" b="1" i="0">
+                        <a:solidFill>
+                          <a:srgbClr val="000000"/>
+                        </a:solidFill>
+                        <a:latin typeface="Calibri" panose="020F0502020204030204"/>
+                        <a:ea typeface="Calibri" panose="020F0502020204030204"/>
+                      </a:endParaRPr>
                     </a:p>
                   </a:txBody>
-                  <a:tcPr anchor="ctr">
+                  <a:tcPr marL="7937" marR="7937" marT="7937" marB="0" anchor="ctr" anchorCtr="0">
                     <a:lnL w="12700" cap="flat" cmpd="sng" algn="ctr">
                       <a:solidFill>
                         <a:schemeClr val="bg2">
@@ -5890,59 +5856,65 @@
                     <a:bodyPr/>
                     <a:lstStyle/>
                     <a:p>
-                      <a:pPr algn="ctr"/>
-                      <a:r>
-                        <a:rPr lang="ru-RU" sz="2000" b="1" kern="1200" dirty="0" smtClean="0">
-                          <a:solidFill>
-                            <a:schemeClr val="dk1"/>
-                          </a:solidFill>
-                          <a:effectLst/>
-                          <a:latin typeface="+mn-lt"/>
-                          <a:ea typeface="+mn-ea"/>
-                          <a:cs typeface="+mn-cs"/>
-                        </a:rPr>
-                        <a:t>16. </a:t>
-                      </a:r>
-                      <a:r>
-                        <a:rPr lang="ru-RU" sz="2000" b="1" kern="1200" dirty="0" err="1" smtClean="0">
-                          <a:solidFill>
-                            <a:schemeClr val="dk1"/>
-                          </a:solidFill>
-                          <a:effectLst/>
-                          <a:latin typeface="+mn-lt"/>
-                          <a:ea typeface="+mn-ea"/>
-                          <a:cs typeface="+mn-cs"/>
-                        </a:rPr>
-                        <a:t>Вишакха</a:t>
-                      </a:r>
-                      <a:endParaRPr lang="ru-RU" sz="2000" b="1" kern="1200" dirty="0" smtClean="0">
+                      <a:pPr algn="ctr" fontAlgn="ctr"/>
+                      <a:r>
+                        <a:rPr sz="1400" b="1" i="0">
+                          <a:solidFill>
+                            <a:srgbClr val="000000"/>
+                          </a:solidFill>
+                          <a:latin typeface="Calibri" panose="020F0502020204030204"/>
+                          <a:ea typeface="Calibri" panose="020F0502020204030204"/>
+                        </a:rPr>
+                        <a:t>16. Вишакха</a:t>
+                      </a:r>
+                      <a:br>
+                        <a:rPr sz="1400" b="1" i="0">
+                          <a:solidFill>
+                            <a:srgbClr val="000000"/>
+                          </a:solidFill>
+                          <a:latin typeface="Calibri" panose="020F0502020204030204"/>
+                          <a:ea typeface="Calibri" panose="020F0502020204030204"/>
+                        </a:rPr>
+                      </a:br>
+                      <a:r>
+                        <a:rPr sz="1400" b="1" i="0">
+                          <a:solidFill>
+                            <a:srgbClr val="000000"/>
+                          </a:solidFill>
+                          <a:latin typeface="Calibri" panose="020F0502020204030204"/>
+                          <a:ea typeface="Calibri" panose="020F0502020204030204"/>
+                        </a:rPr>
+                        <a:t>220°36′ - 233°56′</a:t>
+                      </a:r>
+                      <a:br>
+                        <a:rPr sz="1400" b="1" i="0">
+                          <a:solidFill>
+                            <a:srgbClr val="000000"/>
+                          </a:solidFill>
+                          <a:latin typeface="Calibri" panose="020F0502020204030204"/>
+                          <a:ea typeface="Calibri" panose="020F0502020204030204"/>
+                        </a:rPr>
+                      </a:br>
+                      <a:r>
+                        <a:rPr sz="1400" b="1" i="0">
+                          <a:solidFill>
+                            <a:srgbClr val="000000"/>
+                          </a:solidFill>
+                          <a:latin typeface="Calibri" panose="020F0502020204030204"/>
+                          <a:ea typeface="Calibri" panose="020F0502020204030204"/>
+                        </a:rPr>
+                        <a:t>Весы</a:t>
+                      </a:r>
+                      <a:endParaRPr sz="1400" b="1" i="0">
                         <a:solidFill>
-                          <a:schemeClr val="dk1"/>
+                          <a:srgbClr val="000000"/>
                         </a:solidFill>
-                        <a:effectLst/>
-                        <a:latin typeface="+mn-lt"/>
-                        <a:ea typeface="+mn-ea"/>
-                        <a:cs typeface="+mn-cs"/>
+                        <a:latin typeface="Calibri" panose="020F0502020204030204"/>
+                        <a:ea typeface="Calibri" panose="020F0502020204030204"/>
                       </a:endParaRPr>
                     </a:p>
-                    <a:p>
-                      <a:pPr algn="ctr"/>
-                      <a:r>
-                        <a:rPr lang="ru-RU" sz="2000" b="1" kern="1200" dirty="0" smtClean="0">
-                          <a:solidFill>
-                            <a:schemeClr val="dk1"/>
-                          </a:solidFill>
-                          <a:effectLst/>
-                          <a:latin typeface="+mn-lt"/>
-                          <a:ea typeface="+mn-ea"/>
-                          <a:cs typeface="+mn-cs"/>
-                        </a:rPr>
-                        <a:t>20°00´Весов-3°20´Скорпиона</a:t>
-                      </a:r>
-                      <a:endParaRPr lang="ru-RU" sz="2000" b="1" dirty="0"/>
-                    </a:p>
                   </a:txBody>
-                  <a:tcPr anchor="ctr">
+                  <a:tcPr marL="7937" marR="7937" marT="7937" marB="0" anchor="ctr" anchorCtr="0">
                     <a:lnL w="12700" cap="flat" cmpd="sng" algn="ctr">
                       <a:solidFill>
                         <a:schemeClr val="bg2">
@@ -5972,59 +5944,65 @@
                     <a:bodyPr/>
                     <a:lstStyle/>
                     <a:p>
-                      <a:pPr algn="ctr"/>
-                      <a:r>
-                        <a:rPr lang="ru-RU" sz="2000" b="1" kern="1200" dirty="0" smtClean="0">
-                          <a:solidFill>
-                            <a:schemeClr val="dk1"/>
-                          </a:solidFill>
-                          <a:effectLst/>
-                          <a:latin typeface="+mn-lt"/>
-                          <a:ea typeface="+mn-ea"/>
-                          <a:cs typeface="+mn-cs"/>
-                        </a:rPr>
-                        <a:t>25. </a:t>
-                      </a:r>
-                      <a:r>
-                        <a:rPr lang="ru-RU" sz="2000" b="1" kern="1200" dirty="0" err="1" smtClean="0">
-                          <a:solidFill>
-                            <a:schemeClr val="dk1"/>
-                          </a:solidFill>
-                          <a:effectLst/>
-                          <a:latin typeface="+mn-lt"/>
-                          <a:ea typeface="+mn-ea"/>
-                          <a:cs typeface="+mn-cs"/>
-                        </a:rPr>
-                        <a:t>Пурвабхадрапада</a:t>
-                      </a:r>
-                      <a:endParaRPr lang="ru-RU" sz="2000" b="1" kern="1200" dirty="0" smtClean="0">
+                      <a:pPr algn="ctr" fontAlgn="ctr"/>
+                      <a:r>
+                        <a:rPr sz="1400" b="1" i="0">
+                          <a:solidFill>
+                            <a:srgbClr val="000000"/>
+                          </a:solidFill>
+                          <a:latin typeface="Calibri" panose="020F0502020204030204"/>
+                          <a:ea typeface="Calibri" panose="020F0502020204030204"/>
+                        </a:rPr>
+                        <a:t>25. Пурвабхадрапада</a:t>
+                      </a:r>
+                      <a:br>
+                        <a:rPr sz="1400" b="1" i="0">
+                          <a:solidFill>
+                            <a:srgbClr val="000000"/>
+                          </a:solidFill>
+                          <a:latin typeface="Calibri" panose="020F0502020204030204"/>
+                          <a:ea typeface="Calibri" panose="020F0502020204030204"/>
+                        </a:rPr>
+                      </a:br>
+                      <a:r>
+                        <a:rPr sz="1400" b="1" i="0">
+                          <a:solidFill>
+                            <a:srgbClr val="000000"/>
+                          </a:solidFill>
+                          <a:latin typeface="Calibri" panose="020F0502020204030204"/>
+                          <a:ea typeface="Calibri" panose="020F0502020204030204"/>
+                        </a:rPr>
+                        <a:t>340°36′ - 353°56′</a:t>
+                      </a:r>
+                      <a:br>
+                        <a:rPr sz="1400" b="1" i="0">
+                          <a:solidFill>
+                            <a:srgbClr val="000000"/>
+                          </a:solidFill>
+                          <a:latin typeface="Calibri" panose="020F0502020204030204"/>
+                          <a:ea typeface="Calibri" panose="020F0502020204030204"/>
+                        </a:rPr>
+                      </a:br>
+                      <a:r>
+                        <a:rPr sz="1400" b="1" i="0">
+                          <a:solidFill>
+                            <a:srgbClr val="000000"/>
+                          </a:solidFill>
+                          <a:latin typeface="Calibri" panose="020F0502020204030204"/>
+                          <a:ea typeface="Calibri" panose="020F0502020204030204"/>
+                        </a:rPr>
+                        <a:t>Водолей → Рыбы</a:t>
+                      </a:r>
+                      <a:endParaRPr sz="1400" b="1" i="0">
                         <a:solidFill>
-                          <a:schemeClr val="dk1"/>
+                          <a:srgbClr val="000000"/>
                         </a:solidFill>
-                        <a:effectLst/>
-                        <a:latin typeface="+mn-lt"/>
-                        <a:ea typeface="+mn-ea"/>
-                        <a:cs typeface="+mn-cs"/>
+                        <a:latin typeface="Calibri" panose="020F0502020204030204"/>
+                        <a:ea typeface="Calibri" panose="020F0502020204030204"/>
                       </a:endParaRPr>
                     </a:p>
-                    <a:p>
-                      <a:pPr algn="ctr"/>
-                      <a:r>
-                        <a:rPr lang="ru-RU" sz="2000" b="1" kern="1200" dirty="0" smtClean="0">
-                          <a:solidFill>
-                            <a:schemeClr val="dk1"/>
-                          </a:solidFill>
-                          <a:effectLst/>
-                          <a:latin typeface="+mn-lt"/>
-                          <a:ea typeface="+mn-ea"/>
-                          <a:cs typeface="+mn-cs"/>
-                        </a:rPr>
-                        <a:t>20°00´Водолея - 3°20´ Рыб</a:t>
-                      </a:r>
-                      <a:endParaRPr lang="ru-RU" sz="2000" b="1" dirty="0"/>
-                    </a:p>
                   </a:txBody>
-                  <a:tcPr anchor="ctr">
+                  <a:tcPr marL="7937" marR="7937" marT="7937" marB="0" anchor="ctr" anchorCtr="0">
                     <a:lnL w="12700" cap="flat" cmpd="sng" algn="ctr">
                       <a:solidFill>
                         <a:schemeClr val="bg2">
@@ -6045,64 +6023,27 @@
                     <a:bodyPr/>
                     <a:lstStyle/>
                     <a:p>
-                      <a:pPr lvl="0" algn="ctr"/>
-                      <a:r>
-                        <a:rPr lang="ru-RU" sz="2000" b="1" kern="1200" dirty="0" smtClean="0">
-                          <a:solidFill>
-                            <a:schemeClr val="dk1"/>
-                          </a:solidFill>
-                          <a:effectLst/>
-                          <a:latin typeface="+mn-lt"/>
-                          <a:ea typeface="+mn-ea"/>
-                          <a:cs typeface="+mn-cs"/>
-                        </a:rPr>
-                        <a:t>8. </a:t>
-                      </a:r>
-                      <a:r>
-                        <a:rPr lang="ru-RU" sz="2000" b="1" kern="1200" dirty="0" err="1" smtClean="0">
-                          <a:solidFill>
-                            <a:schemeClr val="dk1"/>
-                          </a:solidFill>
-                          <a:effectLst/>
-                          <a:latin typeface="+mn-lt"/>
-                          <a:ea typeface="+mn-ea"/>
-                          <a:cs typeface="+mn-cs"/>
-                        </a:rPr>
-                        <a:t>Пушья</a:t>
-                      </a:r>
-                      <a:endParaRPr lang="ru-RU" sz="2000" b="1" kern="1200" dirty="0" smtClean="0">
+                      <a:pPr algn="ctr" fontAlgn="ctr"/>
+                      <a:r>
+                        <a:rPr sz="1400" b="1" i="0">
+                          <a:solidFill>
+                            <a:srgbClr val="000000"/>
+                          </a:solidFill>
+                          <a:latin typeface="Calibri" panose="020F0502020204030204"/>
+                          <a:ea typeface="Calibri" panose="020F0502020204030204"/>
+                        </a:rPr>
+                        <a:t>Сатурн</a:t>
+                      </a:r>
+                      <a:endParaRPr sz="1400" b="1" i="0">
                         <a:solidFill>
-                          <a:schemeClr val="dk1"/>
+                          <a:srgbClr val="000000"/>
                         </a:solidFill>
-                        <a:effectLst/>
-                        <a:latin typeface="+mn-lt"/>
-                        <a:ea typeface="+mn-ea"/>
-                        <a:cs typeface="+mn-cs"/>
-                      </a:endParaRPr>
-                    </a:p>
-                    <a:p>
-                      <a:pPr algn="ctr"/>
-                      <a:r>
-                        <a:rPr lang="ru-RU" sz="2000" b="1" kern="1200" dirty="0" smtClean="0">
-                          <a:solidFill>
-                            <a:schemeClr val="dk1"/>
-                          </a:solidFill>
-                          <a:effectLst/>
-                          <a:latin typeface="+mn-lt"/>
-                          <a:ea typeface="+mn-ea"/>
-                          <a:cs typeface="+mn-cs"/>
-                        </a:rPr>
-                        <a:t>3°20´- 16°40´Рака</a:t>
-                      </a:r>
-                      <a:endParaRPr lang="ru-RU" sz="2000" b="1" dirty="0">
-                        <a:effectLst/>
-                        <a:latin typeface="Calibri" panose="020F0502020204030204" pitchFamily="34" charset="0"/>
-                        <a:ea typeface="Calibri" panose="020F0502020204030204" pitchFamily="34" charset="0"/>
-                        <a:cs typeface="Times New Roman" panose="02020603050405020304" pitchFamily="18" charset="0"/>
+                        <a:latin typeface="Calibri" panose="020F0502020204030204"/>
+                        <a:ea typeface="Calibri" panose="020F0502020204030204"/>
                       </a:endParaRPr>
                     </a:p>
                   </a:txBody>
-                  <a:tcPr marL="68580" marR="68580" marT="0" marB="0" anchor="ctr">
+                  <a:tcPr marL="7937" marR="7937" marT="7937" marB="0" anchor="ctr" anchorCtr="0">
                     <a:lnR w="12700" cap="flat" cmpd="sng" algn="ctr">
                       <a:solidFill>
                         <a:schemeClr val="bg2">
@@ -6121,15 +6062,65 @@
                     <a:bodyPr/>
                     <a:lstStyle/>
                     <a:p>
-                      <a:pPr algn="ctr"/>
-                      <a:r>
-                        <a:rPr lang="ru-RU" sz="2400" b="1" dirty="0" smtClean="0"/>
-                        <a:t>Сатурн</a:t>
-                      </a:r>
-                      <a:endParaRPr lang="ru-RU" sz="2400" b="1" dirty="0"/>
+                      <a:pPr algn="ctr" fontAlgn="ctr"/>
+                      <a:r>
+                        <a:rPr sz="1400" b="1" i="0">
+                          <a:solidFill>
+                            <a:srgbClr val="000000"/>
+                          </a:solidFill>
+                          <a:latin typeface="Calibri" panose="020F0502020204030204"/>
+                          <a:ea typeface="Calibri" panose="020F0502020204030204"/>
+                        </a:rPr>
+                        <a:t>8. Пушья</a:t>
+                      </a:r>
+                      <a:br>
+                        <a:rPr sz="1400" b="1" i="0">
+                          <a:solidFill>
+                            <a:srgbClr val="000000"/>
+                          </a:solidFill>
+                          <a:latin typeface="Calibri" panose="020F0502020204030204"/>
+                          <a:ea typeface="Calibri" panose="020F0502020204030204"/>
+                        </a:rPr>
+                      </a:br>
+                      <a:r>
+                        <a:rPr sz="1400" b="1" i="0">
+                          <a:solidFill>
+                            <a:srgbClr val="000000"/>
+                          </a:solidFill>
+                          <a:latin typeface="Calibri" panose="020F0502020204030204"/>
+                          <a:ea typeface="Calibri" panose="020F0502020204030204"/>
+                        </a:rPr>
+                        <a:t>113°56′ - 127°16′</a:t>
+                      </a:r>
+                      <a:br>
+                        <a:rPr sz="1400" b="1" i="0">
+                          <a:solidFill>
+                            <a:srgbClr val="000000"/>
+                          </a:solidFill>
+                          <a:latin typeface="Calibri" panose="020F0502020204030204"/>
+                          <a:ea typeface="Calibri" panose="020F0502020204030204"/>
+                        </a:rPr>
+                      </a:br>
+                      <a:r>
+                        <a:rPr sz="1400" b="1" i="0">
+                          <a:solidFill>
+                            <a:srgbClr val="000000"/>
+                          </a:solidFill>
+                          <a:latin typeface="Calibri" panose="020F0502020204030204"/>
+                          <a:ea typeface="Calibri" panose="020F0502020204030204"/>
+                        </a:rPr>
+                        <a:t>Близнецы → Рак</a:t>
+                      </a:r>
+                      <a:endParaRPr sz="1400" b="1" i="0">
+                        <a:solidFill>
+                          <a:srgbClr val="000000"/>
+                        </a:solidFill>
+                        <a:latin typeface="Calibri" panose="020F0502020204030204"/>
+                        <a:ea typeface="Calibri" panose="020F0502020204030204"/>
+                      </a:endParaRPr>
                     </a:p>
                   </a:txBody>
-                  <a:tcPr anchor="ctr">
+                  <a:tcPr marL="7937" marR="7937" marT="7937" marB="0" anchor="ctr" anchorCtr="0">
                     <a:lnL w="12700" cap="flat" cmpd="sng" algn="ctr">
                       <a:solidFill>
                         <a:schemeClr val="bg2">
@@ -6159,59 +6150,65 @@
                     <a:bodyPr/>
                     <a:lstStyle/>
                     <a:p>
-                      <a:pPr algn="ctr"/>
-                      <a:r>
-                        <a:rPr lang="ru-RU" sz="2000" b="1" kern="1200" dirty="0" smtClean="0">
-                          <a:solidFill>
-                            <a:schemeClr val="dk1"/>
-                          </a:solidFill>
-                          <a:effectLst/>
-                          <a:latin typeface="+mn-lt"/>
-                          <a:ea typeface="+mn-ea"/>
-                          <a:cs typeface="+mn-cs"/>
-                        </a:rPr>
-                        <a:t>17. </a:t>
-                      </a:r>
-                      <a:r>
-                        <a:rPr lang="ru-RU" sz="2000" b="1" kern="1200" dirty="0" err="1" smtClean="0">
-                          <a:solidFill>
-                            <a:schemeClr val="dk1"/>
-                          </a:solidFill>
-                          <a:effectLst/>
-                          <a:latin typeface="+mn-lt"/>
-                          <a:ea typeface="+mn-ea"/>
-                          <a:cs typeface="+mn-cs"/>
-                        </a:rPr>
-                        <a:t>Анурадха</a:t>
-                      </a:r>
-                      <a:endParaRPr lang="ru-RU" sz="2000" b="1" kern="1200" dirty="0" smtClean="0">
+                      <a:pPr algn="ctr" fontAlgn="ctr"/>
+                      <a:r>
+                        <a:rPr sz="1400" b="1" i="0">
+                          <a:solidFill>
+                            <a:srgbClr val="000000"/>
+                          </a:solidFill>
+                          <a:latin typeface="Calibri" panose="020F0502020204030204"/>
+                          <a:ea typeface="Calibri" panose="020F0502020204030204"/>
+                        </a:rPr>
+                        <a:t>17. Анурадха</a:t>
+                      </a:r>
+                      <a:br>
+                        <a:rPr sz="1400" b="1" i="0">
+                          <a:solidFill>
+                            <a:srgbClr val="000000"/>
+                          </a:solidFill>
+                          <a:latin typeface="Calibri" panose="020F0502020204030204"/>
+                          <a:ea typeface="Calibri" panose="020F0502020204030204"/>
+                        </a:rPr>
+                      </a:br>
+                      <a:r>
+                        <a:rPr sz="1400" b="1" i="0">
+                          <a:solidFill>
+                            <a:srgbClr val="000000"/>
+                          </a:solidFill>
+                          <a:latin typeface="Calibri" panose="020F0502020204030204"/>
+                          <a:ea typeface="Calibri" panose="020F0502020204030204"/>
+                        </a:rPr>
+                        <a:t>233°56′ - 247°16′</a:t>
+                      </a:r>
+                      <a:br>
+                        <a:rPr sz="1400" b="1" i="0">
+                          <a:solidFill>
+                            <a:srgbClr val="000000"/>
+                          </a:solidFill>
+                          <a:latin typeface="Calibri" panose="020F0502020204030204"/>
+                          <a:ea typeface="Calibri" panose="020F0502020204030204"/>
+                        </a:rPr>
+                      </a:br>
+                      <a:r>
+                        <a:rPr sz="1400" b="1" i="0">
+                          <a:solidFill>
+                            <a:srgbClr val="000000"/>
+                          </a:solidFill>
+                          <a:latin typeface="Calibri" panose="020F0502020204030204"/>
+                          <a:ea typeface="Calibri" panose="020F0502020204030204"/>
+                        </a:rPr>
+                        <a:t>Весы → Скорпион</a:t>
+                      </a:r>
+                      <a:endParaRPr sz="1400" b="1" i="0">
                         <a:solidFill>
-                          <a:schemeClr val="dk1"/>
+                          <a:srgbClr val="000000"/>
                         </a:solidFill>
-                        <a:effectLst/>
-                        <a:latin typeface="+mn-lt"/>
-                        <a:ea typeface="+mn-ea"/>
-                        <a:cs typeface="+mn-cs"/>
+                        <a:latin typeface="Calibri" panose="020F0502020204030204"/>
+                        <a:ea typeface="Calibri" panose="020F0502020204030204"/>
                       </a:endParaRPr>
                     </a:p>
-                    <a:p>
-                      <a:pPr algn="ctr"/>
-                      <a:r>
-                        <a:rPr lang="ru-RU" sz="2000" b="1" kern="1200" dirty="0" smtClean="0">
-                          <a:solidFill>
-                            <a:schemeClr val="dk1"/>
-                          </a:solidFill>
-                          <a:effectLst/>
-                          <a:latin typeface="+mn-lt"/>
-                          <a:ea typeface="+mn-ea"/>
-                          <a:cs typeface="+mn-cs"/>
-                        </a:rPr>
-                        <a:t>3°20´- 16°40´ Скорпиона</a:t>
-                      </a:r>
-                      <a:endParaRPr lang="ru-RU" sz="2000" b="1" dirty="0"/>
-                    </a:p>
                   </a:txBody>
-                  <a:tcPr anchor="ctr">
+                  <a:tcPr marL="7937" marR="7937" marT="7937" marB="0" anchor="ctr" anchorCtr="0">
                     <a:lnL w="12700" cap="flat" cmpd="sng" algn="ctr">
                       <a:solidFill>
                         <a:schemeClr val="bg2">
@@ -6241,59 +6238,65 @@
                     <a:bodyPr/>
                     <a:lstStyle/>
                     <a:p>
-                      <a:pPr algn="ctr"/>
-                      <a:r>
-                        <a:rPr lang="ru-RU" sz="2000" b="1" kern="1200" dirty="0" smtClean="0">
-                          <a:solidFill>
-                            <a:schemeClr val="dk1"/>
-                          </a:solidFill>
-                          <a:effectLst/>
-                          <a:latin typeface="+mn-lt"/>
-                          <a:ea typeface="+mn-ea"/>
-                          <a:cs typeface="+mn-cs"/>
-                        </a:rPr>
-                        <a:t>26. </a:t>
-                      </a:r>
-                      <a:r>
-                        <a:rPr lang="ru-RU" sz="2000" b="1" kern="1200" dirty="0" err="1" smtClean="0">
-                          <a:solidFill>
-                            <a:schemeClr val="dk1"/>
-                          </a:solidFill>
-                          <a:effectLst/>
-                          <a:latin typeface="+mn-lt"/>
-                          <a:ea typeface="+mn-ea"/>
-                          <a:cs typeface="+mn-cs"/>
-                        </a:rPr>
-                        <a:t>Уттарабхадрапада</a:t>
-                      </a:r>
-                      <a:endParaRPr lang="ru-RU" sz="2000" b="1" kern="1200" dirty="0" smtClean="0">
+                      <a:pPr algn="ctr" fontAlgn="ctr"/>
+                      <a:r>
+                        <a:rPr sz="1400" b="1" i="0">
+                          <a:solidFill>
+                            <a:srgbClr val="000000"/>
+                          </a:solidFill>
+                          <a:latin typeface="Calibri" panose="020F0502020204030204"/>
+                          <a:ea typeface="Calibri" panose="020F0502020204030204"/>
+                        </a:rPr>
+                        <a:t>26. Уттарабхадрапада</a:t>
+                      </a:r>
+                      <a:br>
+                        <a:rPr sz="1400" b="1" i="0">
+                          <a:solidFill>
+                            <a:srgbClr val="000000"/>
+                          </a:solidFill>
+                          <a:latin typeface="Calibri" panose="020F0502020204030204"/>
+                          <a:ea typeface="Calibri" panose="020F0502020204030204"/>
+                        </a:rPr>
+                      </a:br>
+                      <a:r>
+                        <a:rPr sz="1400" b="1" i="0">
+                          <a:solidFill>
+                            <a:srgbClr val="000000"/>
+                          </a:solidFill>
+                          <a:latin typeface="Calibri" panose="020F0502020204030204"/>
+                          <a:ea typeface="Calibri" panose="020F0502020204030204"/>
+                        </a:rPr>
+                        <a:t>353°56′ - 007°16′</a:t>
+                      </a:r>
+                      <a:br>
+                        <a:rPr sz="1400" b="1" i="0">
+                          <a:solidFill>
+                            <a:srgbClr val="000000"/>
+                          </a:solidFill>
+                          <a:latin typeface="Calibri" panose="020F0502020204030204"/>
+                          <a:ea typeface="Calibri" panose="020F0502020204030204"/>
+                        </a:rPr>
+                      </a:br>
+                      <a:r>
+                        <a:rPr sz="1400" b="1" i="0">
+                          <a:solidFill>
+                            <a:srgbClr val="000000"/>
+                          </a:solidFill>
+                          <a:latin typeface="Calibri" panose="020F0502020204030204"/>
+                          <a:ea typeface="Calibri" panose="020F0502020204030204"/>
+                        </a:rPr>
+                        <a:t>Рыбы</a:t>
+                      </a:r>
+                      <a:endParaRPr sz="1400" b="1" i="0">
                         <a:solidFill>
-                          <a:schemeClr val="dk1"/>
+                          <a:srgbClr val="000000"/>
                         </a:solidFill>
-                        <a:effectLst/>
-                        <a:latin typeface="+mn-lt"/>
-                        <a:ea typeface="+mn-ea"/>
-                        <a:cs typeface="+mn-cs"/>
+                        <a:latin typeface="Calibri" panose="020F0502020204030204"/>
+                        <a:ea typeface="Calibri" panose="020F0502020204030204"/>
                       </a:endParaRPr>
                     </a:p>
-                    <a:p>
-                      <a:pPr algn="ctr"/>
-                      <a:r>
-                        <a:rPr lang="ru-RU" sz="2000" b="1" kern="1200" dirty="0" smtClean="0">
-                          <a:solidFill>
-                            <a:schemeClr val="dk1"/>
-                          </a:solidFill>
-                          <a:effectLst/>
-                          <a:latin typeface="+mn-lt"/>
-                          <a:ea typeface="+mn-ea"/>
-                          <a:cs typeface="+mn-cs"/>
-                        </a:rPr>
-                        <a:t>3°20´- 16°40´ Рыб</a:t>
-                      </a:r>
-                      <a:endParaRPr lang="ru-RU" sz="2000" b="1" dirty="0"/>
-                    </a:p>
                   </a:txBody>
-                  <a:tcPr anchor="ctr">
+                  <a:tcPr marL="7937" marR="7937" marT="7937" marB="0" anchor="ctr" anchorCtr="0">
                     <a:lnL w="12700" cap="flat" cmpd="sng" algn="ctr">
                       <a:solidFill>
                         <a:schemeClr val="bg2">
@@ -6314,64 +6317,27 @@
                     <a:bodyPr/>
                     <a:lstStyle/>
                     <a:p>
-                      <a:pPr lvl="0" algn="ctr"/>
-                      <a:r>
-                        <a:rPr lang="ru-RU" sz="2000" b="1" kern="1200" dirty="0" smtClean="0">
-                          <a:solidFill>
-                            <a:schemeClr val="dk1"/>
-                          </a:solidFill>
-                          <a:effectLst/>
-                          <a:latin typeface="+mn-lt"/>
-                          <a:ea typeface="+mn-ea"/>
-                          <a:cs typeface="+mn-cs"/>
-                        </a:rPr>
-                        <a:t>9. </a:t>
-                      </a:r>
-                      <a:r>
-                        <a:rPr lang="ru-RU" sz="2000" b="1" kern="1200" dirty="0" err="1" smtClean="0">
-                          <a:solidFill>
-                            <a:schemeClr val="dk1"/>
-                          </a:solidFill>
-                          <a:effectLst/>
-                          <a:latin typeface="+mn-lt"/>
-                          <a:ea typeface="+mn-ea"/>
-                          <a:cs typeface="+mn-cs"/>
-                        </a:rPr>
-                        <a:t>Ашлеша</a:t>
-                      </a:r>
-                      <a:endParaRPr lang="ru-RU" sz="2000" b="1" kern="1200" dirty="0" smtClean="0">
+                      <a:pPr algn="ctr" fontAlgn="ctr"/>
+                      <a:r>
+                        <a:rPr sz="1400" b="1" i="0">
+                          <a:solidFill>
+                            <a:srgbClr val="000000"/>
+                          </a:solidFill>
+                          <a:latin typeface="Calibri" panose="020F0502020204030204"/>
+                          <a:ea typeface="Calibri" panose="020F0502020204030204"/>
+                        </a:rPr>
+                        <a:t>Меркурий</a:t>
+                      </a:r>
+                      <a:endParaRPr sz="1400" b="1" i="0">
                         <a:solidFill>
-                          <a:schemeClr val="dk1"/>
+                          <a:srgbClr val="000000"/>
                         </a:solidFill>
-                        <a:effectLst/>
-                        <a:latin typeface="+mn-lt"/>
-                        <a:ea typeface="+mn-ea"/>
-                        <a:cs typeface="+mn-cs"/>
-                      </a:endParaRPr>
-                    </a:p>
-                    <a:p>
-                      <a:pPr algn="ctr"/>
-                      <a:r>
-                        <a:rPr lang="ru-RU" sz="2000" b="1" kern="1200" dirty="0" smtClean="0">
-                          <a:solidFill>
-                            <a:schemeClr val="dk1"/>
-                          </a:solidFill>
-                          <a:effectLst/>
-                          <a:latin typeface="+mn-lt"/>
-                          <a:ea typeface="+mn-ea"/>
-                          <a:cs typeface="+mn-cs"/>
-                        </a:rPr>
-                        <a:t>16°40´- 30°00´Рака</a:t>
-                      </a:r>
-                      <a:endParaRPr lang="ru-RU" sz="2000" b="1" dirty="0">
-                        <a:effectLst/>
-                        <a:latin typeface="Calibri" panose="020F0502020204030204" pitchFamily="34" charset="0"/>
-                        <a:ea typeface="Calibri" panose="020F0502020204030204" pitchFamily="34" charset="0"/>
-                        <a:cs typeface="Times New Roman" panose="02020603050405020304" pitchFamily="18" charset="0"/>
+                        <a:latin typeface="Calibri" panose="020F0502020204030204"/>
+                        <a:ea typeface="Calibri" panose="020F0502020204030204"/>
                       </a:endParaRPr>
                     </a:p>
                   </a:txBody>
-                  <a:tcPr marL="68580" marR="68580" marT="0" marB="0" anchor="ctr">
+                  <a:tcPr marL="7937" marR="7937" marT="7937" marB="0" anchor="ctr" anchorCtr="0">
                     <a:lnR w="12700" cap="flat" cmpd="sng" algn="ctr">
                       <a:solidFill>
                         <a:schemeClr val="bg2">
@@ -6390,15 +6356,65 @@
                     <a:bodyPr/>
                     <a:lstStyle/>
                     <a:p>
-                      <a:pPr algn="ctr"/>
-                      <a:r>
-                        <a:rPr lang="ru-RU" sz="2400" b="1" dirty="0" smtClean="0"/>
-                        <a:t>Меркурий</a:t>
-                      </a:r>
-                      <a:endParaRPr lang="ru-RU" sz="2400" b="1" dirty="0"/>
+                      <a:pPr algn="ctr" fontAlgn="ctr"/>
+                      <a:r>
+                        <a:rPr sz="1400" b="1" i="0">
+                          <a:solidFill>
+                            <a:srgbClr val="000000"/>
+                          </a:solidFill>
+                          <a:latin typeface="Calibri" panose="020F0502020204030204"/>
+                          <a:ea typeface="Calibri" panose="020F0502020204030204"/>
+                        </a:rPr>
+                        <a:t>9. Ашлеша</a:t>
+                      </a:r>
+                      <a:br>
+                        <a:rPr sz="1400" b="1" i="0">
+                          <a:solidFill>
+                            <a:srgbClr val="000000"/>
+                          </a:solidFill>
+                          <a:latin typeface="Calibri" panose="020F0502020204030204"/>
+                          <a:ea typeface="Calibri" panose="020F0502020204030204"/>
+                        </a:rPr>
+                      </a:br>
+                      <a:r>
+                        <a:rPr sz="1400" b="1" i="0">
+                          <a:solidFill>
+                            <a:srgbClr val="000000"/>
+                          </a:solidFill>
+                          <a:latin typeface="Calibri" panose="020F0502020204030204"/>
+                          <a:ea typeface="Calibri" panose="020F0502020204030204"/>
+                        </a:rPr>
+                        <a:t>127°16′ - 140°36′</a:t>
+                      </a:r>
+                      <a:br>
+                        <a:rPr sz="1400" b="1" i="0">
+                          <a:solidFill>
+                            <a:srgbClr val="000000"/>
+                          </a:solidFill>
+                          <a:latin typeface="Calibri" panose="020F0502020204030204"/>
+                          <a:ea typeface="Calibri" panose="020F0502020204030204"/>
+                        </a:rPr>
+                      </a:br>
+                      <a:r>
+                        <a:rPr sz="1400" b="1" i="0">
+                          <a:solidFill>
+                            <a:srgbClr val="000000"/>
+                          </a:solidFill>
+                          <a:latin typeface="Calibri" panose="020F0502020204030204"/>
+                          <a:ea typeface="Calibri" panose="020F0502020204030204"/>
+                        </a:rPr>
+                        <a:t>Рак → Лев</a:t>
+                      </a:r>
+                      <a:endParaRPr sz="1400" b="1" i="0">
+                        <a:solidFill>
+                          <a:srgbClr val="000000"/>
+                        </a:solidFill>
+                        <a:latin typeface="Calibri" panose="020F0502020204030204"/>
+                        <a:ea typeface="Calibri" panose="020F0502020204030204"/>
+                      </a:endParaRPr>
                     </a:p>
                   </a:txBody>
-                  <a:tcPr anchor="ctr">
+                  <a:tcPr marL="7937" marR="7937" marT="7937" marB="0" anchor="ctr" anchorCtr="0">
                     <a:lnL w="12700" cap="flat" cmpd="sng" algn="ctr">
                       <a:solidFill>
                         <a:schemeClr val="bg2">
@@ -6428,59 +6444,65 @@
                     <a:bodyPr/>
                     <a:lstStyle/>
                     <a:p>
-                      <a:pPr algn="ctr"/>
-                      <a:r>
-                        <a:rPr lang="ru-RU" sz="2000" b="1" kern="1200" dirty="0" smtClean="0">
-                          <a:solidFill>
-                            <a:schemeClr val="dk1"/>
-                          </a:solidFill>
-                          <a:effectLst/>
-                          <a:latin typeface="+mn-lt"/>
-                          <a:ea typeface="+mn-ea"/>
-                          <a:cs typeface="+mn-cs"/>
-                        </a:rPr>
-                        <a:t>18. </a:t>
-                      </a:r>
-                      <a:r>
-                        <a:rPr lang="ru-RU" sz="2000" b="1" kern="1200" dirty="0" err="1" smtClean="0">
-                          <a:solidFill>
-                            <a:schemeClr val="dk1"/>
-                          </a:solidFill>
-                          <a:effectLst/>
-                          <a:latin typeface="+mn-lt"/>
-                          <a:ea typeface="+mn-ea"/>
-                          <a:cs typeface="+mn-cs"/>
-                        </a:rPr>
-                        <a:t>Джйештха</a:t>
-                      </a:r>
-                      <a:endParaRPr lang="ru-RU" sz="2000" b="1" kern="1200" dirty="0" smtClean="0">
+                      <a:pPr algn="ctr" fontAlgn="ctr"/>
+                      <a:r>
+                        <a:rPr sz="1400" b="1" i="0">
+                          <a:solidFill>
+                            <a:srgbClr val="000000"/>
+                          </a:solidFill>
+                          <a:latin typeface="Calibri" panose="020F0502020204030204"/>
+                          <a:ea typeface="Calibri" panose="020F0502020204030204"/>
+                        </a:rPr>
+                        <a:t>18. Джйештха</a:t>
+                      </a:r>
+                      <a:br>
+                        <a:rPr sz="1400" b="1" i="0">
+                          <a:solidFill>
+                            <a:srgbClr val="000000"/>
+                          </a:solidFill>
+                          <a:latin typeface="Calibri" panose="020F0502020204030204"/>
+                          <a:ea typeface="Calibri" panose="020F0502020204030204"/>
+                        </a:rPr>
+                      </a:br>
+                      <a:r>
+                        <a:rPr sz="1400" b="1" i="0">
+                          <a:solidFill>
+                            <a:srgbClr val="000000"/>
+                          </a:solidFill>
+                          <a:latin typeface="Calibri" panose="020F0502020204030204"/>
+                          <a:ea typeface="Calibri" panose="020F0502020204030204"/>
+                        </a:rPr>
+                        <a:t>247°16′ - 260°36′</a:t>
+                      </a:r>
+                      <a:br>
+                        <a:rPr sz="1400" b="1" i="0">
+                          <a:solidFill>
+                            <a:srgbClr val="000000"/>
+                          </a:solidFill>
+                          <a:latin typeface="Calibri" panose="020F0502020204030204"/>
+                          <a:ea typeface="Calibri" panose="020F0502020204030204"/>
+                        </a:rPr>
+                      </a:br>
+                      <a:r>
+                        <a:rPr sz="1400" b="1" i="0">
+                          <a:solidFill>
+                            <a:srgbClr val="000000"/>
+                          </a:solidFill>
+                          <a:latin typeface="Calibri" panose="020F0502020204030204"/>
+                          <a:ea typeface="Calibri" panose="020F0502020204030204"/>
+                        </a:rPr>
+                        <a:t>Скорпион</a:t>
+                      </a:r>
+                      <a:endParaRPr sz="1400" b="1" i="0">
                         <a:solidFill>
-                          <a:schemeClr val="dk1"/>
+                          <a:srgbClr val="000000"/>
                         </a:solidFill>
-                        <a:effectLst/>
-                        <a:latin typeface="+mn-lt"/>
-                        <a:ea typeface="+mn-ea"/>
-                        <a:cs typeface="+mn-cs"/>
+                        <a:latin typeface="Calibri" panose="020F0502020204030204"/>
+                        <a:ea typeface="Calibri" panose="020F0502020204030204"/>
                       </a:endParaRPr>
                     </a:p>
-                    <a:p>
-                      <a:pPr algn="ctr"/>
-                      <a:r>
-                        <a:rPr lang="ru-RU" sz="2000" b="1" kern="1200" dirty="0" smtClean="0">
-                          <a:solidFill>
-                            <a:schemeClr val="dk1"/>
-                          </a:solidFill>
-                          <a:effectLst/>
-                          <a:latin typeface="+mn-lt"/>
-                          <a:ea typeface="+mn-ea"/>
-                          <a:cs typeface="+mn-cs"/>
-                        </a:rPr>
-                        <a:t>16°40´- 30°00´Скорпиона</a:t>
-                      </a:r>
-                      <a:endParaRPr lang="ru-RU" sz="2000" b="1" dirty="0"/>
-                    </a:p>
                   </a:txBody>
-                  <a:tcPr anchor="ctr">
+                  <a:tcPr marL="7937" marR="7937" marT="7937" marB="0" anchor="ctr" anchorCtr="0">
                     <a:lnL w="12700" cap="flat" cmpd="sng" algn="ctr">
                       <a:solidFill>
                         <a:schemeClr val="bg2">
@@ -6510,59 +6532,65 @@
                     <a:bodyPr/>
                     <a:lstStyle/>
                     <a:p>
-                      <a:pPr algn="ctr"/>
-                      <a:r>
-                        <a:rPr lang="ru-RU" sz="2000" b="1" kern="1200" dirty="0" smtClean="0">
-                          <a:solidFill>
-                            <a:schemeClr val="dk1"/>
-                          </a:solidFill>
-                          <a:effectLst/>
-                          <a:latin typeface="+mn-lt"/>
-                          <a:ea typeface="+mn-ea"/>
-                          <a:cs typeface="+mn-cs"/>
-                        </a:rPr>
-                        <a:t>27. </a:t>
-                      </a:r>
-                      <a:r>
-                        <a:rPr lang="ru-RU" sz="2000" b="1" kern="1200" dirty="0" err="1" smtClean="0">
-                          <a:solidFill>
-                            <a:schemeClr val="dk1"/>
-                          </a:solidFill>
-                          <a:effectLst/>
-                          <a:latin typeface="+mn-lt"/>
-                          <a:ea typeface="+mn-ea"/>
-                          <a:cs typeface="+mn-cs"/>
-                        </a:rPr>
-                        <a:t>Ревати</a:t>
-                      </a:r>
-                      <a:endParaRPr lang="ru-RU" sz="2000" b="1" kern="1200" dirty="0" smtClean="0">
+                      <a:pPr algn="ctr" fontAlgn="ctr"/>
+                      <a:r>
+                        <a:rPr sz="1400" b="1" i="0">
+                          <a:solidFill>
+                            <a:srgbClr val="000000"/>
+                          </a:solidFill>
+                          <a:latin typeface="Calibri" panose="020F0502020204030204"/>
+                          <a:ea typeface="Calibri" panose="020F0502020204030204"/>
+                        </a:rPr>
+                        <a:t>27. Ревати</a:t>
+                      </a:r>
+                      <a:br>
+                        <a:rPr sz="1400" b="1" i="0">
+                          <a:solidFill>
+                            <a:srgbClr val="000000"/>
+                          </a:solidFill>
+                          <a:latin typeface="Calibri" panose="020F0502020204030204"/>
+                          <a:ea typeface="Calibri" panose="020F0502020204030204"/>
+                        </a:rPr>
+                      </a:br>
+                      <a:r>
+                        <a:rPr sz="1400" b="1" i="0">
+                          <a:solidFill>
+                            <a:srgbClr val="000000"/>
+                          </a:solidFill>
+                          <a:latin typeface="Calibri" panose="020F0502020204030204"/>
+                          <a:ea typeface="Calibri" panose="020F0502020204030204"/>
+                        </a:rPr>
+                        <a:t>007°16′ - 020°36′</a:t>
+                      </a:r>
+                      <a:br>
+                        <a:rPr sz="1400" b="1" i="0">
+                          <a:solidFill>
+                            <a:srgbClr val="000000"/>
+                          </a:solidFill>
+                          <a:latin typeface="Calibri" panose="020F0502020204030204"/>
+                          <a:ea typeface="Calibri" panose="020F0502020204030204"/>
+                        </a:rPr>
+                      </a:br>
+                      <a:r>
+                        <a:rPr sz="1400" b="1" i="0">
+                          <a:solidFill>
+                            <a:srgbClr val="000000"/>
+                          </a:solidFill>
+                          <a:latin typeface="Calibri" panose="020F0502020204030204"/>
+                          <a:ea typeface="Calibri" panose="020F0502020204030204"/>
+                        </a:rPr>
+                        <a:t>Рыбы</a:t>
+                      </a:r>
+                      <a:endParaRPr sz="1400" b="1" i="0">
                         <a:solidFill>
-                          <a:schemeClr val="dk1"/>
+                          <a:srgbClr val="000000"/>
                         </a:solidFill>
-                        <a:effectLst/>
-                        <a:latin typeface="+mn-lt"/>
-                        <a:ea typeface="+mn-ea"/>
-                        <a:cs typeface="+mn-cs"/>
+                        <a:latin typeface="Calibri" panose="020F0502020204030204"/>
+                        <a:ea typeface="Calibri" panose="020F0502020204030204"/>
                       </a:endParaRPr>
                     </a:p>
-                    <a:p>
-                      <a:pPr algn="ctr"/>
-                      <a:r>
-                        <a:rPr lang="ru-RU" sz="2000" b="1" kern="1200" dirty="0" smtClean="0">
-                          <a:solidFill>
-                            <a:schemeClr val="dk1"/>
-                          </a:solidFill>
-                          <a:effectLst/>
-                          <a:latin typeface="+mn-lt"/>
-                          <a:ea typeface="+mn-ea"/>
-                          <a:cs typeface="+mn-cs"/>
-                        </a:rPr>
-                        <a:t>16°40´- 30°00´Рыб</a:t>
-                      </a:r>
-                      <a:endParaRPr lang="ru-RU" sz="2000" b="1" dirty="0"/>
-                    </a:p>
                   </a:txBody>
-                  <a:tcPr anchor="ctr">
+                  <a:tcPr marL="7937" marR="7937" marT="7937" marB="0" anchor="ctr" anchorCtr="0">
                     <a:lnL w="12700" cap="flat" cmpd="sng" algn="ctr">
                       <a:solidFill>
                         <a:schemeClr val="bg2">
@@ -6582,11 +6610,6 @@
         </a:graphic>
       </p:graphicFrame>
     </p:spTree>
-    <p:extLst>
-      <p:ext uri="{BB962C8B-B14F-4D97-AF65-F5344CB8AC3E}">
-        <p14:creationId xmlns:p14="http://schemas.microsoft.com/office/powerpoint/2010/main" val="2657701620"/>
-      </p:ext>
-    </p:extLst>
   </p:cSld>
   <p:clrMapOvr>
     <a:masterClrMapping/>
@@ -6624,13 +6647,7 @@
           <p:cNvGraphicFramePr>
             <a:graphicFrameLocks noGrp="1"/>
           </p:cNvGraphicFramePr>
-          <p:nvPr>
-            <p:extLst>
-              <p:ext uri="{D42A27DB-BD31-4B8C-83A1-F6EECF244321}">
-                <p14:modId xmlns:p14="http://schemas.microsoft.com/office/powerpoint/2010/main" val="4161008167"/>
-              </p:ext>
-            </p:extLst>
-          </p:nvPr>
+          <p:nvPr/>
         </p:nvGraphicFramePr>
         <p:xfrm>
           <a:off x="0" y="633984"/>
@@ -7021,7 +7038,6 @@
                         <a:buSzTx/>
                         <a:buFontTx/>
                         <a:buNone/>
-                        <a:tabLst/>
                         <a:defRPr/>
                       </a:pPr>
                       <a:r>
@@ -7367,6 +7383,7 @@
                         <a:rPr lang="ru-RU" sz="2400" b="1" dirty="0" smtClean="0"/>
                         <a:t>Нежно-грозные, смешанные </a:t>
                       </a:r>
+                      <a:endParaRPr lang="ru-RU" sz="2400" b="1" dirty="0" smtClean="0"/>
                     </a:p>
                     <a:p>
                       <a:pPr algn="l"/>
@@ -7618,9 +7635,7 @@
       <p:sp>
         <p:nvSpPr>
           <p:cNvPr id="3" name="Заголовок 1"/>
-          <p:cNvSpPr txBox="1">
-            <a:spLocks/>
-          </p:cNvSpPr>
+          <p:cNvSpPr txBox="1"/>
           <p:nvPr/>
         </p:nvSpPr>
         <p:spPr>
@@ -7709,11 +7724,6 @@
         </p:txBody>
       </p:sp>
     </p:spTree>
-    <p:extLst>
-      <p:ext uri="{BB962C8B-B14F-4D97-AF65-F5344CB8AC3E}">
-        <p14:creationId xmlns:p14="http://schemas.microsoft.com/office/powerpoint/2010/main" val="3179319117"/>
-      </p:ext>
-    </p:extLst>
   </p:cSld>
   <p:clrMapOvr>
     <a:masterClrMapping/>
@@ -7977,6 +7987,9 @@
               </a:rPr>
               <a:t>.</a:t>
             </a:r>
+            <a:endParaRPr lang="ru-RU" sz="2600" b="1" dirty="0" smtClean="0">
+              <a:latin typeface="Cambria" panose="02040503050406030204" pitchFamily="18" charset="0"/>
+            </a:endParaRPr>
           </a:p>
           <a:p>
             <a:pPr marL="514350" indent="-514350" algn="just">
@@ -8130,6 +8143,9 @@
               </a:rPr>
               <a:t>. </a:t>
             </a:r>
+            <a:endParaRPr lang="ru-RU" sz="2600" b="1" dirty="0" smtClean="0">
+              <a:latin typeface="Cambria" panose="02040503050406030204" pitchFamily="18" charset="0"/>
+            </a:endParaRPr>
           </a:p>
           <a:p>
             <a:pPr marL="514350" indent="-514350" algn="just">
@@ -8277,15 +8293,13 @@
               </a:rPr>
               <a:t>. </a:t>
             </a:r>
+            <a:endParaRPr lang="ru-RU" sz="2600" b="1" dirty="0" smtClean="0">
+              <a:latin typeface="Cambria" panose="02040503050406030204" pitchFamily="18" charset="0"/>
+            </a:endParaRPr>
           </a:p>
         </p:txBody>
       </p:sp>
     </p:spTree>
-    <p:extLst>
-      <p:ext uri="{BB962C8B-B14F-4D97-AF65-F5344CB8AC3E}">
-        <p14:creationId xmlns:p14="http://schemas.microsoft.com/office/powerpoint/2010/main" val="3327596226"/>
-      </p:ext>
-    </p:extLst>
   </p:cSld>
   <p:clrMapOvr>
     <a:masterClrMapping/>
@@ -8343,12 +8357,14 @@
               <a:rPr lang="ru-RU" sz="2900" b="1" dirty="0" smtClean="0"/>
               <a:t>Номер лунного дня (с 1-го по 15-й) + </a:t>
             </a:r>
+            <a:endParaRPr lang="ru-RU" sz="2900" b="1" dirty="0" smtClean="0"/>
           </a:p>
           <a:p>
             <a:r>
               <a:rPr lang="ru-RU" sz="2900" b="1" dirty="0" smtClean="0"/>
               <a:t>Номер дня недели (считая Воскресенье за 1-й день) + </a:t>
             </a:r>
+            <a:endParaRPr lang="ru-RU" sz="2900" b="1" dirty="0" smtClean="0"/>
           </a:p>
           <a:p>
             <a:r>
@@ -8379,6 +8395,7 @@
               <a:rPr lang="ru-RU" sz="2900" b="1" dirty="0" smtClean="0"/>
               <a:t>) + </a:t>
             </a:r>
+            <a:endParaRPr lang="ru-RU" sz="2900" b="1" dirty="0" smtClean="0"/>
           </a:p>
           <a:p>
             <a:r>
@@ -8510,11 +8527,6 @@
         </p:txBody>
       </p:sp>
     </p:spTree>
-    <p:extLst>
-      <p:ext uri="{BB962C8B-B14F-4D97-AF65-F5344CB8AC3E}">
-        <p14:creationId xmlns:p14="http://schemas.microsoft.com/office/powerpoint/2010/main" val="2407529291"/>
-      </p:ext>
-    </p:extLst>
   </p:cSld>
   <p:clrMapOvr>
     <a:masterClrMapping/>
@@ -8572,7 +8584,7 @@
     </a:clrScheme>
     <a:fontScheme name="Ретро">
       <a:majorFont>
-        <a:latin typeface="Calibri Light" panose="020F0302020204030204"/>
+        <a:latin typeface="Calibri Light"/>
         <a:ea typeface=""/>
         <a:cs typeface=""/>
         <a:font script="Jpan" typeface="ＭＳ Ｐゴシック"/>
@@ -8607,7 +8619,7 @@
         <a:font script="Geor" typeface="Sylfaen"/>
       </a:majorFont>
       <a:minorFont>
-        <a:latin typeface="Calibri" panose="020F0502020204030204"/>
+        <a:latin typeface="Calibri"/>
         <a:ea typeface=""/>
         <a:cs typeface=""/>
         <a:font script="Jpan" typeface="ＭＳ Ｐゴシック"/>
@@ -8802,11 +8814,9 @@
       </a:bgFillStyleLst>
     </a:fmtScheme>
   </a:themeElements>
-  <a:objectDefaults/>
-  <a:extraClrSchemeLst/>
   <a:extLst>
     <a:ext uri="{05A4C25C-085E-4340-85A3-A5531E510DB2}">
-      <thm15:themeFamily xmlns:thm15="http://schemas.microsoft.com/office/thememl/2012/main" name="Retrospect" id="{5F128B03-DCCA-4EEB-AB3B-CF2899314A46}" vid="{9CC26709-368C-4D72-9060-94E5B3FF3CD6}"/>
+      <thm15:themeFamily xmlns:thm15="http://schemas.microsoft.com/office/thememl/2012/main" name="Office Theme" id="{62F939B6-93AF-4DB8-9C6B-D6C7DFDC589F}" vid="{4A3C46E8-61CC-4603-A589-7422A47A8E4A}"/>
     </a:ext>
   </a:extLst>
 </a:theme>
